--- a/demo/lender-demo/Homiquity_Lender_Demo.pptx
+++ b/demo/lender-demo/Homiquity_Lender_Demo.pptx
@@ -20,9 +20,11 @@
     <p:sldId id="268" r:id="rId14"/>
     <p:sldId id="269" r:id="rId15"/>
     <p:sldId id="270" r:id="rId16"/>
+    <p:sldId id="271" r:id="rId17"/>
+    <p:sldId id="272" r:id="rId18"/>
   </p:sldIdLst>
   <p:notesMasterIdLst>
-    <p:notesMasterId r:id="rId17"/>
+    <p:notesMasterId r:id="rId19"/>
   </p:notesMasterIdLst>
   <p:sldSz cx="12191695" cy="6858000"/>
   <p:notesSz cx="6858000" cy="12191695"/>
@@ -1068,6 +1070,182 @@
             <a:fld id="{F7021451-1387-4CA6-816F-3879F97B5CBC}" type="slidenum">
               <a:rPr lang="en-US"/>
               <a:t>15</a:t>
+            </a:fld>
+            <a:endParaRPr lang="en-US"/>
+          </a:p>
+        </p:txBody>
+      </p:sp>
+    </p:spTree>
+    <p:extLst>
+      <p:ext uri="{BB962C8B-B14F-4D97-AF65-F5344CB8AC3E}">
+        <p14:creationId xmlns:p14="http://schemas.microsoft.com/office/powerpoint/2010/main" val="1024086991"/>
+      </p:ext>
+    </p:extLst>
+  </p:cSld>
+  <p:clrMapOvr>
+    <a:masterClrMapping/>
+  </p:clrMapOvr>
+</p:notes>
+</file>
+
+<file path=ppt/notesSlides/notesSlide16.xml><?xml version="1.0" encoding="utf-8"?>
+<p:notes xmlns:a="http://schemas.openxmlformats.org/drawingml/2006/main" xmlns:r="http://schemas.openxmlformats.org/officeDocument/2006/relationships" xmlns:p="http://schemas.openxmlformats.org/presentationml/2006/main">
+  <p:cSld>
+    <p:spTree>
+      <p:nvGrpSpPr>
+        <p:cNvPr id="1" name=""/>
+        <p:cNvGrpSpPr/>
+        <p:nvPr/>
+      </p:nvGrpSpPr>
+      <p:grpSpPr>
+        <a:xfrm>
+          <a:off x="0" y="0"/>
+          <a:ext cx="0" cy="0"/>
+          <a:chOff x="0" y="0"/>
+          <a:chExt cx="0" cy="0"/>
+        </a:xfrm>
+      </p:grpSpPr>
+      <p:sp>
+        <p:nvSpPr>
+          <p:cNvPr id="2" name="Slide Image Placeholder 1"/>
+          <p:cNvSpPr>
+            <a:spLocks noGrp="1" noRot="1" noChangeAspect="1"/>
+          </p:cNvSpPr>
+          <p:nvPr>
+            <p:ph type="sldImg"/>
+          </p:nvPr>
+        </p:nvSpPr>
+        <p:spPr/>
+      </p:sp>
+      <p:sp>
+        <p:nvSpPr>
+          <p:cNvPr id="3" name="Notes Placeholder 2"/>
+          <p:cNvSpPr>
+            <a:spLocks noGrp="1"/>
+          </p:cNvSpPr>
+          <p:nvPr>
+            <p:ph type="body" idx="1"/>
+          </p:nvPr>
+        </p:nvSpPr>
+        <p:spPr/>
+        <p:txBody>
+          <a:bodyPr/>
+          <a:lstStyle/>
+          <a:p>
+            <a:r>
+              <a:rPr lang="en-US" dirty="0"/>
+              <a:t/>
+            </a:r>
+            <a:endParaRPr lang="en-US" dirty="0"/>
+          </a:p>
+        </p:txBody>
+      </p:sp>
+      <p:sp>
+        <p:nvSpPr>
+          <p:cNvPr id="4" name="Slide Number Placeholder 3"/>
+          <p:cNvSpPr>
+            <a:spLocks noGrp="1"/>
+          </p:cNvSpPr>
+          <p:nvPr>
+            <p:ph type="sldNum" sz="quarter" idx="10"/>
+          </p:nvPr>
+        </p:nvSpPr>
+        <p:spPr/>
+        <p:txBody>
+          <a:bodyPr/>
+          <a:lstStyle/>
+          <a:p>
+            <a:fld id="{F7021451-1387-4CA6-816F-3879F97B5CBC}" type="slidenum">
+              <a:rPr lang="en-US"/>
+              <a:t>16</a:t>
+            </a:fld>
+            <a:endParaRPr lang="en-US"/>
+          </a:p>
+        </p:txBody>
+      </p:sp>
+    </p:spTree>
+    <p:extLst>
+      <p:ext uri="{BB962C8B-B14F-4D97-AF65-F5344CB8AC3E}">
+        <p14:creationId xmlns:p14="http://schemas.microsoft.com/office/powerpoint/2010/main" val="1024086991"/>
+      </p:ext>
+    </p:extLst>
+  </p:cSld>
+  <p:clrMapOvr>
+    <a:masterClrMapping/>
+  </p:clrMapOvr>
+</p:notes>
+</file>
+
+<file path=ppt/notesSlides/notesSlide17.xml><?xml version="1.0" encoding="utf-8"?>
+<p:notes xmlns:a="http://schemas.openxmlformats.org/drawingml/2006/main" xmlns:r="http://schemas.openxmlformats.org/officeDocument/2006/relationships" xmlns:p="http://schemas.openxmlformats.org/presentationml/2006/main">
+  <p:cSld>
+    <p:spTree>
+      <p:nvGrpSpPr>
+        <p:cNvPr id="1" name=""/>
+        <p:cNvGrpSpPr/>
+        <p:nvPr/>
+      </p:nvGrpSpPr>
+      <p:grpSpPr>
+        <a:xfrm>
+          <a:off x="0" y="0"/>
+          <a:ext cx="0" cy="0"/>
+          <a:chOff x="0" y="0"/>
+          <a:chExt cx="0" cy="0"/>
+        </a:xfrm>
+      </p:grpSpPr>
+      <p:sp>
+        <p:nvSpPr>
+          <p:cNvPr id="2" name="Slide Image Placeholder 1"/>
+          <p:cNvSpPr>
+            <a:spLocks noGrp="1" noRot="1" noChangeAspect="1"/>
+          </p:cNvSpPr>
+          <p:nvPr>
+            <p:ph type="sldImg"/>
+          </p:nvPr>
+        </p:nvSpPr>
+        <p:spPr/>
+      </p:sp>
+      <p:sp>
+        <p:nvSpPr>
+          <p:cNvPr id="3" name="Notes Placeholder 2"/>
+          <p:cNvSpPr>
+            <a:spLocks noGrp="1"/>
+          </p:cNvSpPr>
+          <p:nvPr>
+            <p:ph type="body" idx="1"/>
+          </p:nvPr>
+        </p:nvSpPr>
+        <p:spPr/>
+        <p:txBody>
+          <a:bodyPr/>
+          <a:lstStyle/>
+          <a:p>
+            <a:r>
+              <a:rPr lang="en-US" dirty="0"/>
+              <a:t/>
+            </a:r>
+            <a:endParaRPr lang="en-US" dirty="0"/>
+          </a:p>
+        </p:txBody>
+      </p:sp>
+      <p:sp>
+        <p:nvSpPr>
+          <p:cNvPr id="4" name="Slide Number Placeholder 3"/>
+          <p:cNvSpPr>
+            <a:spLocks noGrp="1"/>
+          </p:cNvSpPr>
+          <p:nvPr>
+            <p:ph type="sldNum" sz="quarter" idx="10"/>
+          </p:nvPr>
+        </p:nvSpPr>
+        <p:spPr/>
+        <p:txBody>
+          <a:bodyPr/>
+          <a:lstStyle/>
+          <a:p>
+            <a:fld id="{F7021451-1387-4CA6-816F-3879F97B5CBC}" type="slidenum">
+              <a:rPr lang="en-US"/>
+              <a:t>17</a:t>
             </a:fld>
             <a:endParaRPr lang="en-US"/>
           </a:p>
@@ -3780,7 +3958,7 @@
                 <a:ea typeface="Calibri" pitchFamily="34" charset="-122"/>
                 <a:cs typeface="Calibri" pitchFamily="34" charset="-120"/>
               </a:rPr>
-              <a:t>THE VALUE TO YOU</a:t>
+              <a:t>SEE IT LIVE — REAL PRODUCT</a:t>
             </a:r>
             <a:endParaRPr lang="en-US" sz="1200" dirty="0"/>
           </a:p>
@@ -3819,7 +3997,7 @@
                 <a:ea typeface="Cambria" pitchFamily="34" charset="-122"/>
                 <a:cs typeface="Cambria" pitchFamily="34" charset="-120"/>
               </a:rPr>
-              <a:t>Three reasons a lender says yes</a:t>
+              <a:t>The borrower experience</a:t>
             </a:r>
             <a:endParaRPr lang="en-US" sz="3000" dirty="0"/>
           </a:p>
@@ -3833,18 +4011,23 @@
         </p:nvSpPr>
         <p:spPr>
           <a:xfrm>
-            <a:off x="640080" y="1920240"/>
-            <a:ext cx="3393338" cy="3749040"/>
+            <a:off x="548640" y="1600200"/>
+            <a:ext cx="5394960" cy="3710178"/>
           </a:xfrm>
           <a:prstGeom prst="roundRect">
             <a:avLst>
-              <a:gd name="adj" fmla="val 3773"/>
+              <a:gd name="adj" fmla="val 1725"/>
             </a:avLst>
           </a:prstGeom>
           <a:solidFill>
-            <a:srgbClr val="E9F6F0"/>
+            <a:srgbClr val="FFFFFF"/>
           </a:solidFill>
-          <a:ln/>
+          <a:ln w="12700">
+            <a:solidFill>
+              <a:srgbClr val="E2E8F0"/>
+            </a:solidFill>
+            <a:prstDash val="solid"/>
+          </a:ln>
           <a:effectLst>
             <a:outerShdw sx="100000" sy="100000" kx="0" ky="0" algn="bl" rotWithShape="0" blurRad="88900" dist="38100" dir="5400000">
               <a:srgbClr val="9AA6B8">
@@ -3862,21 +4045,61 @@
         </p:nvSpPr>
         <p:spPr>
           <a:xfrm>
-            <a:off x="1879549" y="2377440"/>
-            <a:ext cx="914400" cy="914400"/>
+            <a:off x="731520" y="1719072"/>
+            <a:ext cx="82296" cy="82296"/>
           </a:xfrm>
           <a:prstGeom prst="ellipse">
             <a:avLst/>
           </a:prstGeom>
           <a:solidFill>
-            <a:srgbClr val="0B7A5E"/>
+            <a:srgbClr val="F87171"/>
+          </a:solidFill>
+          <a:ln/>
+        </p:spPr>
+      </p:sp>
+      <p:sp>
+        <p:nvSpPr>
+          <p:cNvPr id="6" name="Shape 4"/>
+          <p:cNvSpPr/>
+          <p:nvPr/>
+        </p:nvSpPr>
+        <p:spPr>
+          <a:xfrm>
+            <a:off x="886968" y="1719072"/>
+            <a:ext cx="82296" cy="82296"/>
+          </a:xfrm>
+          <a:prstGeom prst="ellipse">
+            <a:avLst/>
+          </a:prstGeom>
+          <a:solidFill>
+            <a:srgbClr val="FBBF24"/>
+          </a:solidFill>
+          <a:ln/>
+        </p:spPr>
+      </p:sp>
+      <p:sp>
+        <p:nvSpPr>
+          <p:cNvPr id="7" name="Shape 5"/>
+          <p:cNvSpPr/>
+          <p:nvPr/>
+        </p:nvSpPr>
+        <p:spPr>
+          <a:xfrm>
+            <a:off x="1042416" y="1719072"/>
+            <a:ext cx="82296" cy="82296"/>
+          </a:xfrm>
+          <a:prstGeom prst="ellipse">
+            <a:avLst/>
+          </a:prstGeom>
+          <a:solidFill>
+            <a:srgbClr val="34D399"/>
           </a:solidFill>
           <a:ln/>
         </p:spPr>
       </p:sp>
       <p:pic>
         <p:nvPicPr>
-          <p:cNvPr id="6" name="Image 0" descr="preencoded.png">    </p:cNvPr>
+          <p:cNvPr id="8" name="Image 0" descr="/Users/ammrebarakat/Developer/MortgageStream/demo/lender-demo/screenshots/01-landing.png">    </p:cNvPr>
           <p:cNvPicPr>
             <a:picLocks noChangeAspect="1"/>
           </p:cNvPicPr>
@@ -3890,8 +4113,8 @@
         </p:blipFill>
         <p:spPr>
           <a:xfrm>
-            <a:off x="2135581" y="2633472"/>
-            <a:ext cx="402336" cy="402336"/>
+            <a:off x="658368" y="1911096"/>
+            <a:ext cx="5175504" cy="3234690"/>
           </a:xfrm>
           <a:prstGeom prst="rect">
             <a:avLst/>
@@ -3900,72 +4123,30 @@
       </p:pic>
       <p:sp>
         <p:nvSpPr>
-          <p:cNvPr id="7" name="Text 4"/>
-          <p:cNvSpPr/>
-          <p:nvPr/>
-        </p:nvSpPr>
-        <p:spPr>
-          <a:xfrm>
-            <a:off x="640080" y="3520440"/>
-            <a:ext cx="3393338" cy="457200"/>
-          </a:xfrm>
-          <a:prstGeom prst="rect">
-            <a:avLst/>
-          </a:prstGeom>
-          <a:noFill/>
-          <a:ln/>
-        </p:spPr>
-        <p:txBody>
-          <a:bodyPr wrap="square" lIns="0" tIns="0" rIns="0" bIns="0" rtlCol="0" anchor="ctr"/>
+          <p:cNvPr id="9" name="Text 6"/>
+          <p:cNvSpPr/>
+          <p:nvPr/>
+        </p:nvSpPr>
+        <p:spPr>
+          <a:xfrm>
+            <a:off x="548640" y="5365242"/>
+            <a:ext cx="5394960" cy="457200"/>
+          </a:xfrm>
+          <a:prstGeom prst="rect">
+            <a:avLst/>
+          </a:prstGeom>
+          <a:noFill/>
+          <a:ln/>
+        </p:spPr>
+        <p:txBody>
+          <a:bodyPr wrap="square" lIns="0" tIns="0" rIns="0" bIns="0" rtlCol="0" anchor="t"/>
           <a:lstStyle/>
           <a:p>
             <a:pPr algn="ctr" indent="0" marL="0">
               <a:buNone/>
             </a:pPr>
             <a:r>
-              <a:rPr lang="en-US" sz="2200" b="1" dirty="0">
-                <a:solidFill>
-                  <a:srgbClr val="0F1729"/>
-                </a:solidFill>
-                <a:latin typeface="Cambria" pitchFamily="34" charset="0"/>
-                <a:ea typeface="Cambria" pitchFamily="34" charset="-122"/>
-                <a:cs typeface="Cambria" pitchFamily="34" charset="-120"/>
-              </a:rPr>
-              <a:t>Clean files</a:t>
-            </a:r>
-            <a:endParaRPr lang="en-US" sz="2200" dirty="0"/>
-          </a:p>
-        </p:txBody>
-      </p:sp>
-      <p:sp>
-        <p:nvSpPr>
-          <p:cNvPr id="8" name="Text 5"/>
-          <p:cNvSpPr/>
-          <p:nvPr/>
-        </p:nvSpPr>
-        <p:spPr>
-          <a:xfrm>
-            <a:off x="960120" y="4114800"/>
-            <a:ext cx="2753258" cy="1371600"/>
-          </a:xfrm>
-          <a:prstGeom prst="rect">
-            <a:avLst/>
-          </a:prstGeom>
-          <a:noFill/>
-          <a:ln/>
-        </p:spPr>
-        <p:txBody>
-          <a:bodyPr wrap="square" lIns="0" tIns="0" rIns="0" bIns="0" rtlCol="0" anchor="ctr"/>
-          <a:lstStyle/>
-          <a:p>
-            <a:pPr algn="ctr" indent="0" marL="0">
-              <a:lnSpc>
-                <a:spcPct val="110000"/>
-              </a:lnSpc>
-              <a:buNone/>
-            </a:pPr>
-            <a:r>
-              <a:rPr lang="en-US" sz="1350" dirty="0">
+              <a:rPr lang="en-US" sz="1200" dirty="0">
                 <a:solidFill>
                   <a:srgbClr val="5B6472"/>
                 </a:solidFill>
@@ -3973,32 +4154,37 @@
                 <a:ea typeface="Calibri" pitchFamily="34" charset="-122"/>
                 <a:cs typeface="Calibri" pitchFamily="34" charset="-120"/>
               </a:rPr>
-              <a:t>Standards-valid, pre-flighted packages underwrite faster and bounce less — lower cost per loan, higher pull-through.</a:t>
-            </a:r>
-            <a:endParaRPr lang="en-US" sz="1350" dirty="0"/>
-          </a:p>
-        </p:txBody>
-      </p:sp>
-      <p:sp>
-        <p:nvSpPr>
-          <p:cNvPr id="9" name="Shape 6"/>
-          <p:cNvSpPr/>
-          <p:nvPr/>
-        </p:nvSpPr>
-        <p:spPr>
-          <a:xfrm>
-            <a:off x="4399178" y="1920240"/>
-            <a:ext cx="3393338" cy="3749040"/>
+              <a:t>Persona funnel + free decision tools — consented borrowers, captured early</a:t>
+            </a:r>
+            <a:endParaRPr lang="en-US" sz="1200" dirty="0"/>
+          </a:p>
+        </p:txBody>
+      </p:sp>
+      <p:sp>
+        <p:nvSpPr>
+          <p:cNvPr id="10" name="Shape 7"/>
+          <p:cNvSpPr/>
+          <p:nvPr/>
+        </p:nvSpPr>
+        <p:spPr>
+          <a:xfrm>
+            <a:off x="6309360" y="1600200"/>
+            <a:ext cx="5394960" cy="3710178"/>
           </a:xfrm>
           <a:prstGeom prst="roundRect">
             <a:avLst>
-              <a:gd name="adj" fmla="val 3773"/>
+              <a:gd name="adj" fmla="val 1725"/>
             </a:avLst>
           </a:prstGeom>
           <a:solidFill>
-            <a:srgbClr val="EEF2FB"/>
+            <a:srgbClr val="FFFFFF"/>
           </a:solidFill>
-          <a:ln/>
+          <a:ln w="12700">
+            <a:solidFill>
+              <a:srgbClr val="E2E8F0"/>
+            </a:solidFill>
+            <a:prstDash val="solid"/>
+          </a:ln>
           <a:effectLst>
             <a:outerShdw sx="100000" sy="100000" kx="0" ky="0" algn="bl" rotWithShape="0" blurRad="88900" dist="38100" dir="5400000">
               <a:srgbClr val="9AA6B8">
@@ -4010,27 +4196,67 @@
       </p:sp>
       <p:sp>
         <p:nvSpPr>
-          <p:cNvPr id="10" name="Shape 7"/>
-          <p:cNvSpPr/>
-          <p:nvPr/>
-        </p:nvSpPr>
-        <p:spPr>
-          <a:xfrm>
-            <a:off x="5638648" y="2377440"/>
-            <a:ext cx="914400" cy="914400"/>
+          <p:cNvPr id="11" name="Shape 8"/>
+          <p:cNvSpPr/>
+          <p:nvPr/>
+        </p:nvSpPr>
+        <p:spPr>
+          <a:xfrm>
+            <a:off x="6492240" y="1719072"/>
+            <a:ext cx="82296" cy="82296"/>
           </a:xfrm>
           <a:prstGeom prst="ellipse">
             <a:avLst/>
           </a:prstGeom>
           <a:solidFill>
-            <a:srgbClr val="1C3A8F"/>
+            <a:srgbClr val="F87171"/>
+          </a:solidFill>
+          <a:ln/>
+        </p:spPr>
+      </p:sp>
+      <p:sp>
+        <p:nvSpPr>
+          <p:cNvPr id="12" name="Shape 9"/>
+          <p:cNvSpPr/>
+          <p:nvPr/>
+        </p:nvSpPr>
+        <p:spPr>
+          <a:xfrm>
+            <a:off x="6647688" y="1719072"/>
+            <a:ext cx="82296" cy="82296"/>
+          </a:xfrm>
+          <a:prstGeom prst="ellipse">
+            <a:avLst/>
+          </a:prstGeom>
+          <a:solidFill>
+            <a:srgbClr val="FBBF24"/>
+          </a:solidFill>
+          <a:ln/>
+        </p:spPr>
+      </p:sp>
+      <p:sp>
+        <p:nvSpPr>
+          <p:cNvPr id="13" name="Shape 10"/>
+          <p:cNvSpPr/>
+          <p:nvPr/>
+        </p:nvSpPr>
+        <p:spPr>
+          <a:xfrm>
+            <a:off x="6803136" y="1719072"/>
+            <a:ext cx="82296" cy="82296"/>
+          </a:xfrm>
+          <a:prstGeom prst="ellipse">
+            <a:avLst/>
+          </a:prstGeom>
+          <a:solidFill>
+            <a:srgbClr val="34D399"/>
           </a:solidFill>
           <a:ln/>
         </p:spPr>
       </p:sp>
       <p:pic>
         <p:nvPicPr>
-          <p:cNvPr id="11" name="Image 1" descr="preencoded.png">    </p:cNvPr>
+          <p:cNvPr id="14" name="Image 1" descr="/Users/ammrebarakat/Developer/MortgageStream/demo/lender-demo/screenshots/07-loan-options.png">    </p:cNvPr>
           <p:cNvPicPr>
             <a:picLocks noChangeAspect="1"/>
           </p:cNvPicPr>
@@ -4044,8 +4270,8 @@
         </p:blipFill>
         <p:spPr>
           <a:xfrm>
-            <a:off x="5894680" y="2633472"/>
-            <a:ext cx="402336" cy="402336"/>
+            <a:off x="6419088" y="1911096"/>
+            <a:ext cx="5175504" cy="3234690"/>
           </a:xfrm>
           <a:prstGeom prst="rect">
             <a:avLst/>
@@ -4054,72 +4280,30 @@
       </p:pic>
       <p:sp>
         <p:nvSpPr>
-          <p:cNvPr id="12" name="Text 8"/>
-          <p:cNvSpPr/>
-          <p:nvPr/>
-        </p:nvSpPr>
-        <p:spPr>
-          <a:xfrm>
-            <a:off x="4399178" y="3520440"/>
-            <a:ext cx="3393338" cy="457200"/>
-          </a:xfrm>
-          <a:prstGeom prst="rect">
-            <a:avLst/>
-          </a:prstGeom>
-          <a:noFill/>
-          <a:ln/>
-        </p:spPr>
-        <p:txBody>
-          <a:bodyPr wrap="square" lIns="0" tIns="0" rIns="0" bIns="0" rtlCol="0" anchor="ctr"/>
+          <p:cNvPr id="15" name="Text 11"/>
+          <p:cNvSpPr/>
+          <p:nvPr/>
+        </p:nvSpPr>
+        <p:spPr>
+          <a:xfrm>
+            <a:off x="6309360" y="5365242"/>
+            <a:ext cx="5394960" cy="457200"/>
+          </a:xfrm>
+          <a:prstGeom prst="rect">
+            <a:avLst/>
+          </a:prstGeom>
+          <a:noFill/>
+          <a:ln/>
+        </p:spPr>
+        <p:txBody>
+          <a:bodyPr wrap="square" lIns="0" tIns="0" rIns="0" bIns="0" rtlCol="0" anchor="t"/>
           <a:lstStyle/>
           <a:p>
             <a:pPr algn="ctr" indent="0" marL="0">
               <a:buNone/>
             </a:pPr>
             <a:r>
-              <a:rPr lang="en-US" sz="2200" b="1" dirty="0">
-                <a:solidFill>
-                  <a:srgbClr val="0F1729"/>
-                </a:solidFill>
-                <a:latin typeface="Cambria" pitchFamily="34" charset="0"/>
-                <a:ea typeface="Cambria" pitchFamily="34" charset="-122"/>
-                <a:cs typeface="Cambria" pitchFamily="34" charset="-120"/>
-              </a:rPr>
-              <a:t>Volume</a:t>
-            </a:r>
-            <a:endParaRPr lang="en-US" sz="2200" dirty="0"/>
-          </a:p>
-        </p:txBody>
-      </p:sp>
-      <p:sp>
-        <p:nvSpPr>
-          <p:cNvPr id="13" name="Text 9"/>
-          <p:cNvSpPr/>
-          <p:nvPr/>
-        </p:nvSpPr>
-        <p:spPr>
-          <a:xfrm>
-            <a:off x="4719218" y="4114800"/>
-            <a:ext cx="2753258" cy="1371600"/>
-          </a:xfrm>
-          <a:prstGeom prst="rect">
-            <a:avLst/>
-          </a:prstGeom>
-          <a:noFill/>
-          <a:ln/>
-        </p:spPr>
-        <p:txBody>
-          <a:bodyPr wrap="square" lIns="0" tIns="0" rIns="0" bIns="0" rtlCol="0" anchor="ctr"/>
-          <a:lstStyle/>
-          <a:p>
-            <a:pPr algn="ctr" indent="0" marL="0">
-              <a:lnSpc>
-                <a:spcPct val="110000"/>
-              </a:lnSpc>
-              <a:buNone/>
-            </a:pPr>
-            <a:r>
-              <a:rPr lang="en-US" sz="1350" dirty="0">
+              <a:rPr lang="en-US" sz="1200" dirty="0">
                 <a:solidFill>
                   <a:srgbClr val="5B6472"/>
                 </a:solidFill>
@@ -4127,169 +4311,15 @@
                 <a:ea typeface="Calibri" pitchFamily="34" charset="-122"/>
                 <a:cs typeface="Calibri" pitchFamily="34" charset="-120"/>
               </a:rPr>
-              <a:t>A purpose-built funnel feeds you a steady flow of qualified, consented borrowers you didn't have to source.</a:t>
-            </a:r>
-            <a:endParaRPr lang="en-US" sz="1350" dirty="0"/>
-          </a:p>
-        </p:txBody>
-      </p:sp>
-      <p:sp>
-        <p:nvSpPr>
-          <p:cNvPr id="14" name="Shape 10"/>
-          <p:cNvSpPr/>
-          <p:nvPr/>
-        </p:nvSpPr>
-        <p:spPr>
-          <a:xfrm>
-            <a:off x="8158277" y="1920240"/>
-            <a:ext cx="3393338" cy="3749040"/>
-          </a:xfrm>
-          <a:prstGeom prst="roundRect">
-            <a:avLst>
-              <a:gd name="adj" fmla="val 3773"/>
-            </a:avLst>
-          </a:prstGeom>
-          <a:solidFill>
-            <a:srgbClr val="E9F6F0"/>
-          </a:solidFill>
-          <a:ln/>
-          <a:effectLst>
-            <a:outerShdw sx="100000" sy="100000" kx="0" ky="0" algn="bl" rotWithShape="0" blurRad="88900" dist="38100" dir="5400000">
-              <a:srgbClr val="9AA6B8">
-                <a:alpha val="28000"/>
-              </a:srgbClr>
-            </a:outerShdw>
-          </a:effectLst>
-        </p:spPr>
-      </p:sp>
-      <p:sp>
-        <p:nvSpPr>
-          <p:cNvPr id="15" name="Shape 11"/>
-          <p:cNvSpPr/>
-          <p:nvPr/>
-        </p:nvSpPr>
-        <p:spPr>
-          <a:xfrm>
-            <a:off x="9397746" y="2377440"/>
-            <a:ext cx="914400" cy="914400"/>
-          </a:xfrm>
-          <a:prstGeom prst="ellipse">
-            <a:avLst/>
-          </a:prstGeom>
-          <a:solidFill>
-            <a:srgbClr val="0B7A5E"/>
-          </a:solidFill>
-          <a:ln/>
-        </p:spPr>
-      </p:sp>
-      <p:pic>
-        <p:nvPicPr>
-          <p:cNvPr id="16" name="Image 2" descr="preencoded.png">    </p:cNvPr>
-          <p:cNvPicPr>
-            <a:picLocks noChangeAspect="1"/>
-          </p:cNvPicPr>
-          <p:nvPr/>
-        </p:nvPicPr>
-        <p:blipFill>
-          <a:blip r:embed="rId3"/>
-          <a:stretch>
-            <a:fillRect/>
-          </a:stretch>
-        </p:blipFill>
-        <p:spPr>
-          <a:xfrm>
-            <a:off x="9653778" y="2633472"/>
-            <a:ext cx="402336" cy="402336"/>
-          </a:xfrm>
-          <a:prstGeom prst="rect">
-            <a:avLst/>
-          </a:prstGeom>
-        </p:spPr>
-      </p:pic>
-      <p:sp>
-        <p:nvSpPr>
-          <p:cNvPr id="17" name="Text 12"/>
-          <p:cNvSpPr/>
-          <p:nvPr/>
-        </p:nvSpPr>
-        <p:spPr>
-          <a:xfrm>
-            <a:off x="8158277" y="3520440"/>
-            <a:ext cx="3393338" cy="457200"/>
-          </a:xfrm>
-          <a:prstGeom prst="rect">
-            <a:avLst/>
-          </a:prstGeom>
-          <a:noFill/>
-          <a:ln/>
-        </p:spPr>
-        <p:txBody>
-          <a:bodyPr wrap="square" lIns="0" tIns="0" rIns="0" bIns="0" rtlCol="0" anchor="ctr"/>
-          <a:lstStyle/>
-          <a:p>
-            <a:pPr algn="ctr" indent="0" marL="0">
-              <a:buNone/>
-            </a:pPr>
-            <a:r>
-              <a:rPr lang="en-US" sz="2200" b="1" dirty="0">
-                <a:solidFill>
-                  <a:srgbClr val="0F1729"/>
-                </a:solidFill>
-                <a:latin typeface="Cambria" pitchFamily="34" charset="0"/>
-                <a:ea typeface="Cambria" pitchFamily="34" charset="-122"/>
-                <a:cs typeface="Cambria" pitchFamily="34" charset="-120"/>
-              </a:rPr>
-              <a:t>Velocity</a:t>
-            </a:r>
-            <a:endParaRPr lang="en-US" sz="2200" dirty="0"/>
-          </a:p>
-        </p:txBody>
-      </p:sp>
-      <p:sp>
-        <p:nvSpPr>
-          <p:cNvPr id="18" name="Text 13"/>
-          <p:cNvSpPr/>
-          <p:nvPr/>
-        </p:nvSpPr>
-        <p:spPr>
-          <a:xfrm>
-            <a:off x="8478317" y="4114800"/>
-            <a:ext cx="2753258" cy="1371600"/>
-          </a:xfrm>
-          <a:prstGeom prst="rect">
-            <a:avLst/>
-          </a:prstGeom>
-          <a:noFill/>
-          <a:ln/>
-        </p:spPr>
-        <p:txBody>
-          <a:bodyPr wrap="square" lIns="0" tIns="0" rIns="0" bIns="0" rtlCol="0" anchor="ctr"/>
-          <a:lstStyle/>
-          <a:p>
-            <a:pPr algn="ctr" indent="0" marL="0">
-              <a:lnSpc>
-                <a:spcPct val="110000"/>
-              </a:lnSpc>
-              <a:buNone/>
-            </a:pPr>
-            <a:r>
-              <a:rPr lang="en-US" sz="1350" dirty="0">
-                <a:solidFill>
-                  <a:srgbClr val="5B6472"/>
-                </a:solidFill>
-                <a:latin typeface="Calibri" pitchFamily="34" charset="0"/>
-                <a:ea typeface="Calibri" pitchFamily="34" charset="-122"/>
-                <a:cs typeface="Calibri" pitchFamily="34" charset="-120"/>
-              </a:rPr>
-              <a:t>Certainty and speed compress the path from intake to submission — less fallout, faster funding.</a:t>
-            </a:r>
-            <a:endParaRPr lang="en-US" sz="1350" dirty="0"/>
-          </a:p>
-        </p:txBody>
-      </p:sp>
-      <p:sp>
-        <p:nvSpPr>
-          <p:cNvPr id="19" name="Text 14"/>
+              <a:t>Instant, deterministic pre-approval read — with the Reg Z anti-steering disclosure</a:t>
+            </a:r>
+            <a:endParaRPr lang="en-US" sz="1200" dirty="0"/>
+          </a:p>
+        </p:txBody>
+      </p:sp>
+      <p:sp>
+        <p:nvSpPr>
+          <p:cNvPr id="16" name="Text 12"/>
           <p:cNvSpPr/>
           <p:nvPr/>
         </p:nvSpPr>
@@ -4342,7 +4372,7 @@
       </p:sp>
       <p:sp>
         <p:nvSpPr>
-          <p:cNvPr id="20" name="Text 15"/>
+          <p:cNvPr id="17" name="Text 13"/>
           <p:cNvSpPr/>
           <p:nvPr/>
         </p:nvSpPr>
@@ -4444,7 +4474,7 @@
                 <a:ea typeface="Calibri" pitchFamily="34" charset="-122"/>
                 <a:cs typeface="Calibri" pitchFamily="34" charset="-120"/>
               </a:rPr>
-              <a:t>COMPLIANCE &amp; TRUST</a:t>
+              <a:t>SEE IT LIVE — REAL PRODUCT</a:t>
             </a:r>
             <a:endParaRPr lang="en-US" sz="1200" dirty="0"/>
           </a:p>
@@ -4483,7 +4513,7 @@
                 <a:ea typeface="Cambria" pitchFamily="34" charset="-122"/>
                 <a:cs typeface="Cambria" pitchFamily="34" charset="-120"/>
               </a:rPr>
-              <a:t>Built compliance-first, not bolted on</a:t>
+              <a:t>The broker's desk</a:t>
             </a:r>
             <a:endParaRPr lang="en-US" sz="3000" dirty="0"/>
           </a:p>
@@ -4497,21 +4527,95 @@
         </p:nvSpPr>
         <p:spPr>
           <a:xfrm>
-            <a:off x="640080" y="1828800"/>
-            <a:ext cx="640080" cy="640080"/>
+            <a:off x="548640" y="1600200"/>
+            <a:ext cx="5394960" cy="3710178"/>
+          </a:xfrm>
+          <a:prstGeom prst="roundRect">
+            <a:avLst>
+              <a:gd name="adj" fmla="val 1725"/>
+            </a:avLst>
+          </a:prstGeom>
+          <a:solidFill>
+            <a:srgbClr val="FFFFFF"/>
+          </a:solidFill>
+          <a:ln w="12700">
+            <a:solidFill>
+              <a:srgbClr val="E2E8F0"/>
+            </a:solidFill>
+            <a:prstDash val="solid"/>
+          </a:ln>
+          <a:effectLst>
+            <a:outerShdw sx="100000" sy="100000" kx="0" ky="0" algn="bl" rotWithShape="0" blurRad="88900" dist="38100" dir="5400000">
+              <a:srgbClr val="9AA6B8">
+                <a:alpha val="28000"/>
+              </a:srgbClr>
+            </a:outerShdw>
+          </a:effectLst>
+        </p:spPr>
+      </p:sp>
+      <p:sp>
+        <p:nvSpPr>
+          <p:cNvPr id="5" name="Shape 3"/>
+          <p:cNvSpPr/>
+          <p:nvPr/>
+        </p:nvSpPr>
+        <p:spPr>
+          <a:xfrm>
+            <a:off x="731520" y="1719072"/>
+            <a:ext cx="82296" cy="82296"/>
           </a:xfrm>
           <a:prstGeom prst="ellipse">
             <a:avLst/>
           </a:prstGeom>
           <a:solidFill>
-            <a:srgbClr val="0B7A5E"/>
+            <a:srgbClr val="F87171"/>
+          </a:solidFill>
+          <a:ln/>
+        </p:spPr>
+      </p:sp>
+      <p:sp>
+        <p:nvSpPr>
+          <p:cNvPr id="6" name="Shape 4"/>
+          <p:cNvSpPr/>
+          <p:nvPr/>
+        </p:nvSpPr>
+        <p:spPr>
+          <a:xfrm>
+            <a:off x="886968" y="1719072"/>
+            <a:ext cx="82296" cy="82296"/>
+          </a:xfrm>
+          <a:prstGeom prst="ellipse">
+            <a:avLst/>
+          </a:prstGeom>
+          <a:solidFill>
+            <a:srgbClr val="FBBF24"/>
+          </a:solidFill>
+          <a:ln/>
+        </p:spPr>
+      </p:sp>
+      <p:sp>
+        <p:nvSpPr>
+          <p:cNvPr id="7" name="Shape 5"/>
+          <p:cNvSpPr/>
+          <p:nvPr/>
+        </p:nvSpPr>
+        <p:spPr>
+          <a:xfrm>
+            <a:off x="1042416" y="1719072"/>
+            <a:ext cx="82296" cy="82296"/>
+          </a:xfrm>
+          <a:prstGeom prst="ellipse">
+            <a:avLst/>
+          </a:prstGeom>
+          <a:solidFill>
+            <a:srgbClr val="34D399"/>
           </a:solidFill>
           <a:ln/>
         </p:spPr>
       </p:sp>
       <p:pic>
         <p:nvPicPr>
-          <p:cNvPr id="5" name="Image 0" descr="preencoded.png">    </p:cNvPr>
+          <p:cNvPr id="8" name="Image 0" descr="/Users/ammrebarakat/Developer/MortgageStream/demo/lender-demo/screenshots/08-lo-command-center.png">    </p:cNvPr>
           <p:cNvPicPr>
             <a:picLocks noChangeAspect="1"/>
           </p:cNvPicPr>
@@ -4525,8 +4629,8 @@
         </p:blipFill>
         <p:spPr>
           <a:xfrm>
-            <a:off x="819302" y="2008022"/>
-            <a:ext cx="281635" cy="281635"/>
+            <a:off x="658368" y="1911096"/>
+            <a:ext cx="5175504" cy="3234690"/>
           </a:xfrm>
           <a:prstGeom prst="rect">
             <a:avLst/>
@@ -4535,69 +4639,30 @@
       </p:pic>
       <p:sp>
         <p:nvSpPr>
-          <p:cNvPr id="6" name="Text 3"/>
-          <p:cNvSpPr/>
-          <p:nvPr/>
-        </p:nvSpPr>
-        <p:spPr>
-          <a:xfrm>
-            <a:off x="1508760" y="1737360"/>
-            <a:ext cx="4267048" cy="365760"/>
-          </a:xfrm>
-          <a:prstGeom prst="rect">
-            <a:avLst/>
-          </a:prstGeom>
-          <a:noFill/>
-          <a:ln/>
-        </p:spPr>
-        <p:txBody>
-          <a:bodyPr wrap="square" lIns="0" tIns="0" rIns="0" bIns="0" rtlCol="0" anchor="ctr"/>
-          <a:lstStyle/>
-          <a:p>
-            <a:pPr indent="0" marL="0">
-              <a:buNone/>
-            </a:pPr>
-            <a:r>
-              <a:rPr lang="en-US" sz="1500" b="1" dirty="0">
-                <a:solidFill>
-                  <a:srgbClr val="0F1729"/>
-                </a:solidFill>
-                <a:latin typeface="Calibri" pitchFamily="34" charset="0"/>
-                <a:ea typeface="Calibri" pitchFamily="34" charset="-122"/>
-                <a:cs typeface="Calibri" pitchFamily="34" charset="-120"/>
-              </a:rPr>
-              <a:t>Deterministic engine</a:t>
-            </a:r>
-            <a:endParaRPr lang="en-US" sz="1500" dirty="0"/>
-          </a:p>
-        </p:txBody>
-      </p:sp>
-      <p:sp>
-        <p:nvSpPr>
-          <p:cNvPr id="7" name="Text 4"/>
-          <p:cNvSpPr/>
-          <p:nvPr/>
-        </p:nvSpPr>
-        <p:spPr>
-          <a:xfrm>
-            <a:off x="1508760" y="2093976"/>
-            <a:ext cx="4267048" cy="640080"/>
-          </a:xfrm>
-          <a:prstGeom prst="rect">
-            <a:avLst/>
-          </a:prstGeom>
-          <a:noFill/>
-          <a:ln/>
-        </p:spPr>
-        <p:txBody>
-          <a:bodyPr wrap="square" lIns="0" tIns="0" rIns="0" bIns="0" rtlCol="0" anchor="ctr"/>
-          <a:lstStyle/>
-          <a:p>
-            <a:pPr indent="0" marL="0">
-              <a:buNone/>
-            </a:pPr>
-            <a:r>
-              <a:rPr lang="en-US" sz="1250" dirty="0">
+          <p:cNvPr id="9" name="Text 6"/>
+          <p:cNvSpPr/>
+          <p:nvPr/>
+        </p:nvSpPr>
+        <p:spPr>
+          <a:xfrm>
+            <a:off x="548640" y="5365242"/>
+            <a:ext cx="5394960" cy="457200"/>
+          </a:xfrm>
+          <a:prstGeom prst="rect">
+            <a:avLst/>
+          </a:prstGeom>
+          <a:noFill/>
+          <a:ln/>
+        </p:spPr>
+        <p:txBody>
+          <a:bodyPr wrap="square" lIns="0" tIns="0" rIns="0" bIns="0" rtlCol="0" anchor="t"/>
+          <a:lstStyle/>
+          <a:p>
+            <a:pPr algn="ctr" indent="0" marL="0">
+              <a:buNone/>
+            </a:pPr>
+            <a:r>
+              <a:rPr lang="en-US" sz="1200" dirty="0">
                 <a:solidFill>
                   <a:srgbClr val="5B6472"/>
                 </a:solidFill>
@@ -4605,35 +4670,109 @@
                 <a:ea typeface="Calibri" pitchFamily="34" charset="-122"/>
                 <a:cs typeface="Calibri" pitchFamily="34" charset="-120"/>
               </a:rPr>
-              <a:t>Auditable decisions; no AI in the lending decision, ever.</a:t>
-            </a:r>
-            <a:endParaRPr lang="en-US" sz="1250" dirty="0"/>
-          </a:p>
-        </p:txBody>
-      </p:sp>
-      <p:sp>
-        <p:nvSpPr>
-          <p:cNvPr id="8" name="Shape 5"/>
-          <p:cNvSpPr/>
-          <p:nvPr/>
-        </p:nvSpPr>
-        <p:spPr>
-          <a:xfrm>
-            <a:off x="6324448" y="1828800"/>
-            <a:ext cx="640080" cy="640080"/>
+              <a:t>No-Stall pipeline — one-click Export MISMO, submit to lender, lock the rate</a:t>
+            </a:r>
+            <a:endParaRPr lang="en-US" sz="1200" dirty="0"/>
+          </a:p>
+        </p:txBody>
+      </p:sp>
+      <p:sp>
+        <p:nvSpPr>
+          <p:cNvPr id="10" name="Shape 7"/>
+          <p:cNvSpPr/>
+          <p:nvPr/>
+        </p:nvSpPr>
+        <p:spPr>
+          <a:xfrm>
+            <a:off x="6309360" y="1600200"/>
+            <a:ext cx="5394960" cy="3710178"/>
+          </a:xfrm>
+          <a:prstGeom prst="roundRect">
+            <a:avLst>
+              <a:gd name="adj" fmla="val 1725"/>
+            </a:avLst>
+          </a:prstGeom>
+          <a:solidFill>
+            <a:srgbClr val="FFFFFF"/>
+          </a:solidFill>
+          <a:ln w="12700">
+            <a:solidFill>
+              <a:srgbClr val="E2E8F0"/>
+            </a:solidFill>
+            <a:prstDash val="solid"/>
+          </a:ln>
+          <a:effectLst>
+            <a:outerShdw sx="100000" sy="100000" kx="0" ky="0" algn="bl" rotWithShape="0" blurRad="88900" dist="38100" dir="5400000">
+              <a:srgbClr val="9AA6B8">
+                <a:alpha val="28000"/>
+              </a:srgbClr>
+            </a:outerShdw>
+          </a:effectLst>
+        </p:spPr>
+      </p:sp>
+      <p:sp>
+        <p:nvSpPr>
+          <p:cNvPr id="11" name="Shape 8"/>
+          <p:cNvSpPr/>
+          <p:nvPr/>
+        </p:nvSpPr>
+        <p:spPr>
+          <a:xfrm>
+            <a:off x="6492240" y="1719072"/>
+            <a:ext cx="82296" cy="82296"/>
           </a:xfrm>
           <a:prstGeom prst="ellipse">
             <a:avLst/>
           </a:prstGeom>
           <a:solidFill>
-            <a:srgbClr val="1C3A8F"/>
+            <a:srgbClr val="F87171"/>
+          </a:solidFill>
+          <a:ln/>
+        </p:spPr>
+      </p:sp>
+      <p:sp>
+        <p:nvSpPr>
+          <p:cNvPr id="12" name="Shape 9"/>
+          <p:cNvSpPr/>
+          <p:nvPr/>
+        </p:nvSpPr>
+        <p:spPr>
+          <a:xfrm>
+            <a:off x="6647688" y="1719072"/>
+            <a:ext cx="82296" cy="82296"/>
+          </a:xfrm>
+          <a:prstGeom prst="ellipse">
+            <a:avLst/>
+          </a:prstGeom>
+          <a:solidFill>
+            <a:srgbClr val="FBBF24"/>
+          </a:solidFill>
+          <a:ln/>
+        </p:spPr>
+      </p:sp>
+      <p:sp>
+        <p:nvSpPr>
+          <p:cNvPr id="13" name="Shape 10"/>
+          <p:cNvSpPr/>
+          <p:nvPr/>
+        </p:nvSpPr>
+        <p:spPr>
+          <a:xfrm>
+            <a:off x="6803136" y="1719072"/>
+            <a:ext cx="82296" cy="82296"/>
+          </a:xfrm>
+          <a:prstGeom prst="ellipse">
+            <a:avLst/>
+          </a:prstGeom>
+          <a:solidFill>
+            <a:srgbClr val="34D399"/>
           </a:solidFill>
           <a:ln/>
         </p:spPr>
       </p:sp>
       <p:pic>
         <p:nvPicPr>
-          <p:cNvPr id="9" name="Image 1" descr="preencoded.png">    </p:cNvPr>
+          <p:cNvPr id="14" name="Image 1" descr="/Users/ammrebarakat/Developer/MortgageStream/demo/lender-demo/screenshots/10-borrower-file-deck.png">    </p:cNvPr>
           <p:cNvPicPr>
             <a:picLocks noChangeAspect="1"/>
           </p:cNvPicPr>
@@ -4647,8 +4786,8 @@
         </p:blipFill>
         <p:spPr>
           <a:xfrm>
-            <a:off x="6503670" y="2008022"/>
-            <a:ext cx="281635" cy="281635"/>
+            <a:off x="6419088" y="1911096"/>
+            <a:ext cx="5175504" cy="3234690"/>
           </a:xfrm>
           <a:prstGeom prst="rect">
             <a:avLst/>
@@ -4657,69 +4796,30 @@
       </p:pic>
       <p:sp>
         <p:nvSpPr>
-          <p:cNvPr id="10" name="Text 6"/>
-          <p:cNvSpPr/>
-          <p:nvPr/>
-        </p:nvSpPr>
-        <p:spPr>
-          <a:xfrm>
-            <a:off x="7193128" y="1737360"/>
-            <a:ext cx="4267048" cy="365760"/>
-          </a:xfrm>
-          <a:prstGeom prst="rect">
-            <a:avLst/>
-          </a:prstGeom>
-          <a:noFill/>
-          <a:ln/>
-        </p:spPr>
-        <p:txBody>
-          <a:bodyPr wrap="square" lIns="0" tIns="0" rIns="0" bIns="0" rtlCol="0" anchor="ctr"/>
-          <a:lstStyle/>
-          <a:p>
-            <a:pPr indent="0" marL="0">
-              <a:buNone/>
-            </a:pPr>
-            <a:r>
-              <a:rPr lang="en-US" sz="1500" b="1" dirty="0">
-                <a:solidFill>
-                  <a:srgbClr val="0F1729"/>
-                </a:solidFill>
-                <a:latin typeface="Calibri" pitchFamily="34" charset="0"/>
-                <a:ea typeface="Calibri" pitchFamily="34" charset="-122"/>
-                <a:cs typeface="Calibri" pitchFamily="34" charset="-120"/>
-              </a:rPr>
-              <a:t>PII through a vault</a:t>
-            </a:r>
-            <a:endParaRPr lang="en-US" sz="1500" dirty="0"/>
-          </a:p>
-        </p:txBody>
-      </p:sp>
-      <p:sp>
-        <p:nvSpPr>
-          <p:cNvPr id="11" name="Text 7"/>
-          <p:cNvSpPr/>
-          <p:nvPr/>
-        </p:nvSpPr>
-        <p:spPr>
-          <a:xfrm>
-            <a:off x="7193128" y="2093976"/>
-            <a:ext cx="4267048" cy="640080"/>
-          </a:xfrm>
-          <a:prstGeom prst="rect">
-            <a:avLst/>
-          </a:prstGeom>
-          <a:noFill/>
-          <a:ln/>
-        </p:spPr>
-        <p:txBody>
-          <a:bodyPr wrap="square" lIns="0" tIns="0" rIns="0" bIns="0" rtlCol="0" anchor="ctr"/>
-          <a:lstStyle/>
-          <a:p>
-            <a:pPr indent="0" marL="0">
-              <a:buNone/>
-            </a:pPr>
-            <a:r>
-              <a:rPr lang="en-US" sz="1250" dirty="0">
+          <p:cNvPr id="15" name="Text 11"/>
+          <p:cNvSpPr/>
+          <p:nvPr/>
+        </p:nvSpPr>
+        <p:spPr>
+          <a:xfrm>
+            <a:off x="6309360" y="5365242"/>
+            <a:ext cx="5394960" cy="457200"/>
+          </a:xfrm>
+          <a:prstGeom prst="rect">
+            <a:avLst/>
+          </a:prstGeom>
+          <a:noFill/>
+          <a:ln/>
+        </p:spPr>
+        <p:txBody>
+          <a:bodyPr wrap="square" lIns="0" tIns="0" rIns="0" bIns="0" rtlCol="0" anchor="t"/>
+          <a:lstStyle/>
+          <a:p>
+            <a:pPr algn="ctr" indent="0" marL="0">
+              <a:buNone/>
+            </a:pPr>
+            <a:r>
+              <a:rPr lang="en-US" sz="1200" dirty="0">
                 <a:solidFill>
                   <a:srgbClr val="5B6472"/>
                 </a:solidFill>
@@ -4727,566 +4827,15 @@
                 <a:ea typeface="Calibri" pitchFamily="34" charset="-122"/>
                 <a:cs typeface="Calibri" pitchFamily="34" charset="-120"/>
               </a:rPr>
-              <a:t>SSNs stored as ciphertext + last-4, decrypted only at the delivery seam.</a:t>
-            </a:r>
-            <a:endParaRPr lang="en-US" sz="1250" dirty="0"/>
-          </a:p>
-        </p:txBody>
-      </p:sp>
-      <p:sp>
-        <p:nvSpPr>
-          <p:cNvPr id="12" name="Shape 8"/>
-          <p:cNvSpPr/>
-          <p:nvPr/>
-        </p:nvSpPr>
-        <p:spPr>
-          <a:xfrm>
-            <a:off x="640080" y="3291840"/>
-            <a:ext cx="640080" cy="640080"/>
-          </a:xfrm>
-          <a:prstGeom prst="ellipse">
-            <a:avLst/>
-          </a:prstGeom>
-          <a:solidFill>
-            <a:srgbClr val="0B7A5E"/>
-          </a:solidFill>
-          <a:ln/>
-        </p:spPr>
-      </p:sp>
-      <p:pic>
-        <p:nvPicPr>
-          <p:cNvPr id="13" name="Image 2" descr="preencoded.png">    </p:cNvPr>
-          <p:cNvPicPr>
-            <a:picLocks noChangeAspect="1"/>
-          </p:cNvPicPr>
-          <p:nvPr/>
-        </p:nvPicPr>
-        <p:blipFill>
-          <a:blip r:embed="rId3"/>
-          <a:stretch>
-            <a:fillRect/>
-          </a:stretch>
-        </p:blipFill>
-        <p:spPr>
-          <a:xfrm>
-            <a:off x="819302" y="3471062"/>
-            <a:ext cx="281635" cy="281635"/>
-          </a:xfrm>
-          <a:prstGeom prst="rect">
-            <a:avLst/>
-          </a:prstGeom>
-        </p:spPr>
-      </p:pic>
-      <p:sp>
-        <p:nvSpPr>
-          <p:cNvPr id="14" name="Text 9"/>
-          <p:cNvSpPr/>
-          <p:nvPr/>
-        </p:nvSpPr>
-        <p:spPr>
-          <a:xfrm>
-            <a:off x="1508760" y="3200400"/>
-            <a:ext cx="4267048" cy="365760"/>
-          </a:xfrm>
-          <a:prstGeom prst="rect">
-            <a:avLst/>
-          </a:prstGeom>
-          <a:noFill/>
-          <a:ln/>
-        </p:spPr>
-        <p:txBody>
-          <a:bodyPr wrap="square" lIns="0" tIns="0" rIns="0" bIns="0" rtlCol="0" anchor="ctr"/>
-          <a:lstStyle/>
-          <a:p>
-            <a:pPr indent="0" marL="0">
-              <a:buNone/>
-            </a:pPr>
-            <a:r>
-              <a:rPr lang="en-US" sz="1500" b="1" dirty="0">
-                <a:solidFill>
-                  <a:srgbClr val="0F1729"/>
-                </a:solidFill>
-                <a:latin typeface="Calibri" pitchFamily="34" charset="0"/>
-                <a:ea typeface="Calibri" pitchFamily="34" charset="-122"/>
-                <a:cs typeface="Calibri" pitchFamily="34" charset="-120"/>
-              </a:rPr>
-              <a:t>Audit log everywhere</a:t>
-            </a:r>
-            <a:endParaRPr lang="en-US" sz="1500" dirty="0"/>
-          </a:p>
-        </p:txBody>
-      </p:sp>
-      <p:sp>
-        <p:nvSpPr>
-          <p:cNvPr id="15" name="Text 10"/>
-          <p:cNvSpPr/>
-          <p:nvPr/>
-        </p:nvSpPr>
-        <p:spPr>
-          <a:xfrm>
-            <a:off x="1508760" y="3557016"/>
-            <a:ext cx="4267048" cy="640080"/>
-          </a:xfrm>
-          <a:prstGeom prst="rect">
-            <a:avLst/>
-          </a:prstGeom>
-          <a:noFill/>
-          <a:ln/>
-        </p:spPr>
-        <p:txBody>
-          <a:bodyPr wrap="square" lIns="0" tIns="0" rIns="0" bIns="0" rtlCol="0" anchor="ctr"/>
-          <a:lstStyle/>
-          <a:p>
-            <a:pPr indent="0" marL="0">
-              <a:buNone/>
-            </a:pPr>
-            <a:r>
-              <a:rPr lang="en-US" sz="1250" dirty="0">
-                <a:solidFill>
-                  <a:srgbClr val="5B6472"/>
-                </a:solidFill>
-                <a:latin typeface="Calibri" pitchFamily="34" charset="0"/>
-                <a:ea typeface="Calibri" pitchFamily="34" charset="-122"/>
-                <a:cs typeface="Calibri" pitchFamily="34" charset="-120"/>
-              </a:rPr>
-              <a:t>Every PII touch and file action is recorded for the record.</a:t>
-            </a:r>
-            <a:endParaRPr lang="en-US" sz="1250" dirty="0"/>
-          </a:p>
-        </p:txBody>
-      </p:sp>
-      <p:sp>
-        <p:nvSpPr>
-          <p:cNvPr id="16" name="Shape 11"/>
-          <p:cNvSpPr/>
-          <p:nvPr/>
-        </p:nvSpPr>
-        <p:spPr>
-          <a:xfrm>
-            <a:off x="6324448" y="3291840"/>
-            <a:ext cx="640080" cy="640080"/>
-          </a:xfrm>
-          <a:prstGeom prst="ellipse">
-            <a:avLst/>
-          </a:prstGeom>
-          <a:solidFill>
-            <a:srgbClr val="1C3A8F"/>
-          </a:solidFill>
-          <a:ln/>
-        </p:spPr>
-      </p:sp>
-      <p:pic>
-        <p:nvPicPr>
-          <p:cNvPr id="17" name="Image 3" descr="preencoded.png">    </p:cNvPr>
-          <p:cNvPicPr>
-            <a:picLocks noChangeAspect="1"/>
-          </p:cNvPicPr>
-          <p:nvPr/>
-        </p:nvPicPr>
-        <p:blipFill>
-          <a:blip r:embed="rId4"/>
-          <a:stretch>
-            <a:fillRect/>
-          </a:stretch>
-        </p:blipFill>
-        <p:spPr>
-          <a:xfrm>
-            <a:off x="6503670" y="3471062"/>
-            <a:ext cx="281635" cy="281635"/>
-          </a:xfrm>
-          <a:prstGeom prst="rect">
-            <a:avLst/>
-          </a:prstGeom>
-        </p:spPr>
-      </p:pic>
-      <p:sp>
-        <p:nvSpPr>
-          <p:cNvPr id="18" name="Text 12"/>
-          <p:cNvSpPr/>
-          <p:nvPr/>
-        </p:nvSpPr>
-        <p:spPr>
-          <a:xfrm>
-            <a:off x="7193128" y="3200400"/>
-            <a:ext cx="4267048" cy="365760"/>
-          </a:xfrm>
-          <a:prstGeom prst="rect">
-            <a:avLst/>
-          </a:prstGeom>
-          <a:noFill/>
-          <a:ln/>
-        </p:spPr>
-        <p:txBody>
-          <a:bodyPr wrap="square" lIns="0" tIns="0" rIns="0" bIns="0" rtlCol="0" anchor="ctr"/>
-          <a:lstStyle/>
-          <a:p>
-            <a:pPr indent="0" marL="0">
-              <a:buNone/>
-            </a:pPr>
-            <a:r>
-              <a:rPr lang="en-US" sz="1500" b="1" dirty="0">
-                <a:solidFill>
-                  <a:srgbClr val="0F1729"/>
-                </a:solidFill>
-                <a:latin typeface="Calibri" pitchFamily="34" charset="0"/>
-                <a:ea typeface="Calibri" pitchFamily="34" charset="-122"/>
-                <a:cs typeface="Calibri" pitchFamily="34" charset="-120"/>
-              </a:rPr>
-              <a:t>Fannie-Mae-grounded</a:t>
-            </a:r>
-            <a:endParaRPr lang="en-US" sz="1500" dirty="0"/>
-          </a:p>
-        </p:txBody>
-      </p:sp>
-      <p:sp>
-        <p:nvSpPr>
-          <p:cNvPr id="19" name="Text 13"/>
-          <p:cNvSpPr/>
-          <p:nvPr/>
-        </p:nvSpPr>
-        <p:spPr>
-          <a:xfrm>
-            <a:off x="7193128" y="3557016"/>
-            <a:ext cx="4267048" cy="640080"/>
-          </a:xfrm>
-          <a:prstGeom prst="rect">
-            <a:avLst/>
-          </a:prstGeom>
-          <a:noFill/>
-          <a:ln/>
-        </p:spPr>
-        <p:txBody>
-          <a:bodyPr wrap="square" lIns="0" tIns="0" rIns="0" bIns="0" rtlCol="0" anchor="ctr"/>
-          <a:lstStyle/>
-          <a:p>
-            <a:pPr indent="0" marL="0">
-              <a:buNone/>
-            </a:pPr>
-            <a:r>
-              <a:rPr lang="en-US" sz="1250" dirty="0">
-                <a:solidFill>
-                  <a:srgbClr val="5B6472"/>
-                </a:solidFill>
-                <a:latin typeface="Calibri" pitchFamily="34" charset="0"/>
-                <a:ea typeface="Calibri" pitchFamily="34" charset="-122"/>
-                <a:cs typeface="Calibri" pitchFamily="34" charset="-120"/>
-              </a:rPr>
-              <a:t>MISMO/ULDD terms verified against the official spec — never invented.</a:t>
-            </a:r>
-            <a:endParaRPr lang="en-US" sz="1250" dirty="0"/>
-          </a:p>
-        </p:txBody>
-      </p:sp>
-      <p:sp>
-        <p:nvSpPr>
-          <p:cNvPr id="20" name="Shape 14"/>
-          <p:cNvSpPr/>
-          <p:nvPr/>
-        </p:nvSpPr>
-        <p:spPr>
-          <a:xfrm>
-            <a:off x="640080" y="4754880"/>
-            <a:ext cx="640080" cy="640080"/>
-          </a:xfrm>
-          <a:prstGeom prst="ellipse">
-            <a:avLst/>
-          </a:prstGeom>
-          <a:solidFill>
-            <a:srgbClr val="0B7A5E"/>
-          </a:solidFill>
-          <a:ln/>
-        </p:spPr>
-      </p:sp>
-      <p:pic>
-        <p:nvPicPr>
-          <p:cNvPr id="21" name="Image 4" descr="preencoded.png">    </p:cNvPr>
-          <p:cNvPicPr>
-            <a:picLocks noChangeAspect="1"/>
-          </p:cNvPicPr>
-          <p:nvPr/>
-        </p:nvPicPr>
-        <p:blipFill>
-          <a:blip r:embed="rId5"/>
-          <a:stretch>
-            <a:fillRect/>
-          </a:stretch>
-        </p:blipFill>
-        <p:spPr>
-          <a:xfrm>
-            <a:off x="819302" y="4934102"/>
-            <a:ext cx="281635" cy="281635"/>
-          </a:xfrm>
-          <a:prstGeom prst="rect">
-            <a:avLst/>
-          </a:prstGeom>
-        </p:spPr>
-      </p:pic>
-      <p:sp>
-        <p:nvSpPr>
-          <p:cNvPr id="22" name="Text 15"/>
-          <p:cNvSpPr/>
-          <p:nvPr/>
-        </p:nvSpPr>
-        <p:spPr>
-          <a:xfrm>
-            <a:off x="1508760" y="4663440"/>
-            <a:ext cx="4267048" cy="365760"/>
-          </a:xfrm>
-          <a:prstGeom prst="rect">
-            <a:avLst/>
-          </a:prstGeom>
-          <a:noFill/>
-          <a:ln/>
-        </p:spPr>
-        <p:txBody>
-          <a:bodyPr wrap="square" lIns="0" tIns="0" rIns="0" bIns="0" rtlCol="0" anchor="ctr"/>
-          <a:lstStyle/>
-          <a:p>
-            <a:pPr indent="0" marL="0">
-              <a:buNone/>
-            </a:pPr>
-            <a:r>
-              <a:rPr lang="en-US" sz="1500" b="1" dirty="0">
-                <a:solidFill>
-                  <a:srgbClr val="0F1729"/>
-                </a:solidFill>
-                <a:latin typeface="Calibri" pitchFamily="34" charset="0"/>
-                <a:ea typeface="Calibri" pitchFamily="34" charset="-122"/>
-                <a:cs typeface="Calibri" pitchFamily="34" charset="-120"/>
-              </a:rPr>
-              <a:t>Correct NMLS identity</a:t>
-            </a:r>
-            <a:endParaRPr lang="en-US" sz="1500" dirty="0"/>
-          </a:p>
-        </p:txBody>
-      </p:sp>
-      <p:sp>
-        <p:nvSpPr>
-          <p:cNvPr id="23" name="Text 16"/>
-          <p:cNvSpPr/>
-          <p:nvPr/>
-        </p:nvSpPr>
-        <p:spPr>
-          <a:xfrm>
-            <a:off x="1508760" y="5020056"/>
-            <a:ext cx="4267048" cy="640080"/>
-          </a:xfrm>
-          <a:prstGeom prst="rect">
-            <a:avLst/>
-          </a:prstGeom>
-          <a:noFill/>
-          <a:ln/>
-        </p:spPr>
-        <p:txBody>
-          <a:bodyPr wrap="square" lIns="0" tIns="0" rIns="0" bIns="0" rtlCol="0" anchor="ctr"/>
-          <a:lstStyle/>
-          <a:p>
-            <a:pPr indent="0" marL="0">
-              <a:buNone/>
-            </a:pPr>
-            <a:r>
-              <a:rPr lang="en-US" sz="1250" dirty="0">
-                <a:solidFill>
-                  <a:srgbClr val="5B6472"/>
-                </a:solidFill>
-                <a:latin typeface="Calibri" pitchFamily="34" charset="0"/>
-                <a:ea typeface="Calibri" pitchFamily="34" charset="-122"/>
-                <a:cs typeface="Calibri" pitchFamily="34" charset="-120"/>
-              </a:rPr>
-              <a:t>The company identifier prints on the package the day licensing lands.</a:t>
-            </a:r>
-            <a:endParaRPr lang="en-US" sz="1250" dirty="0"/>
-          </a:p>
-        </p:txBody>
-      </p:sp>
-      <p:sp>
-        <p:nvSpPr>
-          <p:cNvPr id="24" name="Shape 17"/>
-          <p:cNvSpPr/>
-          <p:nvPr/>
-        </p:nvSpPr>
-        <p:spPr>
-          <a:xfrm>
-            <a:off x="6324448" y="4754880"/>
-            <a:ext cx="640080" cy="640080"/>
-          </a:xfrm>
-          <a:prstGeom prst="ellipse">
-            <a:avLst/>
-          </a:prstGeom>
-          <a:solidFill>
-            <a:srgbClr val="1C3A8F"/>
-          </a:solidFill>
-          <a:ln/>
-        </p:spPr>
-      </p:sp>
-      <p:pic>
-        <p:nvPicPr>
-          <p:cNvPr id="25" name="Image 5" descr="preencoded.png">    </p:cNvPr>
-          <p:cNvPicPr>
-            <a:picLocks noChangeAspect="1"/>
-          </p:cNvPicPr>
-          <p:nvPr/>
-        </p:nvPicPr>
-        <p:blipFill>
-          <a:blip r:embed="rId6"/>
-          <a:stretch>
-            <a:fillRect/>
-          </a:stretch>
-        </p:blipFill>
-        <p:spPr>
-          <a:xfrm>
-            <a:off x="6503670" y="4934102"/>
-            <a:ext cx="281635" cy="281635"/>
-          </a:xfrm>
-          <a:prstGeom prst="rect">
-            <a:avLst/>
-          </a:prstGeom>
-        </p:spPr>
-      </p:pic>
-      <p:sp>
-        <p:nvSpPr>
-          <p:cNvPr id="26" name="Text 18"/>
-          <p:cNvSpPr/>
-          <p:nvPr/>
-        </p:nvSpPr>
-        <p:spPr>
-          <a:xfrm>
-            <a:off x="7193128" y="4663440"/>
-            <a:ext cx="4267048" cy="365760"/>
-          </a:xfrm>
-          <a:prstGeom prst="rect">
-            <a:avLst/>
-          </a:prstGeom>
-          <a:noFill/>
-          <a:ln/>
-        </p:spPr>
-        <p:txBody>
-          <a:bodyPr wrap="square" lIns="0" tIns="0" rIns="0" bIns="0" rtlCol="0" anchor="ctr"/>
-          <a:lstStyle/>
-          <a:p>
-            <a:pPr indent="0" marL="0">
-              <a:buNone/>
-            </a:pPr>
-            <a:r>
-              <a:rPr lang="en-US" sz="1500" b="1" dirty="0">
-                <a:solidFill>
-                  <a:srgbClr val="0F1729"/>
-                </a:solidFill>
-                <a:latin typeface="Calibri" pitchFamily="34" charset="0"/>
-                <a:ea typeface="Calibri" pitchFamily="34" charset="-122"/>
-                <a:cs typeface="Calibri" pitchFamily="34" charset="-120"/>
-              </a:rPr>
-              <a:t>The package makes no promises</a:t>
-            </a:r>
-            <a:endParaRPr lang="en-US" sz="1500" dirty="0"/>
-          </a:p>
-        </p:txBody>
-      </p:sp>
-      <p:sp>
-        <p:nvSpPr>
-          <p:cNvPr id="27" name="Text 19"/>
-          <p:cNvSpPr/>
-          <p:nvPr/>
-        </p:nvSpPr>
-        <p:spPr>
-          <a:xfrm>
-            <a:off x="7193128" y="5020056"/>
-            <a:ext cx="4267048" cy="640080"/>
-          </a:xfrm>
-          <a:prstGeom prst="rect">
-            <a:avLst/>
-          </a:prstGeom>
-          <a:noFill/>
-          <a:ln/>
-        </p:spPr>
-        <p:txBody>
-          <a:bodyPr wrap="square" lIns="0" tIns="0" rIns="0" bIns="0" rtlCol="0" anchor="ctr"/>
-          <a:lstStyle/>
-          <a:p>
-            <a:pPr indent="0" marL="0">
-              <a:buNone/>
-            </a:pPr>
-            <a:r>
-              <a:rPr lang="en-US" sz="1250" dirty="0">
-                <a:solidFill>
-                  <a:srgbClr val="5B6472"/>
-                </a:solidFill>
-                <a:latin typeface="Calibri" pitchFamily="34" charset="0"/>
-                <a:ea typeface="Calibri" pitchFamily="34" charset="-122"/>
-                <a:cs typeface="Calibri" pitchFamily="34" charset="-120"/>
-              </a:rPr>
-              <a:t>Neutral validation language — no approval or eligibility claims.</a:t>
-            </a:r>
-            <a:endParaRPr lang="en-US" sz="1250" dirty="0"/>
-          </a:p>
-        </p:txBody>
-      </p:sp>
-      <p:pic>
-        <p:nvPicPr>
-          <p:cNvPr id="28" name="Image 6" descr="preencoded.png">    </p:cNvPr>
-          <p:cNvPicPr>
-            <a:picLocks noChangeAspect="1"/>
-          </p:cNvPicPr>
-          <p:nvPr/>
-        </p:nvPicPr>
-        <p:blipFill>
-          <a:blip r:embed="rId7"/>
-          <a:stretch>
-            <a:fillRect/>
-          </a:stretch>
-        </p:blipFill>
-        <p:spPr>
-          <a:xfrm>
-            <a:off x="640080" y="5989320"/>
-            <a:ext cx="256032" cy="256032"/>
-          </a:xfrm>
-          <a:prstGeom prst="rect">
-            <a:avLst/>
-          </a:prstGeom>
-        </p:spPr>
-      </p:pic>
-      <p:sp>
-        <p:nvSpPr>
-          <p:cNvPr id="29" name="Text 20"/>
-          <p:cNvSpPr/>
-          <p:nvPr/>
-        </p:nvSpPr>
-        <p:spPr>
-          <a:xfrm>
-            <a:off x="950976" y="5971032"/>
-            <a:ext cx="2011680" cy="292608"/>
-          </a:xfrm>
-          <a:prstGeom prst="rect">
-            <a:avLst/>
-          </a:prstGeom>
-          <a:noFill/>
-          <a:ln/>
-        </p:spPr>
-        <p:txBody>
-          <a:bodyPr wrap="square" lIns="0" tIns="0" rIns="0" bIns="0" rtlCol="0" anchor="ctr"/>
-          <a:lstStyle/>
-          <a:p>
-            <a:pPr indent="0" marL="0">
-              <a:buNone/>
-            </a:pPr>
-            <a:r>
-              <a:rPr lang="en-US" sz="1100" b="1" dirty="0">
-                <a:solidFill>
-                  <a:srgbClr val="0F1729"/>
-                </a:solidFill>
-                <a:latin typeface="Calibri" pitchFamily="34" charset="0"/>
-                <a:ea typeface="Calibri" pitchFamily="34" charset="-122"/>
-                <a:cs typeface="Calibri" pitchFamily="34" charset="-120"/>
-              </a:rPr>
-              <a:t>Veteran-founded</a:t>
-            </a:r>
-            <a:endParaRPr lang="en-US" sz="1100" dirty="0"/>
-          </a:p>
-        </p:txBody>
-      </p:sp>
-      <p:sp>
-        <p:nvSpPr>
-          <p:cNvPr id="30" name="Text 21"/>
+              <a:t>The lender-ready file — MISMO 3.4 export, SSN vaulted (last-4), LTV/DTI</a:t>
+            </a:r>
+            <a:endParaRPr lang="en-US" sz="1200" dirty="0"/>
+          </a:p>
+        </p:txBody>
+      </p:sp>
+      <p:sp>
+        <p:nvSpPr>
+          <p:cNvPr id="16" name="Text 12"/>
           <p:cNvSpPr/>
           <p:nvPr/>
         </p:nvSpPr>
@@ -5339,7 +4888,7 @@
       </p:sp>
       <p:sp>
         <p:nvSpPr>
-          <p:cNvPr id="31" name="Text 22"/>
+          <p:cNvPr id="17" name="Text 13"/>
           <p:cNvSpPr/>
           <p:nvPr/>
         </p:nvSpPr>
@@ -5441,7 +4990,7 @@
                 <a:ea typeface="Calibri" pitchFamily="34" charset="-122"/>
                 <a:cs typeface="Calibri" pitchFamily="34" charset="-120"/>
               </a:rPr>
-              <a:t>STATUS</a:t>
+              <a:t>THE VALUE TO YOU</a:t>
             </a:r>
             <a:endParaRPr lang="en-US" sz="1200" dirty="0"/>
           </a:p>
@@ -5480,7 +5029,7 @@
                 <a:ea typeface="Cambria" pitchFamily="34" charset="-122"/>
                 <a:cs typeface="Cambria" pitchFamily="34" charset="-120"/>
               </a:rPr>
-              <a:t>Built and validated today — live on credentialing</a:t>
+              <a:t>Three reasons a lender says yes</a:t>
             </a:r>
             <a:endParaRPr lang="en-US" sz="3000" dirty="0"/>
           </a:p>
@@ -5494,12 +5043,12 @@
         </p:nvSpPr>
         <p:spPr>
           <a:xfrm>
-            <a:off x="640080" y="1783080"/>
-            <a:ext cx="5349240" cy="3977640"/>
+            <a:off x="640080" y="1920240"/>
+            <a:ext cx="3393338" cy="3749040"/>
           </a:xfrm>
           <a:prstGeom prst="roundRect">
             <a:avLst>
-              <a:gd name="adj" fmla="val 2759"/>
+              <a:gd name="adj" fmla="val 3773"/>
             </a:avLst>
           </a:prstGeom>
           <a:solidFill>
@@ -5523,8 +5072,8 @@
         </p:nvSpPr>
         <p:spPr>
           <a:xfrm>
-            <a:off x="960120" y="2103120"/>
-            <a:ext cx="548640" cy="548640"/>
+            <a:off x="1879549" y="2377440"/>
+            <a:ext cx="914400" cy="914400"/>
           </a:xfrm>
           <a:prstGeom prst="ellipse">
             <a:avLst/>
@@ -5551,8 +5100,8 @@
         </p:blipFill>
         <p:spPr>
           <a:xfrm>
-            <a:off x="1113739" y="2256739"/>
-            <a:ext cx="241402" cy="241402"/>
+            <a:off x="2135581" y="2633472"/>
+            <a:ext cx="402336" cy="402336"/>
           </a:xfrm>
           <a:prstGeom prst="rect">
             <a:avLst/>
@@ -5567,40 +5116,131 @@
         </p:nvSpPr>
         <p:spPr>
           <a:xfrm>
-            <a:off x="1645920" y="2103120"/>
-            <a:ext cx="4206240" cy="548640"/>
-          </a:xfrm>
-          <a:prstGeom prst="rect">
-            <a:avLst/>
-          </a:prstGeom>
-          <a:noFill/>
-          <a:ln/>
-        </p:spPr>
-        <p:txBody>
-          <a:bodyPr wrap="square" lIns="0" tIns="0" rIns="0" bIns="0" rtlCol="0" anchor="ctr"/>
-          <a:lstStyle/>
-          <a:p>
-            <a:pPr indent="0" marL="0">
-              <a:buNone/>
-            </a:pPr>
-            <a:r>
-              <a:rPr lang="en-US" sz="1700" b="1" dirty="0">
+            <a:off x="640080" y="3520440"/>
+            <a:ext cx="3393338" cy="457200"/>
+          </a:xfrm>
+          <a:prstGeom prst="rect">
+            <a:avLst/>
+          </a:prstGeom>
+          <a:noFill/>
+          <a:ln/>
+        </p:spPr>
+        <p:txBody>
+          <a:bodyPr wrap="square" lIns="0" tIns="0" rIns="0" bIns="0" rtlCol="0" anchor="ctr"/>
+          <a:lstStyle/>
+          <a:p>
+            <a:pPr algn="ctr" indent="0" marL="0">
+              <a:buNone/>
+            </a:pPr>
+            <a:r>
+              <a:rPr lang="en-US" sz="2200" b="1" dirty="0">
                 <a:solidFill>
                   <a:srgbClr val="0F1729"/>
                 </a:solidFill>
-                <a:latin typeface="Calibri" pitchFamily="34" charset="0"/>
-                <a:ea typeface="Calibri" pitchFamily="34" charset="-122"/>
-                <a:cs typeface="Calibri" pitchFamily="34" charset="-120"/>
-              </a:rPr>
-              <a:t>Working end to end now</a:t>
-            </a:r>
-            <a:endParaRPr lang="en-US" sz="1700" dirty="0"/>
-          </a:p>
-        </p:txBody>
+                <a:latin typeface="Cambria" pitchFamily="34" charset="0"/>
+                <a:ea typeface="Cambria" pitchFamily="34" charset="-122"/>
+                <a:cs typeface="Cambria" pitchFamily="34" charset="-120"/>
+              </a:rPr>
+              <a:t>Clean files</a:t>
+            </a:r>
+            <a:endParaRPr lang="en-US" sz="2200" dirty="0"/>
+          </a:p>
+        </p:txBody>
+      </p:sp>
+      <p:sp>
+        <p:nvSpPr>
+          <p:cNvPr id="8" name="Text 5"/>
+          <p:cNvSpPr/>
+          <p:nvPr/>
+        </p:nvSpPr>
+        <p:spPr>
+          <a:xfrm>
+            <a:off x="960120" y="4114800"/>
+            <a:ext cx="2753258" cy="1371600"/>
+          </a:xfrm>
+          <a:prstGeom prst="rect">
+            <a:avLst/>
+          </a:prstGeom>
+          <a:noFill/>
+          <a:ln/>
+        </p:spPr>
+        <p:txBody>
+          <a:bodyPr wrap="square" lIns="0" tIns="0" rIns="0" bIns="0" rtlCol="0" anchor="ctr"/>
+          <a:lstStyle/>
+          <a:p>
+            <a:pPr algn="ctr" indent="0" marL="0">
+              <a:lnSpc>
+                <a:spcPct val="110000"/>
+              </a:lnSpc>
+              <a:buNone/>
+            </a:pPr>
+            <a:r>
+              <a:rPr lang="en-US" sz="1350" dirty="0">
+                <a:solidFill>
+                  <a:srgbClr val="5B6472"/>
+                </a:solidFill>
+                <a:latin typeface="Calibri" pitchFamily="34" charset="0"/>
+                <a:ea typeface="Calibri" pitchFamily="34" charset="-122"/>
+                <a:cs typeface="Calibri" pitchFamily="34" charset="-120"/>
+              </a:rPr>
+              <a:t>Standards-valid, pre-flighted packages underwrite faster and bounce less — lower cost per loan, higher pull-through.</a:t>
+            </a:r>
+            <a:endParaRPr lang="en-US" sz="1350" dirty="0"/>
+          </a:p>
+        </p:txBody>
+      </p:sp>
+      <p:sp>
+        <p:nvSpPr>
+          <p:cNvPr id="9" name="Shape 6"/>
+          <p:cNvSpPr/>
+          <p:nvPr/>
+        </p:nvSpPr>
+        <p:spPr>
+          <a:xfrm>
+            <a:off x="4399178" y="1920240"/>
+            <a:ext cx="3393338" cy="3749040"/>
+          </a:xfrm>
+          <a:prstGeom prst="roundRect">
+            <a:avLst>
+              <a:gd name="adj" fmla="val 3773"/>
+            </a:avLst>
+          </a:prstGeom>
+          <a:solidFill>
+            <a:srgbClr val="EEF2FB"/>
+          </a:solidFill>
+          <a:ln/>
+          <a:effectLst>
+            <a:outerShdw sx="100000" sy="100000" kx="0" ky="0" algn="bl" rotWithShape="0" blurRad="88900" dist="38100" dir="5400000">
+              <a:srgbClr val="9AA6B8">
+                <a:alpha val="28000"/>
+              </a:srgbClr>
+            </a:outerShdw>
+          </a:effectLst>
+        </p:spPr>
+      </p:sp>
+      <p:sp>
+        <p:nvSpPr>
+          <p:cNvPr id="10" name="Shape 7"/>
+          <p:cNvSpPr/>
+          <p:nvPr/>
+        </p:nvSpPr>
+        <p:spPr>
+          <a:xfrm>
+            <a:off x="5638648" y="2377440"/>
+            <a:ext cx="914400" cy="914400"/>
+          </a:xfrm>
+          <a:prstGeom prst="ellipse">
+            <a:avLst/>
+          </a:prstGeom>
+          <a:solidFill>
+            <a:srgbClr val="1C3A8F"/>
+          </a:solidFill>
+          <a:ln/>
+        </p:spPr>
       </p:sp>
       <p:pic>
         <p:nvPicPr>
-          <p:cNvPr id="8" name="Image 1" descr="preencoded.png">    </p:cNvPr>
+          <p:cNvPr id="11" name="Image 1" descr="preencoded.png">    </p:cNvPr>
           <p:cNvPicPr>
             <a:picLocks noChangeAspect="1"/>
           </p:cNvPicPr>
@@ -5614,8 +5254,8 @@
         </p:blipFill>
         <p:spPr>
           <a:xfrm>
-            <a:off x="1005840" y="2944368"/>
-            <a:ext cx="201168" cy="201168"/>
+            <a:off x="5894680" y="2633472"/>
+            <a:ext cx="402336" cy="402336"/>
           </a:xfrm>
           <a:prstGeom prst="rect">
             <a:avLst/>
@@ -5624,46 +5264,137 @@
       </p:pic>
       <p:sp>
         <p:nvSpPr>
-          <p:cNvPr id="9" name="Text 5"/>
-          <p:cNvSpPr/>
-          <p:nvPr/>
-        </p:nvSpPr>
-        <p:spPr>
-          <a:xfrm>
-            <a:off x="1353312" y="2926080"/>
-            <a:ext cx="4434840" cy="457200"/>
-          </a:xfrm>
-          <a:prstGeom prst="rect">
-            <a:avLst/>
-          </a:prstGeom>
-          <a:noFill/>
-          <a:ln/>
-        </p:spPr>
-        <p:txBody>
-          <a:bodyPr wrap="square" lIns="0" tIns="0" rIns="0" bIns="0" rtlCol="0" anchor="ctr"/>
-          <a:lstStyle/>
-          <a:p>
-            <a:pPr indent="0" marL="0">
-              <a:buNone/>
-            </a:pPr>
-            <a:r>
-              <a:rPr lang="en-US" sz="1300" dirty="0">
+          <p:cNvPr id="12" name="Text 8"/>
+          <p:cNvSpPr/>
+          <p:nvPr/>
+        </p:nvSpPr>
+        <p:spPr>
+          <a:xfrm>
+            <a:off x="4399178" y="3520440"/>
+            <a:ext cx="3393338" cy="457200"/>
+          </a:xfrm>
+          <a:prstGeom prst="rect">
+            <a:avLst/>
+          </a:prstGeom>
+          <a:noFill/>
+          <a:ln/>
+        </p:spPr>
+        <p:txBody>
+          <a:bodyPr wrap="square" lIns="0" tIns="0" rIns="0" bIns="0" rtlCol="0" anchor="ctr"/>
+          <a:lstStyle/>
+          <a:p>
+            <a:pPr algn="ctr" indent="0" marL="0">
+              <a:buNone/>
+            </a:pPr>
+            <a:r>
+              <a:rPr lang="en-US" sz="2200" b="1" dirty="0">
                 <a:solidFill>
                   <a:srgbClr val="0F1729"/>
                 </a:solidFill>
-                <a:latin typeface="Calibri" pitchFamily="34" charset="0"/>
-                <a:ea typeface="Calibri" pitchFamily="34" charset="-122"/>
-                <a:cs typeface="Calibri" pitchFamily="34" charset="-120"/>
-              </a:rPr>
-              <a:t>Full intake → decision → package → delivery loop</a:t>
-            </a:r>
-            <a:endParaRPr lang="en-US" sz="1300" dirty="0"/>
-          </a:p>
-        </p:txBody>
+                <a:latin typeface="Cambria" pitchFamily="34" charset="0"/>
+                <a:ea typeface="Cambria" pitchFamily="34" charset="-122"/>
+                <a:cs typeface="Cambria" pitchFamily="34" charset="-120"/>
+              </a:rPr>
+              <a:t>Volume</a:t>
+            </a:r>
+            <a:endParaRPr lang="en-US" sz="2200" dirty="0"/>
+          </a:p>
+        </p:txBody>
+      </p:sp>
+      <p:sp>
+        <p:nvSpPr>
+          <p:cNvPr id="13" name="Text 9"/>
+          <p:cNvSpPr/>
+          <p:nvPr/>
+        </p:nvSpPr>
+        <p:spPr>
+          <a:xfrm>
+            <a:off x="4719218" y="4114800"/>
+            <a:ext cx="2753258" cy="1371600"/>
+          </a:xfrm>
+          <a:prstGeom prst="rect">
+            <a:avLst/>
+          </a:prstGeom>
+          <a:noFill/>
+          <a:ln/>
+        </p:spPr>
+        <p:txBody>
+          <a:bodyPr wrap="square" lIns="0" tIns="0" rIns="0" bIns="0" rtlCol="0" anchor="ctr"/>
+          <a:lstStyle/>
+          <a:p>
+            <a:pPr algn="ctr" indent="0" marL="0">
+              <a:lnSpc>
+                <a:spcPct val="110000"/>
+              </a:lnSpc>
+              <a:buNone/>
+            </a:pPr>
+            <a:r>
+              <a:rPr lang="en-US" sz="1350" dirty="0">
+                <a:solidFill>
+                  <a:srgbClr val="5B6472"/>
+                </a:solidFill>
+                <a:latin typeface="Calibri" pitchFamily="34" charset="0"/>
+                <a:ea typeface="Calibri" pitchFamily="34" charset="-122"/>
+                <a:cs typeface="Calibri" pitchFamily="34" charset="-120"/>
+              </a:rPr>
+              <a:t>A purpose-built funnel feeds you a steady flow of qualified, consented borrowers you didn't have to source.</a:t>
+            </a:r>
+            <a:endParaRPr lang="en-US" sz="1350" dirty="0"/>
+          </a:p>
+        </p:txBody>
+      </p:sp>
+      <p:sp>
+        <p:nvSpPr>
+          <p:cNvPr id="14" name="Shape 10"/>
+          <p:cNvSpPr/>
+          <p:nvPr/>
+        </p:nvSpPr>
+        <p:spPr>
+          <a:xfrm>
+            <a:off x="8158277" y="1920240"/>
+            <a:ext cx="3393338" cy="3749040"/>
+          </a:xfrm>
+          <a:prstGeom prst="roundRect">
+            <a:avLst>
+              <a:gd name="adj" fmla="val 3773"/>
+            </a:avLst>
+          </a:prstGeom>
+          <a:solidFill>
+            <a:srgbClr val="E9F6F0"/>
+          </a:solidFill>
+          <a:ln/>
+          <a:effectLst>
+            <a:outerShdw sx="100000" sy="100000" kx="0" ky="0" algn="bl" rotWithShape="0" blurRad="88900" dist="38100" dir="5400000">
+              <a:srgbClr val="9AA6B8">
+                <a:alpha val="28000"/>
+              </a:srgbClr>
+            </a:outerShdw>
+          </a:effectLst>
+        </p:spPr>
+      </p:sp>
+      <p:sp>
+        <p:nvSpPr>
+          <p:cNvPr id="15" name="Shape 11"/>
+          <p:cNvSpPr/>
+          <p:nvPr/>
+        </p:nvSpPr>
+        <p:spPr>
+          <a:xfrm>
+            <a:off x="9397746" y="2377440"/>
+            <a:ext cx="914400" cy="914400"/>
+          </a:xfrm>
+          <a:prstGeom prst="ellipse">
+            <a:avLst/>
+          </a:prstGeom>
+          <a:solidFill>
+            <a:srgbClr val="0B7A5E"/>
+          </a:solidFill>
+          <a:ln/>
+        </p:spPr>
       </p:sp>
       <p:pic>
         <p:nvPicPr>
-          <p:cNvPr id="10" name="Image 2" descr="preencoded.png">    </p:cNvPr>
+          <p:cNvPr id="16" name="Image 2" descr="preencoded.png">    </p:cNvPr>
           <p:cNvPicPr>
             <a:picLocks noChangeAspect="1"/>
           </p:cNvPicPr>
@@ -5677,8 +5408,8 @@
         </p:blipFill>
         <p:spPr>
           <a:xfrm>
-            <a:off x="1005840" y="3493008"/>
-            <a:ext cx="201168" cy="201168"/>
+            <a:off x="9653778" y="2633472"/>
+            <a:ext cx="402336" cy="402336"/>
           </a:xfrm>
           <a:prstGeom prst="rect">
             <a:avLst/>
@@ -5687,638 +5418,88 @@
       </p:pic>
       <p:sp>
         <p:nvSpPr>
-          <p:cNvPr id="11" name="Text 6"/>
-          <p:cNvSpPr/>
-          <p:nvPr/>
-        </p:nvSpPr>
-        <p:spPr>
-          <a:xfrm>
-            <a:off x="1353312" y="3474720"/>
-            <a:ext cx="4434840" cy="457200"/>
-          </a:xfrm>
-          <a:prstGeom prst="rect">
-            <a:avLst/>
-          </a:prstGeom>
-          <a:noFill/>
-          <a:ln/>
-        </p:spPr>
-        <p:txBody>
-          <a:bodyPr wrap="square" lIns="0" tIns="0" rIns="0" bIns="0" rtlCol="0" anchor="ctr"/>
-          <a:lstStyle/>
-          <a:p>
-            <a:pPr indent="0" marL="0">
-              <a:buNone/>
-            </a:pPr>
-            <a:r>
-              <a:rPr lang="en-US" sz="1300" dirty="0">
+          <p:cNvPr id="17" name="Text 12"/>
+          <p:cNvSpPr/>
+          <p:nvPr/>
+        </p:nvSpPr>
+        <p:spPr>
+          <a:xfrm>
+            <a:off x="8158277" y="3520440"/>
+            <a:ext cx="3393338" cy="457200"/>
+          </a:xfrm>
+          <a:prstGeom prst="rect">
+            <a:avLst/>
+          </a:prstGeom>
+          <a:noFill/>
+          <a:ln/>
+        </p:spPr>
+        <p:txBody>
+          <a:bodyPr wrap="square" lIns="0" tIns="0" rIns="0" bIns="0" rtlCol="0" anchor="ctr"/>
+          <a:lstStyle/>
+          <a:p>
+            <a:pPr algn="ctr" indent="0" marL="0">
+              <a:buNone/>
+            </a:pPr>
+            <a:r>
+              <a:rPr lang="en-US" sz="2200" b="1" dirty="0">
                 <a:solidFill>
                   <a:srgbClr val="0F1729"/>
                 </a:solidFill>
-                <a:latin typeface="Calibri" pitchFamily="34" charset="0"/>
-                <a:ea typeface="Calibri" pitchFamily="34" charset="-122"/>
-                <a:cs typeface="Calibri" pitchFamily="34" charset="-120"/>
-              </a:rPr>
-              <a:t>MISMO 3.4 / ULDD-valid export</a:t>
-            </a:r>
-            <a:endParaRPr lang="en-US" sz="1300" dirty="0"/>
-          </a:p>
-        </p:txBody>
-      </p:sp>
-      <p:pic>
-        <p:nvPicPr>
-          <p:cNvPr id="12" name="Image 3" descr="preencoded.png">    </p:cNvPr>
-          <p:cNvPicPr>
-            <a:picLocks noChangeAspect="1"/>
-          </p:cNvPicPr>
-          <p:nvPr/>
-        </p:nvPicPr>
-        <p:blipFill>
-          <a:blip r:embed="rId4"/>
-          <a:stretch>
-            <a:fillRect/>
-          </a:stretch>
-        </p:blipFill>
-        <p:spPr>
-          <a:xfrm>
-            <a:off x="1005840" y="4041648"/>
-            <a:ext cx="201168" cy="201168"/>
-          </a:xfrm>
-          <a:prstGeom prst="rect">
-            <a:avLst/>
-          </a:prstGeom>
-        </p:spPr>
-      </p:pic>
-      <p:sp>
-        <p:nvSpPr>
-          <p:cNvPr id="13" name="Text 7"/>
-          <p:cNvSpPr/>
-          <p:nvPr/>
-        </p:nvSpPr>
-        <p:spPr>
-          <a:xfrm>
-            <a:off x="1353312" y="4023360"/>
-            <a:ext cx="4434840" cy="457200"/>
-          </a:xfrm>
-          <a:prstGeom prst="rect">
-            <a:avLst/>
-          </a:prstGeom>
-          <a:noFill/>
-          <a:ln/>
-        </p:spPr>
-        <p:txBody>
-          <a:bodyPr wrap="square" lIns="0" tIns="0" rIns="0" bIns="0" rtlCol="0" anchor="ctr"/>
-          <a:lstStyle/>
-          <a:p>
-            <a:pPr indent="0" marL="0">
-              <a:buNone/>
-            </a:pPr>
-            <a:r>
-              <a:rPr lang="en-US" sz="1300" dirty="0">
-                <a:solidFill>
-                  <a:srgbClr val="0F1729"/>
-                </a:solidFill>
-                <a:latin typeface="Calibri" pitchFamily="34" charset="0"/>
-                <a:ea typeface="Calibri" pitchFamily="34" charset="-122"/>
-                <a:cs typeface="Calibri" pitchFamily="34" charset="-120"/>
-              </a:rPr>
-              <a:t>Deterministic underwriting + dual-AUS legs</a:t>
-            </a:r>
-            <a:endParaRPr lang="en-US" sz="1300" dirty="0"/>
-          </a:p>
-        </p:txBody>
-      </p:sp>
-      <p:pic>
-        <p:nvPicPr>
-          <p:cNvPr id="14" name="Image 4" descr="preencoded.png">    </p:cNvPr>
-          <p:cNvPicPr>
-            <a:picLocks noChangeAspect="1"/>
-          </p:cNvPicPr>
-          <p:nvPr/>
-        </p:nvPicPr>
-        <p:blipFill>
-          <a:blip r:embed="rId5"/>
-          <a:stretch>
-            <a:fillRect/>
-          </a:stretch>
-        </p:blipFill>
-        <p:spPr>
-          <a:xfrm>
-            <a:off x="1005840" y="4590288"/>
-            <a:ext cx="201168" cy="201168"/>
-          </a:xfrm>
-          <a:prstGeom prst="rect">
-            <a:avLst/>
-          </a:prstGeom>
-        </p:spPr>
-      </p:pic>
-      <p:sp>
-        <p:nvSpPr>
-          <p:cNvPr id="15" name="Text 8"/>
-          <p:cNvSpPr/>
-          <p:nvPr/>
-        </p:nvSpPr>
-        <p:spPr>
-          <a:xfrm>
-            <a:off x="1353312" y="4572000"/>
-            <a:ext cx="4434840" cy="457200"/>
-          </a:xfrm>
-          <a:prstGeom prst="rect">
-            <a:avLst/>
-          </a:prstGeom>
-          <a:noFill/>
-          <a:ln/>
-        </p:spPr>
-        <p:txBody>
-          <a:bodyPr wrap="square" lIns="0" tIns="0" rIns="0" bIns="0" rtlCol="0" anchor="ctr"/>
-          <a:lstStyle/>
-          <a:p>
-            <a:pPr indent="0" marL="0">
-              <a:buNone/>
-            </a:pPr>
-            <a:r>
-              <a:rPr lang="en-US" sz="1300" dirty="0">
-                <a:solidFill>
-                  <a:srgbClr val="0F1729"/>
-                </a:solidFill>
-                <a:latin typeface="Calibri" pitchFamily="34" charset="0"/>
-                <a:ea typeface="Calibri" pitchFamily="34" charset="-122"/>
-                <a:cs typeface="Calibri" pitchFamily="34" charset="-120"/>
-              </a:rPr>
-              <a:t>Compliance engines (QM, SFC, edit mirror)</a:t>
-            </a:r>
-            <a:endParaRPr lang="en-US" sz="1300" dirty="0"/>
-          </a:p>
-        </p:txBody>
-      </p:sp>
-      <p:pic>
-        <p:nvPicPr>
-          <p:cNvPr id="16" name="Image 5" descr="preencoded.png">    </p:cNvPr>
-          <p:cNvPicPr>
-            <a:picLocks noChangeAspect="1"/>
-          </p:cNvPicPr>
-          <p:nvPr/>
-        </p:nvPicPr>
-        <p:blipFill>
-          <a:blip r:embed="rId6"/>
-          <a:stretch>
-            <a:fillRect/>
-          </a:stretch>
-        </p:blipFill>
-        <p:spPr>
-          <a:xfrm>
-            <a:off x="1005840" y="5138928"/>
-            <a:ext cx="201168" cy="201168"/>
-          </a:xfrm>
-          <a:prstGeom prst="rect">
-            <a:avLst/>
-          </a:prstGeom>
-        </p:spPr>
-      </p:pic>
-      <p:sp>
-        <p:nvSpPr>
-          <p:cNvPr id="17" name="Text 9"/>
-          <p:cNvSpPr/>
-          <p:nvPr/>
-        </p:nvSpPr>
-        <p:spPr>
-          <a:xfrm>
-            <a:off x="1353312" y="5120640"/>
-            <a:ext cx="4434840" cy="457200"/>
-          </a:xfrm>
-          <a:prstGeom prst="rect">
-            <a:avLst/>
-          </a:prstGeom>
-          <a:noFill/>
-          <a:ln/>
-        </p:spPr>
-        <p:txBody>
-          <a:bodyPr wrap="square" lIns="0" tIns="0" rIns="0" bIns="0" rtlCol="0" anchor="ctr"/>
-          <a:lstStyle/>
-          <a:p>
-            <a:pPr indent="0" marL="0">
-              <a:buNone/>
-            </a:pPr>
-            <a:r>
-              <a:rPr lang="en-US" sz="1300" dirty="0">
-                <a:solidFill>
-                  <a:srgbClr val="0F1729"/>
-                </a:solidFill>
-                <a:latin typeface="Calibri" pitchFamily="34" charset="0"/>
-                <a:ea typeface="Calibri" pitchFamily="34" charset="-122"/>
-                <a:cs typeface="Calibri" pitchFamily="34" charset="-120"/>
-              </a:rPr>
-              <a:t>Every vendor call runs behind a production adapter</a:t>
-            </a:r>
-            <a:endParaRPr lang="en-US" sz="1300" dirty="0"/>
-          </a:p>
-        </p:txBody>
-      </p:sp>
-      <p:sp>
-        <p:nvSpPr>
-          <p:cNvPr id="18" name="Shape 10"/>
-          <p:cNvSpPr/>
-          <p:nvPr/>
-        </p:nvSpPr>
-        <p:spPr>
-          <a:xfrm>
-            <a:off x="6355080" y="1783080"/>
-            <a:ext cx="5166360" cy="3977640"/>
-          </a:xfrm>
-          <a:prstGeom prst="roundRect">
-            <a:avLst>
-              <a:gd name="adj" fmla="val 2759"/>
-            </a:avLst>
-          </a:prstGeom>
-          <a:solidFill>
-            <a:srgbClr val="EEF2FB"/>
-          </a:solidFill>
-          <a:ln/>
-          <a:effectLst>
-            <a:outerShdw sx="100000" sy="100000" kx="0" ky="0" algn="bl" rotWithShape="0" blurRad="88900" dist="38100" dir="5400000">
-              <a:srgbClr val="9AA6B8">
-                <a:alpha val="28000"/>
-              </a:srgbClr>
-            </a:outerShdw>
-          </a:effectLst>
-        </p:spPr>
-      </p:sp>
-      <p:sp>
-        <p:nvSpPr>
-          <p:cNvPr id="19" name="Shape 11"/>
-          <p:cNvSpPr/>
-          <p:nvPr/>
-        </p:nvSpPr>
-        <p:spPr>
-          <a:xfrm>
-            <a:off x="6675120" y="2103120"/>
-            <a:ext cx="548640" cy="548640"/>
-          </a:xfrm>
-          <a:prstGeom prst="ellipse">
-            <a:avLst/>
-          </a:prstGeom>
-          <a:solidFill>
-            <a:srgbClr val="1C3A8F"/>
-          </a:solidFill>
-          <a:ln/>
-        </p:spPr>
-      </p:sp>
-      <p:pic>
-        <p:nvPicPr>
-          <p:cNvPr id="20" name="Image 6" descr="preencoded.png">    </p:cNvPr>
-          <p:cNvPicPr>
-            <a:picLocks noChangeAspect="1"/>
-          </p:cNvPicPr>
-          <p:nvPr/>
-        </p:nvPicPr>
-        <p:blipFill>
-          <a:blip r:embed="rId7"/>
-          <a:stretch>
-            <a:fillRect/>
-          </a:stretch>
-        </p:blipFill>
-        <p:spPr>
-          <a:xfrm>
-            <a:off x="6828739" y="2256739"/>
-            <a:ext cx="241402" cy="241402"/>
-          </a:xfrm>
-          <a:prstGeom prst="rect">
-            <a:avLst/>
-          </a:prstGeom>
-        </p:spPr>
-      </p:pic>
-      <p:sp>
-        <p:nvSpPr>
-          <p:cNvPr id="21" name="Text 12"/>
-          <p:cNvSpPr/>
-          <p:nvPr/>
-        </p:nvSpPr>
-        <p:spPr>
-          <a:xfrm>
-            <a:off x="7360920" y="2103120"/>
-            <a:ext cx="4023360" cy="548640"/>
-          </a:xfrm>
-          <a:prstGeom prst="rect">
-            <a:avLst/>
-          </a:prstGeom>
-          <a:noFill/>
-          <a:ln/>
-        </p:spPr>
-        <p:txBody>
-          <a:bodyPr wrap="square" lIns="0" tIns="0" rIns="0" bIns="0" rtlCol="0" anchor="ctr"/>
-          <a:lstStyle/>
-          <a:p>
-            <a:pPr indent="0" marL="0">
-              <a:buNone/>
-            </a:pPr>
-            <a:r>
-              <a:rPr lang="en-US" sz="1700" b="1" dirty="0">
-                <a:solidFill>
-                  <a:srgbClr val="0F1729"/>
-                </a:solidFill>
-                <a:latin typeface="Calibri" pitchFamily="34" charset="0"/>
-                <a:ea typeface="Calibri" pitchFamily="34" charset="-122"/>
-                <a:cs typeface="Calibri" pitchFamily="34" charset="-120"/>
-              </a:rPr>
-              <a:t>What makes it live</a:t>
-            </a:r>
-            <a:endParaRPr lang="en-US" sz="1700" dirty="0"/>
-          </a:p>
-        </p:txBody>
-      </p:sp>
-      <p:pic>
-        <p:nvPicPr>
-          <p:cNvPr id="22" name="Image 7" descr="preencoded.png">    </p:cNvPr>
-          <p:cNvPicPr>
-            <a:picLocks noChangeAspect="1"/>
-          </p:cNvPicPr>
-          <p:nvPr/>
-        </p:nvPicPr>
-        <p:blipFill>
-          <a:blip r:embed="rId8"/>
-          <a:stretch>
-            <a:fillRect/>
-          </a:stretch>
-        </p:blipFill>
-        <p:spPr>
-          <a:xfrm>
-            <a:off x="6720840" y="2944368"/>
-            <a:ext cx="201168" cy="201168"/>
-          </a:xfrm>
-          <a:prstGeom prst="rect">
-            <a:avLst/>
-          </a:prstGeom>
-        </p:spPr>
-      </p:pic>
-      <p:sp>
-        <p:nvSpPr>
-          <p:cNvPr id="23" name="Text 13"/>
-          <p:cNvSpPr/>
-          <p:nvPr/>
-        </p:nvSpPr>
-        <p:spPr>
-          <a:xfrm>
-            <a:off x="7068312" y="2926080"/>
-            <a:ext cx="4297680" cy="457200"/>
-          </a:xfrm>
-          <a:prstGeom prst="rect">
-            <a:avLst/>
-          </a:prstGeom>
-          <a:noFill/>
-          <a:ln/>
-        </p:spPr>
-        <p:txBody>
-          <a:bodyPr wrap="square" lIns="0" tIns="0" rIns="0" bIns="0" rtlCol="0" anchor="ctr"/>
-          <a:lstStyle/>
-          <a:p>
-            <a:pPr indent="0" marL="0">
-              <a:buNone/>
-            </a:pPr>
-            <a:r>
-              <a:rPr lang="en-US" sz="1300" dirty="0">
-                <a:solidFill>
-                  <a:srgbClr val="0F1729"/>
-                </a:solidFill>
-                <a:latin typeface="Calibri" pitchFamily="34" charset="0"/>
-                <a:ea typeface="Calibri" pitchFamily="34" charset="-122"/>
-                <a:cs typeface="Calibri" pitchFamily="34" charset="-120"/>
-              </a:rPr>
-              <a:t>NMLS licensing — in progress (the long-lead item)</a:t>
-            </a:r>
-            <a:endParaRPr lang="en-US" sz="1300" dirty="0"/>
-          </a:p>
-        </p:txBody>
-      </p:sp>
-      <p:pic>
-        <p:nvPicPr>
-          <p:cNvPr id="24" name="Image 8" descr="preencoded.png">    </p:cNvPr>
-          <p:cNvPicPr>
-            <a:picLocks noChangeAspect="1"/>
-          </p:cNvPicPr>
-          <p:nvPr/>
-        </p:nvPicPr>
-        <p:blipFill>
-          <a:blip r:embed="rId9"/>
-          <a:stretch>
-            <a:fillRect/>
-          </a:stretch>
-        </p:blipFill>
-        <p:spPr>
-          <a:xfrm>
-            <a:off x="6720840" y="3511296"/>
-            <a:ext cx="201168" cy="201168"/>
-          </a:xfrm>
-          <a:prstGeom prst="rect">
-            <a:avLst/>
-          </a:prstGeom>
-        </p:spPr>
-      </p:pic>
-      <p:sp>
-        <p:nvSpPr>
-          <p:cNvPr id="25" name="Text 14"/>
-          <p:cNvSpPr/>
-          <p:nvPr/>
-        </p:nvSpPr>
-        <p:spPr>
-          <a:xfrm>
-            <a:off x="7068312" y="3493008"/>
-            <a:ext cx="4297680" cy="457200"/>
-          </a:xfrm>
-          <a:prstGeom prst="rect">
-            <a:avLst/>
-          </a:prstGeom>
-          <a:noFill/>
-          <a:ln/>
-        </p:spPr>
-        <p:txBody>
-          <a:bodyPr wrap="square" lIns="0" tIns="0" rIns="0" bIns="0" rtlCol="0" anchor="ctr"/>
-          <a:lstStyle/>
-          <a:p>
-            <a:pPr indent="0" marL="0">
-              <a:buNone/>
-            </a:pPr>
-            <a:r>
-              <a:rPr lang="en-US" sz="1300" dirty="0">
-                <a:solidFill>
-                  <a:srgbClr val="0F1729"/>
-                </a:solidFill>
-                <a:latin typeface="Calibri" pitchFamily="34" charset="0"/>
-                <a:ea typeface="Calibri" pitchFamily="34" charset="-122"/>
-                <a:cs typeface="Calibri" pitchFamily="34" charset="-120"/>
-              </a:rPr>
-              <a:t>A signed broker agreement with your channel</a:t>
-            </a:r>
-            <a:endParaRPr lang="en-US" sz="1300" dirty="0"/>
-          </a:p>
-        </p:txBody>
-      </p:sp>
-      <p:pic>
-        <p:nvPicPr>
-          <p:cNvPr id="26" name="Image 9" descr="preencoded.png">    </p:cNvPr>
-          <p:cNvPicPr>
-            <a:picLocks noChangeAspect="1"/>
-          </p:cNvPicPr>
-          <p:nvPr/>
-        </p:nvPicPr>
-        <p:blipFill>
-          <a:blip r:embed="rId10"/>
-          <a:stretch>
-            <a:fillRect/>
-          </a:stretch>
-        </p:blipFill>
-        <p:spPr>
-          <a:xfrm>
-            <a:off x="6720840" y="4078224"/>
-            <a:ext cx="201168" cy="201168"/>
-          </a:xfrm>
-          <a:prstGeom prst="rect">
-            <a:avLst/>
-          </a:prstGeom>
-        </p:spPr>
-      </p:pic>
-      <p:sp>
-        <p:nvSpPr>
-          <p:cNvPr id="27" name="Text 15"/>
-          <p:cNvSpPr/>
-          <p:nvPr/>
-        </p:nvSpPr>
-        <p:spPr>
-          <a:xfrm>
-            <a:off x="7068312" y="4059936"/>
-            <a:ext cx="4297680" cy="457200"/>
-          </a:xfrm>
-          <a:prstGeom prst="rect">
-            <a:avLst/>
-          </a:prstGeom>
-          <a:noFill/>
-          <a:ln/>
-        </p:spPr>
-        <p:txBody>
-          <a:bodyPr wrap="square" lIns="0" tIns="0" rIns="0" bIns="0" rtlCol="0" anchor="ctr"/>
-          <a:lstStyle/>
-          <a:p>
-            <a:pPr indent="0" marL="0">
-              <a:buNone/>
-            </a:pPr>
-            <a:r>
-              <a:rPr lang="en-US" sz="1300" dirty="0">
-                <a:solidFill>
-                  <a:srgbClr val="0F1729"/>
-                </a:solidFill>
-                <a:latin typeface="Calibri" pitchFamily="34" charset="0"/>
-                <a:ea typeface="Calibri" pitchFamily="34" charset="-122"/>
-                <a:cs typeface="Calibri" pitchFamily="34" charset="-120"/>
-              </a:rPr>
-              <a:t>One adapter swap per vendor (credit, DU/LPA, AVM)</a:t>
-            </a:r>
-            <a:endParaRPr lang="en-US" sz="1300" dirty="0"/>
-          </a:p>
-        </p:txBody>
-      </p:sp>
-      <p:pic>
-        <p:nvPicPr>
-          <p:cNvPr id="28" name="Image 10" descr="preencoded.png">    </p:cNvPr>
-          <p:cNvPicPr>
-            <a:picLocks noChangeAspect="1"/>
-          </p:cNvPicPr>
-          <p:nvPr/>
-        </p:nvPicPr>
-        <p:blipFill>
-          <a:blip r:embed="rId11"/>
-          <a:stretch>
-            <a:fillRect/>
-          </a:stretch>
-        </p:blipFill>
-        <p:spPr>
-          <a:xfrm>
-            <a:off x="6720840" y="4645152"/>
-            <a:ext cx="201168" cy="201168"/>
-          </a:xfrm>
-          <a:prstGeom prst="rect">
-            <a:avLst/>
-          </a:prstGeom>
-        </p:spPr>
-      </p:pic>
-      <p:sp>
-        <p:nvSpPr>
-          <p:cNvPr id="29" name="Text 16"/>
-          <p:cNvSpPr/>
-          <p:nvPr/>
-        </p:nvSpPr>
-        <p:spPr>
-          <a:xfrm>
-            <a:off x="7068312" y="4626864"/>
-            <a:ext cx="4297680" cy="457200"/>
-          </a:xfrm>
-          <a:prstGeom prst="rect">
-            <a:avLst/>
-          </a:prstGeom>
-          <a:noFill/>
-          <a:ln/>
-        </p:spPr>
-        <p:txBody>
-          <a:bodyPr wrap="square" lIns="0" tIns="0" rIns="0" bIns="0" rtlCol="0" anchor="ctr"/>
-          <a:lstStyle/>
-          <a:p>
-            <a:pPr indent="0" marL="0">
-              <a:buNone/>
-            </a:pPr>
-            <a:r>
-              <a:rPr lang="en-US" sz="1300" dirty="0">
-                <a:solidFill>
-                  <a:srgbClr val="0F1729"/>
-                </a:solidFill>
-                <a:latin typeface="Calibri" pitchFamily="34" charset="0"/>
-                <a:ea typeface="Calibri" pitchFamily="34" charset="-122"/>
-                <a:cs typeface="Calibri" pitchFamily="34" charset="-120"/>
-              </a:rPr>
-              <a:t>Ops keys (email, storage) — a day of setup</a:t>
-            </a:r>
-            <a:endParaRPr lang="en-US" sz="1300" dirty="0"/>
-          </a:p>
-        </p:txBody>
-      </p:sp>
-      <p:sp>
-        <p:nvSpPr>
-          <p:cNvPr id="30" name="Text 17"/>
-          <p:cNvSpPr/>
-          <p:nvPr/>
-        </p:nvSpPr>
-        <p:spPr>
-          <a:xfrm>
-            <a:off x="6675120" y="5257800"/>
-            <a:ext cx="4526280" cy="457200"/>
-          </a:xfrm>
-          <a:prstGeom prst="rect">
-            <a:avLst/>
-          </a:prstGeom>
-          <a:noFill/>
-          <a:ln/>
-        </p:spPr>
-        <p:txBody>
-          <a:bodyPr wrap="square" lIns="0" tIns="0" rIns="0" bIns="0" rtlCol="0" anchor="ctr"/>
-          <a:lstStyle/>
-          <a:p>
-            <a:pPr indent="0" marL="0">
-              <a:buNone/>
-            </a:pPr>
-            <a:r>
-              <a:rPr lang="en-US" sz="1200" i="1" dirty="0">
-                <a:solidFill>
-                  <a:srgbClr val="1C3A8F"/>
-                </a:solidFill>
-                <a:latin typeface="Calibri" pitchFamily="34" charset="0"/>
-                <a:ea typeface="Calibri" pitchFamily="34" charset="-122"/>
-                <a:cs typeface="Calibri" pitchFamily="34" charset="-120"/>
-              </a:rPr>
-              <a:t>Every integration seam is already in place — going live is configuration, not a rebuild.</a:t>
-            </a:r>
-            <a:endParaRPr lang="en-US" sz="1200" dirty="0"/>
-          </a:p>
-        </p:txBody>
-      </p:sp>
-      <p:sp>
-        <p:nvSpPr>
-          <p:cNvPr id="31" name="Text 18"/>
+                <a:latin typeface="Cambria" pitchFamily="34" charset="0"/>
+                <a:ea typeface="Cambria" pitchFamily="34" charset="-122"/>
+                <a:cs typeface="Cambria" pitchFamily="34" charset="-120"/>
+              </a:rPr>
+              <a:t>Velocity</a:t>
+            </a:r>
+            <a:endParaRPr lang="en-US" sz="2200" dirty="0"/>
+          </a:p>
+        </p:txBody>
+      </p:sp>
+      <p:sp>
+        <p:nvSpPr>
+          <p:cNvPr id="18" name="Text 13"/>
+          <p:cNvSpPr/>
+          <p:nvPr/>
+        </p:nvSpPr>
+        <p:spPr>
+          <a:xfrm>
+            <a:off x="8478317" y="4114800"/>
+            <a:ext cx="2753258" cy="1371600"/>
+          </a:xfrm>
+          <a:prstGeom prst="rect">
+            <a:avLst/>
+          </a:prstGeom>
+          <a:noFill/>
+          <a:ln/>
+        </p:spPr>
+        <p:txBody>
+          <a:bodyPr wrap="square" lIns="0" tIns="0" rIns="0" bIns="0" rtlCol="0" anchor="ctr"/>
+          <a:lstStyle/>
+          <a:p>
+            <a:pPr algn="ctr" indent="0" marL="0">
+              <a:lnSpc>
+                <a:spcPct val="110000"/>
+              </a:lnSpc>
+              <a:buNone/>
+            </a:pPr>
+            <a:r>
+              <a:rPr lang="en-US" sz="1350" dirty="0">
+                <a:solidFill>
+                  <a:srgbClr val="5B6472"/>
+                </a:solidFill>
+                <a:latin typeface="Calibri" pitchFamily="34" charset="0"/>
+                <a:ea typeface="Calibri" pitchFamily="34" charset="-122"/>
+                <a:cs typeface="Calibri" pitchFamily="34" charset="-120"/>
+              </a:rPr>
+              <a:t>Certainty and speed compress the path from intake to submission — less fallout, faster funding.</a:t>
+            </a:r>
+            <a:endParaRPr lang="en-US" sz="1350" dirty="0"/>
+          </a:p>
+        </p:txBody>
+      </p:sp>
+      <p:sp>
+        <p:nvSpPr>
+          <p:cNvPr id="19" name="Text 14"/>
           <p:cNvSpPr/>
           <p:nvPr/>
         </p:nvSpPr>
@@ -6371,7 +5552,7 @@
       </p:sp>
       <p:sp>
         <p:nvSpPr>
-          <p:cNvPr id="32" name="Text 19"/>
+          <p:cNvPr id="20" name="Text 15"/>
           <p:cNvSpPr/>
           <p:nvPr/>
         </p:nvSpPr>
@@ -6422,7 +5603,7 @@
     <p:bg>
       <p:bgPr>
         <a:solidFill>
-          <a:srgbClr val="142A66"/>
+          <a:srgbClr val="FFFFFF"/>
         </a:solidFill>
       </p:bgPr>
     </p:bg>
@@ -6442,58 +5623,14 @@
       </p:grpSpPr>
       <p:sp>
         <p:nvSpPr>
-          <p:cNvPr id="2" name="Shape 0"/>
-          <p:cNvSpPr/>
-          <p:nvPr/>
-        </p:nvSpPr>
-        <p:spPr>
-          <a:xfrm>
-            <a:off x="-1371600" y="4206240"/>
-            <a:ext cx="4023360" cy="4023360"/>
-          </a:xfrm>
-          <a:prstGeom prst="ellipse">
-            <a:avLst/>
-          </a:prstGeom>
-          <a:solidFill>
-            <a:srgbClr val="1C3A8F">
-              <a:alpha val="65000"/>
-            </a:srgbClr>
-          </a:solidFill>
-          <a:ln/>
-        </p:spPr>
-      </p:sp>
-      <p:sp>
-        <p:nvSpPr>
-          <p:cNvPr id="3" name="Shape 1"/>
-          <p:cNvSpPr/>
-          <p:nvPr/>
-        </p:nvSpPr>
-        <p:spPr>
-          <a:xfrm>
-            <a:off x="10424160" y="-1188720"/>
-            <a:ext cx="3108960" cy="3108960"/>
-          </a:xfrm>
-          <a:prstGeom prst="ellipse">
-            <a:avLst/>
-          </a:prstGeom>
-          <a:solidFill>
-            <a:srgbClr val="10B981">
-              <a:alpha val="40000"/>
-            </a:srgbClr>
-          </a:solidFill>
-          <a:ln/>
-        </p:spPr>
-      </p:sp>
-      <p:sp>
-        <p:nvSpPr>
-          <p:cNvPr id="4" name="Text 2"/>
-          <p:cNvSpPr/>
-          <p:nvPr/>
-        </p:nvSpPr>
-        <p:spPr>
-          <a:xfrm>
-            <a:off x="640080" y="1234440"/>
-            <a:ext cx="7315200" cy="320040"/>
+          <p:cNvPr id="2" name="Text 0"/>
+          <p:cNvSpPr/>
+          <p:nvPr/>
+        </p:nvSpPr>
+        <p:spPr>
+          <a:xfrm>
+            <a:off x="640080" y="457200"/>
+            <a:ext cx="10911535" cy="274320"/>
           </a:xfrm>
           <a:prstGeom prst="rect">
             <a:avLst/>
@@ -6509,30 +5646,30 @@
               <a:buNone/>
             </a:pPr>
             <a:r>
-              <a:rPr lang="en-US" sz="1300" b="1" spc="300" kern="0" dirty="0">
-                <a:solidFill>
-                  <a:srgbClr val="10B981"/>
-                </a:solidFill>
-                <a:latin typeface="Calibri" pitchFamily="34" charset="0"/>
-                <a:ea typeface="Calibri" pitchFamily="34" charset="-122"/>
-                <a:cs typeface="Calibri" pitchFamily="34" charset="-120"/>
-              </a:rPr>
-              <a:t>THE ASK</a:t>
-            </a:r>
-            <a:endParaRPr lang="en-US" sz="1300" dirty="0"/>
-          </a:p>
-        </p:txBody>
-      </p:sp>
-      <p:sp>
-        <p:nvSpPr>
-          <p:cNvPr id="5" name="Text 3"/>
-          <p:cNvSpPr/>
-          <p:nvPr/>
-        </p:nvSpPr>
-        <p:spPr>
-          <a:xfrm>
-            <a:off x="640080" y="1645920"/>
-            <a:ext cx="10058400" cy="1645920"/>
+              <a:rPr lang="en-US" sz="1200" b="1" spc="200" kern="0" dirty="0">
+                <a:solidFill>
+                  <a:srgbClr val="0B7A5E"/>
+                </a:solidFill>
+                <a:latin typeface="Calibri" pitchFamily="34" charset="0"/>
+                <a:ea typeface="Calibri" pitchFamily="34" charset="-122"/>
+                <a:cs typeface="Calibri" pitchFamily="34" charset="-120"/>
+              </a:rPr>
+              <a:t>COMPLIANCE &amp; TRUST</a:t>
+            </a:r>
+            <a:endParaRPr lang="en-US" sz="1200" dirty="0"/>
+          </a:p>
+        </p:txBody>
+      </p:sp>
+      <p:sp>
+        <p:nvSpPr>
+          <p:cNvPr id="3" name="Text 1"/>
+          <p:cNvSpPr/>
+          <p:nvPr/>
+        </p:nvSpPr>
+        <p:spPr>
+          <a:xfrm>
+            <a:off x="640080" y="731520"/>
+            <a:ext cx="10911535" cy="685800"/>
           </a:xfrm>
           <a:prstGeom prst="rect">
             <a:avLst/>
@@ -6545,225 +5682,46 @@
           <a:lstStyle/>
           <a:p>
             <a:pPr indent="0" marL="0">
-              <a:lnSpc>
-                <a:spcPct val="100000"/>
-              </a:lnSpc>
-              <a:buNone/>
-            </a:pPr>
-            <a:r>
-              <a:rPr lang="en-US" sz="4000" b="1" dirty="0">
-                <a:solidFill>
-                  <a:srgbClr val="FFFFFF"/>
+              <a:buNone/>
+            </a:pPr>
+            <a:r>
+              <a:rPr lang="en-US" sz="3000" b="1" dirty="0">
+                <a:solidFill>
+                  <a:srgbClr val="0F1729"/>
                 </a:solidFill>
                 <a:latin typeface="Cambria" pitchFamily="34" charset="0"/>
                 <a:ea typeface="Cambria" pitchFamily="34" charset="-122"/>
                 <a:cs typeface="Cambria" pitchFamily="34" charset="-120"/>
               </a:rPr>
-              <a:t>Credential us on your</a:t>
-            </a:r>
-            <a:endParaRPr lang="en-US" sz="4000" dirty="0"/>
-          </a:p>
-          <a:p>
-            <a:pPr indent="0" marL="0">
-              <a:lnSpc>
-                <a:spcPct val="100000"/>
-              </a:lnSpc>
-              <a:buNone/>
-            </a:pPr>
-            <a:r>
-              <a:rPr lang="en-US" sz="4000" b="1" dirty="0">
-                <a:solidFill>
-                  <a:srgbClr val="FFFFFF"/>
-                </a:solidFill>
-                <a:latin typeface="Cambria" pitchFamily="34" charset="0"/>
-                <a:ea typeface="Cambria" pitchFamily="34" charset="-122"/>
-                <a:cs typeface="Cambria" pitchFamily="34" charset="-120"/>
-              </a:rPr>
-              <a:t>TPO channel.</a:t>
-            </a:r>
-            <a:endParaRPr lang="en-US" sz="4000" dirty="0"/>
-          </a:p>
-        </p:txBody>
-      </p:sp>
-      <p:sp>
-        <p:nvSpPr>
-          <p:cNvPr id="6" name="Text 4"/>
-          <p:cNvSpPr/>
-          <p:nvPr/>
-        </p:nvSpPr>
-        <p:spPr>
-          <a:xfrm>
-            <a:off x="640080" y="3429000"/>
-            <a:ext cx="9601200" cy="1005840"/>
-          </a:xfrm>
-          <a:prstGeom prst="rect">
-            <a:avLst/>
-          </a:prstGeom>
-          <a:noFill/>
-          <a:ln/>
-        </p:spPr>
-        <p:txBody>
-          <a:bodyPr wrap="square" lIns="0" tIns="0" rIns="0" bIns="0" rtlCol="0" anchor="ctr"/>
-          <a:lstStyle/>
-          <a:p>
-            <a:pPr indent="0" marL="0">
-              <a:lnSpc>
-                <a:spcPct val="110000"/>
-              </a:lnSpc>
-              <a:buNone/>
-            </a:pPr>
-            <a:r>
-              <a:rPr lang="en-US" sz="1700" dirty="0">
-                <a:solidFill>
-                  <a:srgbClr val="D5DEF5"/>
-                </a:solidFill>
-                <a:latin typeface="Calibri" pitchFamily="34" charset="0"/>
-                <a:ea typeface="Calibri" pitchFamily="34" charset="-122"/>
-                <a:cs typeface="Calibri" pitchFamily="34" charset="-120"/>
-              </a:rPr>
-              <a:t>The platform is built and validated. We're completing licensing now. Let's set up a live pilot the day it clears — and prove first-pass, standards-valid delivery on real files.</a:t>
-            </a:r>
-            <a:endParaRPr lang="en-US" sz="1700" dirty="0"/>
-          </a:p>
-        </p:txBody>
-      </p:sp>
-      <p:sp>
-        <p:nvSpPr>
-          <p:cNvPr id="7" name="Shape 5"/>
-          <p:cNvSpPr/>
-          <p:nvPr/>
-        </p:nvSpPr>
-        <p:spPr>
-          <a:xfrm>
-            <a:off x="640080" y="4709160"/>
-            <a:ext cx="7680960" cy="1371600"/>
-          </a:xfrm>
-          <a:prstGeom prst="roundRect">
-            <a:avLst>
-              <a:gd name="adj" fmla="val 8000"/>
-            </a:avLst>
+              <a:t>Built compliance-first, not bolted on</a:t>
+            </a:r>
+            <a:endParaRPr lang="en-US" sz="3000" dirty="0"/>
+          </a:p>
+        </p:txBody>
+      </p:sp>
+      <p:sp>
+        <p:nvSpPr>
+          <p:cNvPr id="4" name="Shape 2"/>
+          <p:cNvSpPr/>
+          <p:nvPr/>
+        </p:nvSpPr>
+        <p:spPr>
+          <a:xfrm>
+            <a:off x="640080" y="1828800"/>
+            <a:ext cx="640080" cy="640080"/>
+          </a:xfrm>
+          <a:prstGeom prst="ellipse">
+            <a:avLst/>
           </a:prstGeom>
           <a:solidFill>
-            <a:srgbClr val="FFFFFF"/>
+            <a:srgbClr val="0B7A5E"/>
           </a:solidFill>
           <a:ln/>
         </p:spPr>
-      </p:sp>
-      <p:sp>
-        <p:nvSpPr>
-          <p:cNvPr id="8" name="Text 6"/>
-          <p:cNvSpPr/>
-          <p:nvPr/>
-        </p:nvSpPr>
-        <p:spPr>
-          <a:xfrm>
-            <a:off x="960120" y="4892040"/>
-            <a:ext cx="7132320" cy="1005840"/>
-          </a:xfrm>
-          <a:prstGeom prst="rect">
-            <a:avLst/>
-          </a:prstGeom>
-          <a:noFill/>
-          <a:ln/>
-        </p:spPr>
-        <p:txBody>
-          <a:bodyPr wrap="square" lIns="0" tIns="0" rIns="0" bIns="0" rtlCol="0" anchor="ctr"/>
-          <a:lstStyle/>
-          <a:p>
-            <a:pPr indent="0" marL="0">
-              <a:buNone/>
-            </a:pPr>
-            <a:r>
-              <a:rPr lang="en-US" sz="1600" b="1" dirty="0">
-                <a:solidFill>
-                  <a:srgbClr val="0F1729"/>
-                </a:solidFill>
-                <a:latin typeface="Calibri" pitchFamily="34" charset="0"/>
-                <a:ea typeface="Calibri" pitchFamily="34" charset="-122"/>
-                <a:cs typeface="Calibri" pitchFamily="34" charset="-120"/>
-              </a:rPr>
-              <a:t>Homiquity Mortgage Corporation</a:t>
-            </a:r>
-            <a:endParaRPr lang="en-US" sz="1600" dirty="0"/>
-          </a:p>
-          <a:p>
-            <a:pPr indent="0" marL="0">
-              <a:buNone/>
-            </a:pPr>
-            <a:r>
-              <a:rPr lang="en-US" sz="1300" dirty="0">
-                <a:solidFill>
-                  <a:srgbClr val="5B6472"/>
-                </a:solidFill>
-                <a:latin typeface="Calibri" pitchFamily="34" charset="0"/>
-                <a:ea typeface="Calibri" pitchFamily="34" charset="-122"/>
-                <a:cs typeface="Calibri" pitchFamily="34" charset="-120"/>
-              </a:rPr>
-              <a:t>[Founder name — TODO]</a:t>
-            </a:r>
-            <a:endParaRPr lang="en-US" sz="1600" dirty="0"/>
-          </a:p>
-          <a:p>
-            <a:pPr indent="0" marL="0">
-              <a:buNone/>
-            </a:pPr>
-            <a:r>
-              <a:rPr lang="en-US" sz="1300" b="1" dirty="0">
-                <a:solidFill>
-                  <a:srgbClr val="1C3A8F"/>
-                </a:solidFill>
-                <a:latin typeface="Calibri" pitchFamily="34" charset="0"/>
-                <a:ea typeface="Calibri" pitchFamily="34" charset="-122"/>
-                <a:cs typeface="Calibri" pitchFamily="34" charset="-120"/>
-              </a:rPr>
-              <a:t>support@homiquity.com  ·  [phone — TODO]  ·  homiquity.com</a:t>
-            </a:r>
-            <a:endParaRPr lang="en-US" sz="1600" dirty="0"/>
-          </a:p>
-        </p:txBody>
-      </p:sp>
-      <p:sp>
-        <p:nvSpPr>
-          <p:cNvPr id="9" name="Text 7"/>
-          <p:cNvSpPr/>
-          <p:nvPr/>
-        </p:nvSpPr>
-        <p:spPr>
-          <a:xfrm>
-            <a:off x="960120" y="6053328"/>
-            <a:ext cx="5486400" cy="274320"/>
-          </a:xfrm>
-          <a:prstGeom prst="rect">
-            <a:avLst/>
-          </a:prstGeom>
-          <a:noFill/>
-          <a:ln/>
-        </p:spPr>
-        <p:txBody>
-          <a:bodyPr wrap="square" lIns="0" tIns="0" rIns="0" bIns="0" rtlCol="0" anchor="ctr"/>
-          <a:lstStyle/>
-          <a:p>
-            <a:pPr indent="0" marL="0">
-              <a:buNone/>
-            </a:pPr>
-            <a:r>
-              <a:rPr lang="en-US" sz="1000" i="1" dirty="0">
-                <a:solidFill>
-                  <a:srgbClr val="5B6472"/>
-                </a:solidFill>
-                <a:latin typeface="Calibri" pitchFamily="34" charset="0"/>
-                <a:ea typeface="Calibri" pitchFamily="34" charset="-122"/>
-                <a:cs typeface="Calibri" pitchFamily="34" charset="-120"/>
-              </a:rPr>
-              <a:t>NMLS # prints here once issued.</a:t>
-            </a:r>
-            <a:endParaRPr lang="en-US" sz="1000" dirty="0"/>
-          </a:p>
-        </p:txBody>
       </p:sp>
       <p:pic>
         <p:nvPicPr>
-          <p:cNvPr id="10" name="Image 0" descr="preencoded.png">    </p:cNvPr>
+          <p:cNvPr id="5" name="Image 0" descr="preencoded.png">    </p:cNvPr>
           <p:cNvPicPr>
             <a:picLocks noChangeAspect="1"/>
           </p:cNvPicPr>
@@ -6777,7 +5735,719 @@
         </p:blipFill>
         <p:spPr>
           <a:xfrm>
-            <a:off x="8229600" y="5029200"/>
+            <a:off x="819302" y="2008022"/>
+            <a:ext cx="281635" cy="281635"/>
+          </a:xfrm>
+          <a:prstGeom prst="rect">
+            <a:avLst/>
+          </a:prstGeom>
+        </p:spPr>
+      </p:pic>
+      <p:sp>
+        <p:nvSpPr>
+          <p:cNvPr id="6" name="Text 3"/>
+          <p:cNvSpPr/>
+          <p:nvPr/>
+        </p:nvSpPr>
+        <p:spPr>
+          <a:xfrm>
+            <a:off x="1508760" y="1737360"/>
+            <a:ext cx="4267048" cy="365760"/>
+          </a:xfrm>
+          <a:prstGeom prst="rect">
+            <a:avLst/>
+          </a:prstGeom>
+          <a:noFill/>
+          <a:ln/>
+        </p:spPr>
+        <p:txBody>
+          <a:bodyPr wrap="square" lIns="0" tIns="0" rIns="0" bIns="0" rtlCol="0" anchor="ctr"/>
+          <a:lstStyle/>
+          <a:p>
+            <a:pPr indent="0" marL="0">
+              <a:buNone/>
+            </a:pPr>
+            <a:r>
+              <a:rPr lang="en-US" sz="1500" b="1" dirty="0">
+                <a:solidFill>
+                  <a:srgbClr val="0F1729"/>
+                </a:solidFill>
+                <a:latin typeface="Calibri" pitchFamily="34" charset="0"/>
+                <a:ea typeface="Calibri" pitchFamily="34" charset="-122"/>
+                <a:cs typeface="Calibri" pitchFamily="34" charset="-120"/>
+              </a:rPr>
+              <a:t>Deterministic engine</a:t>
+            </a:r>
+            <a:endParaRPr lang="en-US" sz="1500" dirty="0"/>
+          </a:p>
+        </p:txBody>
+      </p:sp>
+      <p:sp>
+        <p:nvSpPr>
+          <p:cNvPr id="7" name="Text 4"/>
+          <p:cNvSpPr/>
+          <p:nvPr/>
+        </p:nvSpPr>
+        <p:spPr>
+          <a:xfrm>
+            <a:off x="1508760" y="2093976"/>
+            <a:ext cx="4267048" cy="640080"/>
+          </a:xfrm>
+          <a:prstGeom prst="rect">
+            <a:avLst/>
+          </a:prstGeom>
+          <a:noFill/>
+          <a:ln/>
+        </p:spPr>
+        <p:txBody>
+          <a:bodyPr wrap="square" lIns="0" tIns="0" rIns="0" bIns="0" rtlCol="0" anchor="ctr"/>
+          <a:lstStyle/>
+          <a:p>
+            <a:pPr indent="0" marL="0">
+              <a:buNone/>
+            </a:pPr>
+            <a:r>
+              <a:rPr lang="en-US" sz="1250" dirty="0">
+                <a:solidFill>
+                  <a:srgbClr val="5B6472"/>
+                </a:solidFill>
+                <a:latin typeface="Calibri" pitchFamily="34" charset="0"/>
+                <a:ea typeface="Calibri" pitchFamily="34" charset="-122"/>
+                <a:cs typeface="Calibri" pitchFamily="34" charset="-120"/>
+              </a:rPr>
+              <a:t>Auditable decisions; no AI in the lending decision, ever.</a:t>
+            </a:r>
+            <a:endParaRPr lang="en-US" sz="1250" dirty="0"/>
+          </a:p>
+        </p:txBody>
+      </p:sp>
+      <p:sp>
+        <p:nvSpPr>
+          <p:cNvPr id="8" name="Shape 5"/>
+          <p:cNvSpPr/>
+          <p:nvPr/>
+        </p:nvSpPr>
+        <p:spPr>
+          <a:xfrm>
+            <a:off x="6324448" y="1828800"/>
+            <a:ext cx="640080" cy="640080"/>
+          </a:xfrm>
+          <a:prstGeom prst="ellipse">
+            <a:avLst/>
+          </a:prstGeom>
+          <a:solidFill>
+            <a:srgbClr val="1C3A8F"/>
+          </a:solidFill>
+          <a:ln/>
+        </p:spPr>
+      </p:sp>
+      <p:pic>
+        <p:nvPicPr>
+          <p:cNvPr id="9" name="Image 1" descr="preencoded.png">    </p:cNvPr>
+          <p:cNvPicPr>
+            <a:picLocks noChangeAspect="1"/>
+          </p:cNvPicPr>
+          <p:nvPr/>
+        </p:nvPicPr>
+        <p:blipFill>
+          <a:blip r:embed="rId2"/>
+          <a:stretch>
+            <a:fillRect/>
+          </a:stretch>
+        </p:blipFill>
+        <p:spPr>
+          <a:xfrm>
+            <a:off x="6503670" y="2008022"/>
+            <a:ext cx="281635" cy="281635"/>
+          </a:xfrm>
+          <a:prstGeom prst="rect">
+            <a:avLst/>
+          </a:prstGeom>
+        </p:spPr>
+      </p:pic>
+      <p:sp>
+        <p:nvSpPr>
+          <p:cNvPr id="10" name="Text 6"/>
+          <p:cNvSpPr/>
+          <p:nvPr/>
+        </p:nvSpPr>
+        <p:spPr>
+          <a:xfrm>
+            <a:off x="7193128" y="1737360"/>
+            <a:ext cx="4267048" cy="365760"/>
+          </a:xfrm>
+          <a:prstGeom prst="rect">
+            <a:avLst/>
+          </a:prstGeom>
+          <a:noFill/>
+          <a:ln/>
+        </p:spPr>
+        <p:txBody>
+          <a:bodyPr wrap="square" lIns="0" tIns="0" rIns="0" bIns="0" rtlCol="0" anchor="ctr"/>
+          <a:lstStyle/>
+          <a:p>
+            <a:pPr indent="0" marL="0">
+              <a:buNone/>
+            </a:pPr>
+            <a:r>
+              <a:rPr lang="en-US" sz="1500" b="1" dirty="0">
+                <a:solidFill>
+                  <a:srgbClr val="0F1729"/>
+                </a:solidFill>
+                <a:latin typeface="Calibri" pitchFamily="34" charset="0"/>
+                <a:ea typeface="Calibri" pitchFamily="34" charset="-122"/>
+                <a:cs typeface="Calibri" pitchFamily="34" charset="-120"/>
+              </a:rPr>
+              <a:t>PII through a vault</a:t>
+            </a:r>
+            <a:endParaRPr lang="en-US" sz="1500" dirty="0"/>
+          </a:p>
+        </p:txBody>
+      </p:sp>
+      <p:sp>
+        <p:nvSpPr>
+          <p:cNvPr id="11" name="Text 7"/>
+          <p:cNvSpPr/>
+          <p:nvPr/>
+        </p:nvSpPr>
+        <p:spPr>
+          <a:xfrm>
+            <a:off x="7193128" y="2093976"/>
+            <a:ext cx="4267048" cy="640080"/>
+          </a:xfrm>
+          <a:prstGeom prst="rect">
+            <a:avLst/>
+          </a:prstGeom>
+          <a:noFill/>
+          <a:ln/>
+        </p:spPr>
+        <p:txBody>
+          <a:bodyPr wrap="square" lIns="0" tIns="0" rIns="0" bIns="0" rtlCol="0" anchor="ctr"/>
+          <a:lstStyle/>
+          <a:p>
+            <a:pPr indent="0" marL="0">
+              <a:buNone/>
+            </a:pPr>
+            <a:r>
+              <a:rPr lang="en-US" sz="1250" dirty="0">
+                <a:solidFill>
+                  <a:srgbClr val="5B6472"/>
+                </a:solidFill>
+                <a:latin typeface="Calibri" pitchFamily="34" charset="0"/>
+                <a:ea typeface="Calibri" pitchFamily="34" charset="-122"/>
+                <a:cs typeface="Calibri" pitchFamily="34" charset="-120"/>
+              </a:rPr>
+              <a:t>SSNs stored as ciphertext + last-4, decrypted only at the delivery seam.</a:t>
+            </a:r>
+            <a:endParaRPr lang="en-US" sz="1250" dirty="0"/>
+          </a:p>
+        </p:txBody>
+      </p:sp>
+      <p:sp>
+        <p:nvSpPr>
+          <p:cNvPr id="12" name="Shape 8"/>
+          <p:cNvSpPr/>
+          <p:nvPr/>
+        </p:nvSpPr>
+        <p:spPr>
+          <a:xfrm>
+            <a:off x="640080" y="3291840"/>
+            <a:ext cx="640080" cy="640080"/>
+          </a:xfrm>
+          <a:prstGeom prst="ellipse">
+            <a:avLst/>
+          </a:prstGeom>
+          <a:solidFill>
+            <a:srgbClr val="0B7A5E"/>
+          </a:solidFill>
+          <a:ln/>
+        </p:spPr>
+      </p:sp>
+      <p:pic>
+        <p:nvPicPr>
+          <p:cNvPr id="13" name="Image 2" descr="preencoded.png">    </p:cNvPr>
+          <p:cNvPicPr>
+            <a:picLocks noChangeAspect="1"/>
+          </p:cNvPicPr>
+          <p:nvPr/>
+        </p:nvPicPr>
+        <p:blipFill>
+          <a:blip r:embed="rId3"/>
+          <a:stretch>
+            <a:fillRect/>
+          </a:stretch>
+        </p:blipFill>
+        <p:spPr>
+          <a:xfrm>
+            <a:off x="819302" y="3471062"/>
+            <a:ext cx="281635" cy="281635"/>
+          </a:xfrm>
+          <a:prstGeom prst="rect">
+            <a:avLst/>
+          </a:prstGeom>
+        </p:spPr>
+      </p:pic>
+      <p:sp>
+        <p:nvSpPr>
+          <p:cNvPr id="14" name="Text 9"/>
+          <p:cNvSpPr/>
+          <p:nvPr/>
+        </p:nvSpPr>
+        <p:spPr>
+          <a:xfrm>
+            <a:off x="1508760" y="3200400"/>
+            <a:ext cx="4267048" cy="365760"/>
+          </a:xfrm>
+          <a:prstGeom prst="rect">
+            <a:avLst/>
+          </a:prstGeom>
+          <a:noFill/>
+          <a:ln/>
+        </p:spPr>
+        <p:txBody>
+          <a:bodyPr wrap="square" lIns="0" tIns="0" rIns="0" bIns="0" rtlCol="0" anchor="ctr"/>
+          <a:lstStyle/>
+          <a:p>
+            <a:pPr indent="0" marL="0">
+              <a:buNone/>
+            </a:pPr>
+            <a:r>
+              <a:rPr lang="en-US" sz="1500" b="1" dirty="0">
+                <a:solidFill>
+                  <a:srgbClr val="0F1729"/>
+                </a:solidFill>
+                <a:latin typeface="Calibri" pitchFamily="34" charset="0"/>
+                <a:ea typeface="Calibri" pitchFamily="34" charset="-122"/>
+                <a:cs typeface="Calibri" pitchFamily="34" charset="-120"/>
+              </a:rPr>
+              <a:t>Audit log everywhere</a:t>
+            </a:r>
+            <a:endParaRPr lang="en-US" sz="1500" dirty="0"/>
+          </a:p>
+        </p:txBody>
+      </p:sp>
+      <p:sp>
+        <p:nvSpPr>
+          <p:cNvPr id="15" name="Text 10"/>
+          <p:cNvSpPr/>
+          <p:nvPr/>
+        </p:nvSpPr>
+        <p:spPr>
+          <a:xfrm>
+            <a:off x="1508760" y="3557016"/>
+            <a:ext cx="4267048" cy="640080"/>
+          </a:xfrm>
+          <a:prstGeom prst="rect">
+            <a:avLst/>
+          </a:prstGeom>
+          <a:noFill/>
+          <a:ln/>
+        </p:spPr>
+        <p:txBody>
+          <a:bodyPr wrap="square" lIns="0" tIns="0" rIns="0" bIns="0" rtlCol="0" anchor="ctr"/>
+          <a:lstStyle/>
+          <a:p>
+            <a:pPr indent="0" marL="0">
+              <a:buNone/>
+            </a:pPr>
+            <a:r>
+              <a:rPr lang="en-US" sz="1250" dirty="0">
+                <a:solidFill>
+                  <a:srgbClr val="5B6472"/>
+                </a:solidFill>
+                <a:latin typeface="Calibri" pitchFamily="34" charset="0"/>
+                <a:ea typeface="Calibri" pitchFamily="34" charset="-122"/>
+                <a:cs typeface="Calibri" pitchFamily="34" charset="-120"/>
+              </a:rPr>
+              <a:t>Every PII touch and file action is recorded for the record.</a:t>
+            </a:r>
+            <a:endParaRPr lang="en-US" sz="1250" dirty="0"/>
+          </a:p>
+        </p:txBody>
+      </p:sp>
+      <p:sp>
+        <p:nvSpPr>
+          <p:cNvPr id="16" name="Shape 11"/>
+          <p:cNvSpPr/>
+          <p:nvPr/>
+        </p:nvSpPr>
+        <p:spPr>
+          <a:xfrm>
+            <a:off x="6324448" y="3291840"/>
+            <a:ext cx="640080" cy="640080"/>
+          </a:xfrm>
+          <a:prstGeom prst="ellipse">
+            <a:avLst/>
+          </a:prstGeom>
+          <a:solidFill>
+            <a:srgbClr val="1C3A8F"/>
+          </a:solidFill>
+          <a:ln/>
+        </p:spPr>
+      </p:sp>
+      <p:pic>
+        <p:nvPicPr>
+          <p:cNvPr id="17" name="Image 3" descr="preencoded.png">    </p:cNvPr>
+          <p:cNvPicPr>
+            <a:picLocks noChangeAspect="1"/>
+          </p:cNvPicPr>
+          <p:nvPr/>
+        </p:nvPicPr>
+        <p:blipFill>
+          <a:blip r:embed="rId4"/>
+          <a:stretch>
+            <a:fillRect/>
+          </a:stretch>
+        </p:blipFill>
+        <p:spPr>
+          <a:xfrm>
+            <a:off x="6503670" y="3471062"/>
+            <a:ext cx="281635" cy="281635"/>
+          </a:xfrm>
+          <a:prstGeom prst="rect">
+            <a:avLst/>
+          </a:prstGeom>
+        </p:spPr>
+      </p:pic>
+      <p:sp>
+        <p:nvSpPr>
+          <p:cNvPr id="18" name="Text 12"/>
+          <p:cNvSpPr/>
+          <p:nvPr/>
+        </p:nvSpPr>
+        <p:spPr>
+          <a:xfrm>
+            <a:off x="7193128" y="3200400"/>
+            <a:ext cx="4267048" cy="365760"/>
+          </a:xfrm>
+          <a:prstGeom prst="rect">
+            <a:avLst/>
+          </a:prstGeom>
+          <a:noFill/>
+          <a:ln/>
+        </p:spPr>
+        <p:txBody>
+          <a:bodyPr wrap="square" lIns="0" tIns="0" rIns="0" bIns="0" rtlCol="0" anchor="ctr"/>
+          <a:lstStyle/>
+          <a:p>
+            <a:pPr indent="0" marL="0">
+              <a:buNone/>
+            </a:pPr>
+            <a:r>
+              <a:rPr lang="en-US" sz="1500" b="1" dirty="0">
+                <a:solidFill>
+                  <a:srgbClr val="0F1729"/>
+                </a:solidFill>
+                <a:latin typeface="Calibri" pitchFamily="34" charset="0"/>
+                <a:ea typeface="Calibri" pitchFamily="34" charset="-122"/>
+                <a:cs typeface="Calibri" pitchFamily="34" charset="-120"/>
+              </a:rPr>
+              <a:t>Fannie-Mae-grounded</a:t>
+            </a:r>
+            <a:endParaRPr lang="en-US" sz="1500" dirty="0"/>
+          </a:p>
+        </p:txBody>
+      </p:sp>
+      <p:sp>
+        <p:nvSpPr>
+          <p:cNvPr id="19" name="Text 13"/>
+          <p:cNvSpPr/>
+          <p:nvPr/>
+        </p:nvSpPr>
+        <p:spPr>
+          <a:xfrm>
+            <a:off x="7193128" y="3557016"/>
+            <a:ext cx="4267048" cy="640080"/>
+          </a:xfrm>
+          <a:prstGeom prst="rect">
+            <a:avLst/>
+          </a:prstGeom>
+          <a:noFill/>
+          <a:ln/>
+        </p:spPr>
+        <p:txBody>
+          <a:bodyPr wrap="square" lIns="0" tIns="0" rIns="0" bIns="0" rtlCol="0" anchor="ctr"/>
+          <a:lstStyle/>
+          <a:p>
+            <a:pPr indent="0" marL="0">
+              <a:buNone/>
+            </a:pPr>
+            <a:r>
+              <a:rPr lang="en-US" sz="1250" dirty="0">
+                <a:solidFill>
+                  <a:srgbClr val="5B6472"/>
+                </a:solidFill>
+                <a:latin typeface="Calibri" pitchFamily="34" charset="0"/>
+                <a:ea typeface="Calibri" pitchFamily="34" charset="-122"/>
+                <a:cs typeface="Calibri" pitchFamily="34" charset="-120"/>
+              </a:rPr>
+              <a:t>MISMO/ULDD terms verified against the official spec — never invented.</a:t>
+            </a:r>
+            <a:endParaRPr lang="en-US" sz="1250" dirty="0"/>
+          </a:p>
+        </p:txBody>
+      </p:sp>
+      <p:sp>
+        <p:nvSpPr>
+          <p:cNvPr id="20" name="Shape 14"/>
+          <p:cNvSpPr/>
+          <p:nvPr/>
+        </p:nvSpPr>
+        <p:spPr>
+          <a:xfrm>
+            <a:off x="640080" y="4754880"/>
+            <a:ext cx="640080" cy="640080"/>
+          </a:xfrm>
+          <a:prstGeom prst="ellipse">
+            <a:avLst/>
+          </a:prstGeom>
+          <a:solidFill>
+            <a:srgbClr val="0B7A5E"/>
+          </a:solidFill>
+          <a:ln/>
+        </p:spPr>
+      </p:sp>
+      <p:pic>
+        <p:nvPicPr>
+          <p:cNvPr id="21" name="Image 4" descr="preencoded.png">    </p:cNvPr>
+          <p:cNvPicPr>
+            <a:picLocks noChangeAspect="1"/>
+          </p:cNvPicPr>
+          <p:nvPr/>
+        </p:nvPicPr>
+        <p:blipFill>
+          <a:blip r:embed="rId5"/>
+          <a:stretch>
+            <a:fillRect/>
+          </a:stretch>
+        </p:blipFill>
+        <p:spPr>
+          <a:xfrm>
+            <a:off x="819302" y="4934102"/>
+            <a:ext cx="281635" cy="281635"/>
+          </a:xfrm>
+          <a:prstGeom prst="rect">
+            <a:avLst/>
+          </a:prstGeom>
+        </p:spPr>
+      </p:pic>
+      <p:sp>
+        <p:nvSpPr>
+          <p:cNvPr id="22" name="Text 15"/>
+          <p:cNvSpPr/>
+          <p:nvPr/>
+        </p:nvSpPr>
+        <p:spPr>
+          <a:xfrm>
+            <a:off x="1508760" y="4663440"/>
+            <a:ext cx="4267048" cy="365760"/>
+          </a:xfrm>
+          <a:prstGeom prst="rect">
+            <a:avLst/>
+          </a:prstGeom>
+          <a:noFill/>
+          <a:ln/>
+        </p:spPr>
+        <p:txBody>
+          <a:bodyPr wrap="square" lIns="0" tIns="0" rIns="0" bIns="0" rtlCol="0" anchor="ctr"/>
+          <a:lstStyle/>
+          <a:p>
+            <a:pPr indent="0" marL="0">
+              <a:buNone/>
+            </a:pPr>
+            <a:r>
+              <a:rPr lang="en-US" sz="1500" b="1" dirty="0">
+                <a:solidFill>
+                  <a:srgbClr val="0F1729"/>
+                </a:solidFill>
+                <a:latin typeface="Calibri" pitchFamily="34" charset="0"/>
+                <a:ea typeface="Calibri" pitchFamily="34" charset="-122"/>
+                <a:cs typeface="Calibri" pitchFamily="34" charset="-120"/>
+              </a:rPr>
+              <a:t>Correct NMLS identity</a:t>
+            </a:r>
+            <a:endParaRPr lang="en-US" sz="1500" dirty="0"/>
+          </a:p>
+        </p:txBody>
+      </p:sp>
+      <p:sp>
+        <p:nvSpPr>
+          <p:cNvPr id="23" name="Text 16"/>
+          <p:cNvSpPr/>
+          <p:nvPr/>
+        </p:nvSpPr>
+        <p:spPr>
+          <a:xfrm>
+            <a:off x="1508760" y="5020056"/>
+            <a:ext cx="4267048" cy="640080"/>
+          </a:xfrm>
+          <a:prstGeom prst="rect">
+            <a:avLst/>
+          </a:prstGeom>
+          <a:noFill/>
+          <a:ln/>
+        </p:spPr>
+        <p:txBody>
+          <a:bodyPr wrap="square" lIns="0" tIns="0" rIns="0" bIns="0" rtlCol="0" anchor="ctr"/>
+          <a:lstStyle/>
+          <a:p>
+            <a:pPr indent="0" marL="0">
+              <a:buNone/>
+            </a:pPr>
+            <a:r>
+              <a:rPr lang="en-US" sz="1250" dirty="0">
+                <a:solidFill>
+                  <a:srgbClr val="5B6472"/>
+                </a:solidFill>
+                <a:latin typeface="Calibri" pitchFamily="34" charset="0"/>
+                <a:ea typeface="Calibri" pitchFamily="34" charset="-122"/>
+                <a:cs typeface="Calibri" pitchFamily="34" charset="-120"/>
+              </a:rPr>
+              <a:t>The company identifier prints on the package the day licensing lands.</a:t>
+            </a:r>
+            <a:endParaRPr lang="en-US" sz="1250" dirty="0"/>
+          </a:p>
+        </p:txBody>
+      </p:sp>
+      <p:sp>
+        <p:nvSpPr>
+          <p:cNvPr id="24" name="Shape 17"/>
+          <p:cNvSpPr/>
+          <p:nvPr/>
+        </p:nvSpPr>
+        <p:spPr>
+          <a:xfrm>
+            <a:off x="6324448" y="4754880"/>
+            <a:ext cx="640080" cy="640080"/>
+          </a:xfrm>
+          <a:prstGeom prst="ellipse">
+            <a:avLst/>
+          </a:prstGeom>
+          <a:solidFill>
+            <a:srgbClr val="1C3A8F"/>
+          </a:solidFill>
+          <a:ln/>
+        </p:spPr>
+      </p:sp>
+      <p:pic>
+        <p:nvPicPr>
+          <p:cNvPr id="25" name="Image 5" descr="preencoded.png">    </p:cNvPr>
+          <p:cNvPicPr>
+            <a:picLocks noChangeAspect="1"/>
+          </p:cNvPicPr>
+          <p:nvPr/>
+        </p:nvPicPr>
+        <p:blipFill>
+          <a:blip r:embed="rId6"/>
+          <a:stretch>
+            <a:fillRect/>
+          </a:stretch>
+        </p:blipFill>
+        <p:spPr>
+          <a:xfrm>
+            <a:off x="6503670" y="4934102"/>
+            <a:ext cx="281635" cy="281635"/>
+          </a:xfrm>
+          <a:prstGeom prst="rect">
+            <a:avLst/>
+          </a:prstGeom>
+        </p:spPr>
+      </p:pic>
+      <p:sp>
+        <p:nvSpPr>
+          <p:cNvPr id="26" name="Text 18"/>
+          <p:cNvSpPr/>
+          <p:nvPr/>
+        </p:nvSpPr>
+        <p:spPr>
+          <a:xfrm>
+            <a:off x="7193128" y="4663440"/>
+            <a:ext cx="4267048" cy="365760"/>
+          </a:xfrm>
+          <a:prstGeom prst="rect">
+            <a:avLst/>
+          </a:prstGeom>
+          <a:noFill/>
+          <a:ln/>
+        </p:spPr>
+        <p:txBody>
+          <a:bodyPr wrap="square" lIns="0" tIns="0" rIns="0" bIns="0" rtlCol="0" anchor="ctr"/>
+          <a:lstStyle/>
+          <a:p>
+            <a:pPr indent="0" marL="0">
+              <a:buNone/>
+            </a:pPr>
+            <a:r>
+              <a:rPr lang="en-US" sz="1500" b="1" dirty="0">
+                <a:solidFill>
+                  <a:srgbClr val="0F1729"/>
+                </a:solidFill>
+                <a:latin typeface="Calibri" pitchFamily="34" charset="0"/>
+                <a:ea typeface="Calibri" pitchFamily="34" charset="-122"/>
+                <a:cs typeface="Calibri" pitchFamily="34" charset="-120"/>
+              </a:rPr>
+              <a:t>The package makes no promises</a:t>
+            </a:r>
+            <a:endParaRPr lang="en-US" sz="1500" dirty="0"/>
+          </a:p>
+        </p:txBody>
+      </p:sp>
+      <p:sp>
+        <p:nvSpPr>
+          <p:cNvPr id="27" name="Text 19"/>
+          <p:cNvSpPr/>
+          <p:nvPr/>
+        </p:nvSpPr>
+        <p:spPr>
+          <a:xfrm>
+            <a:off x="7193128" y="5020056"/>
+            <a:ext cx="4267048" cy="640080"/>
+          </a:xfrm>
+          <a:prstGeom prst="rect">
+            <a:avLst/>
+          </a:prstGeom>
+          <a:noFill/>
+          <a:ln/>
+        </p:spPr>
+        <p:txBody>
+          <a:bodyPr wrap="square" lIns="0" tIns="0" rIns="0" bIns="0" rtlCol="0" anchor="ctr"/>
+          <a:lstStyle/>
+          <a:p>
+            <a:pPr indent="0" marL="0">
+              <a:buNone/>
+            </a:pPr>
+            <a:r>
+              <a:rPr lang="en-US" sz="1250" dirty="0">
+                <a:solidFill>
+                  <a:srgbClr val="5B6472"/>
+                </a:solidFill>
+                <a:latin typeface="Calibri" pitchFamily="34" charset="0"/>
+                <a:ea typeface="Calibri" pitchFamily="34" charset="-122"/>
+                <a:cs typeface="Calibri" pitchFamily="34" charset="-120"/>
+              </a:rPr>
+              <a:t>Neutral validation language — no approval or eligibility claims.</a:t>
+            </a:r>
+            <a:endParaRPr lang="en-US" sz="1250" dirty="0"/>
+          </a:p>
+        </p:txBody>
+      </p:sp>
+      <p:pic>
+        <p:nvPicPr>
+          <p:cNvPr id="28" name="Image 6" descr="preencoded.png">    </p:cNvPr>
+          <p:cNvPicPr>
+            <a:picLocks noChangeAspect="1"/>
+          </p:cNvPicPr>
+          <p:nvPr/>
+        </p:nvPicPr>
+        <p:blipFill>
+          <a:blip r:embed="rId7"/>
+          <a:stretch>
+            <a:fillRect/>
+          </a:stretch>
+        </p:blipFill>
+        <p:spPr>
+          <a:xfrm>
+            <a:off x="640080" y="5989320"/>
             <a:ext cx="256032" cy="256032"/>
           </a:xfrm>
           <a:prstGeom prst="rect">
@@ -6787,13 +6457,13 @@
       </p:pic>
       <p:sp>
         <p:nvSpPr>
-          <p:cNvPr id="11" name="Text 8"/>
-          <p:cNvSpPr/>
-          <p:nvPr/>
-        </p:nvSpPr>
-        <p:spPr>
-          <a:xfrm>
-            <a:off x="8540496" y="5010912"/>
+          <p:cNvPr id="29" name="Text 20"/>
+          <p:cNvSpPr/>
+          <p:nvPr/>
+        </p:nvSpPr>
+        <p:spPr>
+          <a:xfrm>
+            <a:off x="950976" y="5971032"/>
             <a:ext cx="2011680" cy="292608"/>
           </a:xfrm>
           <a:prstGeom prst="rect">
@@ -6812,7 +6482,7 @@
             <a:r>
               <a:rPr lang="en-US" sz="1100" b="1" dirty="0">
                 <a:solidFill>
-                  <a:srgbClr val="FFFFFF"/>
+                  <a:srgbClr val="0F1729"/>
                 </a:solidFill>
                 <a:latin typeface="Calibri" pitchFamily="34" charset="0"/>
                 <a:ea typeface="Calibri" pitchFamily="34" charset="-122"/>
@@ -6826,40 +6496,93 @@
       </p:sp>
       <p:sp>
         <p:nvSpPr>
-          <p:cNvPr id="12" name="Text 9"/>
-          <p:cNvSpPr/>
-          <p:nvPr/>
-        </p:nvSpPr>
-        <p:spPr>
-          <a:xfrm>
-            <a:off x="8229600" y="5577840"/>
-            <a:ext cx="3291840" cy="457200"/>
-          </a:xfrm>
-          <a:prstGeom prst="rect">
-            <a:avLst/>
-          </a:prstGeom>
-          <a:noFill/>
-          <a:ln/>
-        </p:spPr>
-        <p:txBody>
-          <a:bodyPr wrap="square" lIns="0" tIns="0" rIns="0" bIns="0" rtlCol="0" anchor="ctr"/>
-          <a:lstStyle/>
-          <a:p>
-            <a:pPr indent="0" marL="0">
-              <a:buNone/>
-            </a:pPr>
-            <a:r>
-              <a:rPr lang="en-US" sz="1000" dirty="0">
-                <a:solidFill>
-                  <a:srgbClr val="AEBCE0"/>
-                </a:solidFill>
-                <a:latin typeface="Calibri" pitchFamily="34" charset="0"/>
-                <a:ea typeface="Calibri" pitchFamily="34" charset="-122"/>
-                <a:cs typeface="Calibri" pitchFamily="34" charset="-120"/>
-              </a:rPr>
-              <a:t>Confidential — for prospective wholesale-lender partners.</a:t>
-            </a:r>
-            <a:endParaRPr lang="en-US" sz="1000" dirty="0"/>
+          <p:cNvPr id="30" name="Text 21"/>
+          <p:cNvSpPr/>
+          <p:nvPr/>
+        </p:nvSpPr>
+        <p:spPr>
+          <a:xfrm>
+            <a:off x="640080" y="6473952"/>
+            <a:ext cx="9144000" cy="274320"/>
+          </a:xfrm>
+          <a:prstGeom prst="rect">
+            <a:avLst/>
+          </a:prstGeom>
+          <a:noFill/>
+          <a:ln/>
+        </p:spPr>
+        <p:txBody>
+          <a:bodyPr wrap="square" lIns="0" tIns="0" rIns="0" bIns="0" rtlCol="0" anchor="ctr"/>
+          <a:lstStyle/>
+          <a:p>
+            <a:pPr algn="l" indent="0" marL="0">
+              <a:buNone/>
+            </a:pPr>
+            <a:r>
+              <a:rPr lang="en-US" sz="900" b="1" dirty="0">
+                <a:solidFill>
+                  <a:srgbClr val="1C3A8F"/>
+                </a:solidFill>
+                <a:latin typeface="Calibri" pitchFamily="34" charset="0"/>
+                <a:ea typeface="Calibri" pitchFamily="34" charset="-122"/>
+                <a:cs typeface="Calibri" pitchFamily="34" charset="-120"/>
+              </a:rPr>
+              <a:t>Homiquity Mortgage Corp.</a:t>
+            </a:r>
+            <a:pPr algn="l" indent="0" marL="0">
+              <a:buNone/>
+            </a:pPr>
+            <a:r>
+              <a:rPr lang="en-US" sz="900" dirty="0">
+                <a:solidFill>
+                  <a:srgbClr val="5B6472"/>
+                </a:solidFill>
+                <a:latin typeface="Calibri" pitchFamily="34" charset="0"/>
+                <a:ea typeface="Calibri" pitchFamily="34" charset="-122"/>
+                <a:cs typeface="Calibri" pitchFamily="34" charset="-120"/>
+              </a:rPr>
+              <a:t>   ·   Confidential — for prospective wholesale-lender partners</a:t>
+            </a:r>
+            <a:endParaRPr lang="en-US" sz="900" dirty="0"/>
+          </a:p>
+        </p:txBody>
+      </p:sp>
+      <p:sp>
+        <p:nvSpPr>
+          <p:cNvPr id="31" name="Text 22"/>
+          <p:cNvSpPr/>
+          <p:nvPr/>
+        </p:nvSpPr>
+        <p:spPr>
+          <a:xfrm>
+            <a:off x="11185855" y="6473952"/>
+            <a:ext cx="365760" cy="274320"/>
+          </a:xfrm>
+          <a:prstGeom prst="rect">
+            <a:avLst/>
+          </a:prstGeom>
+          <a:noFill/>
+          <a:ln/>
+        </p:spPr>
+        <p:txBody>
+          <a:bodyPr wrap="square" lIns="0" tIns="0" rIns="0" bIns="0" rtlCol="0" anchor="ctr"/>
+          <a:lstStyle/>
+          <a:p>
+            <a:pPr algn="r" indent="0" marL="0">
+              <a:buNone/>
+            </a:pPr>
+            <a:r>
+              <a:rPr lang="en-US" sz="900" dirty="0">
+                <a:solidFill>
+                  <a:srgbClr val="5B6472"/>
+                </a:solidFill>
+                <a:latin typeface="Calibri" pitchFamily="34" charset="0"/>
+                <a:ea typeface="Calibri" pitchFamily="34" charset="-122"/>
+                <a:cs typeface="Calibri" pitchFamily="34" charset="-120"/>
+              </a:rPr>
+              <a:t>14</a:t>
+            </a:r>
+            <a:endParaRPr lang="en-US" sz="900" dirty="0"/>
           </a:p>
         </p:txBody>
       </p:sp>
@@ -6928,7 +6651,7 @@
                 <a:ea typeface="Calibri" pitchFamily="34" charset="-122"/>
                 <a:cs typeface="Calibri" pitchFamily="34" charset="-120"/>
               </a:rPr>
-              <a:t>APPENDIX</a:t>
+              <a:t>STATUS</a:t>
             </a:r>
             <a:endParaRPr lang="en-US" sz="1200" dirty="0"/>
           </a:p>
@@ -6967,7 +6690,7 @@
                 <a:ea typeface="Cambria" pitchFamily="34" charset="-122"/>
                 <a:cs typeface="Cambria" pitchFamily="34" charset="-120"/>
               </a:rPr>
-              <a:t>Under the hood — architecture &amp; compliance base</a:t>
+              <a:t>Built and validated today — live on credentialing</a:t>
             </a:r>
             <a:endParaRPr lang="en-US" sz="3000" dirty="0"/>
           </a:p>
@@ -6982,17 +6705,24 @@
         <p:spPr>
           <a:xfrm>
             <a:off x="640080" y="1783080"/>
-            <a:ext cx="10911535" cy="960120"/>
+            <a:ext cx="5349240" cy="3977640"/>
           </a:xfrm>
           <a:prstGeom prst="roundRect">
             <a:avLst>
-              <a:gd name="adj" fmla="val 9524"/>
+              <a:gd name="adj" fmla="val 2759"/>
             </a:avLst>
           </a:prstGeom>
           <a:solidFill>
-            <a:srgbClr val="F1F5F9"/>
+            <a:srgbClr val="E9F6F0"/>
           </a:solidFill>
           <a:ln/>
+          <a:effectLst>
+            <a:outerShdw sx="100000" sy="100000" kx="0" ky="0" algn="bl" rotWithShape="0" blurRad="88900" dist="38100" dir="5400000">
+              <a:srgbClr val="9AA6B8">
+                <a:alpha val="28000"/>
+              </a:srgbClr>
+            </a:outerShdw>
+          </a:effectLst>
         </p:spPr>
       </p:sp>
       <p:sp>
@@ -7003,14 +6733,14 @@
         </p:nvSpPr>
         <p:spPr>
           <a:xfrm>
-            <a:off x="896112" y="2002536"/>
-            <a:ext cx="530352" cy="530352"/>
+            <a:off x="960120" y="2103120"/>
+            <a:ext cx="548640" cy="548640"/>
           </a:xfrm>
           <a:prstGeom prst="ellipse">
             <a:avLst/>
           </a:prstGeom>
           <a:solidFill>
-            <a:srgbClr val="1C3A8F"/>
+            <a:srgbClr val="0B7A5E"/>
           </a:solidFill>
           <a:ln/>
         </p:spPr>
@@ -7031,8 +6761,8 @@
         </p:blipFill>
         <p:spPr>
           <a:xfrm>
-            <a:off x="1044611" y="2151035"/>
-            <a:ext cx="233355" cy="233355"/>
+            <a:off x="1113739" y="2256739"/>
+            <a:ext cx="241402" cy="241402"/>
           </a:xfrm>
           <a:prstGeom prst="rect">
             <a:avLst/>
@@ -7047,8 +6777,8 @@
         </p:nvSpPr>
         <p:spPr>
           <a:xfrm>
-            <a:off x="1691640" y="1892808"/>
-            <a:ext cx="3017520" cy="731520"/>
+            <a:off x="1645920" y="2103120"/>
+            <a:ext cx="4206240" cy="548640"/>
           </a:xfrm>
           <a:prstGeom prst="rect">
             <a:avLst/>
@@ -7064,7 +6794,7 @@
               <a:buNone/>
             </a:pPr>
             <a:r>
-              <a:rPr lang="en-US" sz="1400" b="1" dirty="0">
+              <a:rPr lang="en-US" sz="1700" b="1" dirty="0">
                 <a:solidFill>
                   <a:srgbClr val="0F1729"/>
                 </a:solidFill>
@@ -7072,96 +6802,15 @@
                 <a:ea typeface="Calibri" pitchFamily="34" charset="-122"/>
                 <a:cs typeface="Calibri" pitchFamily="34" charset="-120"/>
               </a:rPr>
-              <a:t>Adapter architecture</a:t>
-            </a:r>
-            <a:endParaRPr lang="en-US" sz="1400" dirty="0"/>
-          </a:p>
-        </p:txBody>
-      </p:sp>
-      <p:sp>
-        <p:nvSpPr>
-          <p:cNvPr id="8" name="Text 5"/>
-          <p:cNvSpPr/>
-          <p:nvPr/>
-        </p:nvSpPr>
-        <p:spPr>
-          <a:xfrm>
-            <a:off x="4846320" y="1892808"/>
-            <a:ext cx="6400800" cy="731520"/>
-          </a:xfrm>
-          <a:prstGeom prst="rect">
-            <a:avLst/>
-          </a:prstGeom>
-          <a:noFill/>
-          <a:ln/>
-        </p:spPr>
-        <p:txBody>
-          <a:bodyPr wrap="square" lIns="0" tIns="0" rIns="0" bIns="0" rtlCol="0" anchor="ctr"/>
-          <a:lstStyle/>
-          <a:p>
-            <a:pPr indent="0" marL="0">
-              <a:buNone/>
-            </a:pPr>
-            <a:r>
-              <a:rPr lang="en-US" sz="1200" dirty="0">
-                <a:solidFill>
-                  <a:srgbClr val="5B6472"/>
-                </a:solidFill>
-                <a:latin typeface="Calibri" pitchFamily="34" charset="0"/>
-                <a:ea typeface="Calibri" pitchFamily="34" charset="-122"/>
-                <a:cs typeface="Calibri" pitchFamily="34" charset="-120"/>
-              </a:rPr>
-              <a:t>Every external vendor (credit, DU/LPA, AVM, lender submission) sits behind one adapter function — a single, tested seam that flips from simulation to live per contract.</a:t>
-            </a:r>
-            <a:endParaRPr lang="en-US" sz="1200" dirty="0"/>
-          </a:p>
-        </p:txBody>
-      </p:sp>
-      <p:sp>
-        <p:nvSpPr>
-          <p:cNvPr id="9" name="Shape 6"/>
-          <p:cNvSpPr/>
-          <p:nvPr/>
-        </p:nvSpPr>
-        <p:spPr>
-          <a:xfrm>
-            <a:off x="640080" y="2880360"/>
-            <a:ext cx="10911535" cy="960120"/>
-          </a:xfrm>
-          <a:prstGeom prst="roundRect">
-            <a:avLst>
-              <a:gd name="adj" fmla="val 9524"/>
-            </a:avLst>
-          </a:prstGeom>
-          <a:solidFill>
-            <a:srgbClr val="F1F5F9"/>
-          </a:solidFill>
-          <a:ln/>
-        </p:spPr>
-      </p:sp>
-      <p:sp>
-        <p:nvSpPr>
-          <p:cNvPr id="10" name="Shape 7"/>
-          <p:cNvSpPr/>
-          <p:nvPr/>
-        </p:nvSpPr>
-        <p:spPr>
-          <a:xfrm>
-            <a:off x="896112" y="3099816"/>
-            <a:ext cx="530352" cy="530352"/>
-          </a:xfrm>
-          <a:prstGeom prst="ellipse">
-            <a:avLst/>
-          </a:prstGeom>
-          <a:solidFill>
-            <a:srgbClr val="1C3A8F"/>
-          </a:solidFill>
-          <a:ln/>
-        </p:spPr>
+              <a:t>Working end to end now</a:t>
+            </a:r>
+            <a:endParaRPr lang="en-US" sz="1700" dirty="0"/>
+          </a:p>
+        </p:txBody>
       </p:sp>
       <p:pic>
         <p:nvPicPr>
-          <p:cNvPr id="11" name="Image 1" descr="preencoded.png">    </p:cNvPr>
+          <p:cNvPr id="8" name="Image 1" descr="preencoded.png">    </p:cNvPr>
           <p:cNvPicPr>
             <a:picLocks noChangeAspect="1"/>
           </p:cNvPicPr>
@@ -7175,8 +6824,8 @@
         </p:blipFill>
         <p:spPr>
           <a:xfrm>
-            <a:off x="1044611" y="3248315"/>
-            <a:ext cx="233355" cy="233355"/>
+            <a:off x="1005840" y="2944368"/>
+            <a:ext cx="201168" cy="201168"/>
           </a:xfrm>
           <a:prstGeom prst="rect">
             <a:avLst/>
@@ -7185,14 +6834,14 @@
       </p:pic>
       <p:sp>
         <p:nvSpPr>
-          <p:cNvPr id="12" name="Text 8"/>
-          <p:cNvSpPr/>
-          <p:nvPr/>
-        </p:nvSpPr>
-        <p:spPr>
-          <a:xfrm>
-            <a:off x="1691640" y="2990088"/>
-            <a:ext cx="3017520" cy="731520"/>
+          <p:cNvPr id="9" name="Text 5"/>
+          <p:cNvSpPr/>
+          <p:nvPr/>
+        </p:nvSpPr>
+        <p:spPr>
+          <a:xfrm>
+            <a:off x="1353312" y="2926080"/>
+            <a:ext cx="4434840" cy="457200"/>
           </a:xfrm>
           <a:prstGeom prst="rect">
             <a:avLst/>
@@ -7208,7 +6857,7 @@
               <a:buNone/>
             </a:pPr>
             <a:r>
-              <a:rPr lang="en-US" sz="1400" b="1" dirty="0">
+              <a:rPr lang="en-US" sz="1300" dirty="0">
                 <a:solidFill>
                   <a:srgbClr val="0F1729"/>
                 </a:solidFill>
@@ -7216,96 +6865,15 @@
                 <a:ea typeface="Calibri" pitchFamily="34" charset="-122"/>
                 <a:cs typeface="Calibri" pitchFamily="34" charset="-120"/>
               </a:rPr>
-              <a:t>Deterministic core</a:t>
-            </a:r>
-            <a:endParaRPr lang="en-US" sz="1400" dirty="0"/>
-          </a:p>
-        </p:txBody>
-      </p:sp>
-      <p:sp>
-        <p:nvSpPr>
-          <p:cNvPr id="13" name="Text 9"/>
-          <p:cNvSpPr/>
-          <p:nvPr/>
-        </p:nvSpPr>
-        <p:spPr>
-          <a:xfrm>
-            <a:off x="4846320" y="2990088"/>
-            <a:ext cx="6400800" cy="731520"/>
-          </a:xfrm>
-          <a:prstGeom prst="rect">
-            <a:avLst/>
-          </a:prstGeom>
-          <a:noFill/>
-          <a:ln/>
-        </p:spPr>
-        <p:txBody>
-          <a:bodyPr wrap="square" lIns="0" tIns="0" rIns="0" bIns="0" rtlCol="0" anchor="ctr"/>
-          <a:lstStyle/>
-          <a:p>
-            <a:pPr indent="0" marL="0">
-              <a:buNone/>
-            </a:pPr>
-            <a:r>
-              <a:rPr lang="en-US" sz="1200" dirty="0">
-                <a:solidFill>
-                  <a:srgbClr val="5B6472"/>
-                </a:solidFill>
-                <a:latin typeface="Calibri" pitchFamily="34" charset="0"/>
-                <a:ea typeface="Calibri" pitchFamily="34" charset="-122"/>
-                <a:cs typeface="Calibri" pitchFamily="34" charset="-120"/>
-              </a:rPr>
-              <a:t>The underwriting engine is pure and vendor-free: same inputs, same outcome, with typed error classification.</a:t>
-            </a:r>
-            <a:endParaRPr lang="en-US" sz="1200" dirty="0"/>
-          </a:p>
-        </p:txBody>
-      </p:sp>
-      <p:sp>
-        <p:nvSpPr>
-          <p:cNvPr id="14" name="Shape 10"/>
-          <p:cNvSpPr/>
-          <p:nvPr/>
-        </p:nvSpPr>
-        <p:spPr>
-          <a:xfrm>
-            <a:off x="640080" y="3977640"/>
-            <a:ext cx="10911535" cy="960120"/>
-          </a:xfrm>
-          <a:prstGeom prst="roundRect">
-            <a:avLst>
-              <a:gd name="adj" fmla="val 9524"/>
-            </a:avLst>
-          </a:prstGeom>
-          <a:solidFill>
-            <a:srgbClr val="F1F5F9"/>
-          </a:solidFill>
-          <a:ln/>
-        </p:spPr>
-      </p:sp>
-      <p:sp>
-        <p:nvSpPr>
-          <p:cNvPr id="15" name="Shape 11"/>
-          <p:cNvSpPr/>
-          <p:nvPr/>
-        </p:nvSpPr>
-        <p:spPr>
-          <a:xfrm>
-            <a:off x="896112" y="4197096"/>
-            <a:ext cx="530352" cy="530352"/>
-          </a:xfrm>
-          <a:prstGeom prst="ellipse">
-            <a:avLst/>
-          </a:prstGeom>
-          <a:solidFill>
-            <a:srgbClr val="1C3A8F"/>
-          </a:solidFill>
-          <a:ln/>
-        </p:spPr>
+              <a:t>Full intake → decision → package → delivery loop</a:t>
+            </a:r>
+            <a:endParaRPr lang="en-US" sz="1300" dirty="0"/>
+          </a:p>
+        </p:txBody>
       </p:sp>
       <p:pic>
         <p:nvPicPr>
-          <p:cNvPr id="16" name="Image 2" descr="preencoded.png">    </p:cNvPr>
+          <p:cNvPr id="10" name="Image 2" descr="preencoded.png">    </p:cNvPr>
           <p:cNvPicPr>
             <a:picLocks noChangeAspect="1"/>
           </p:cNvPicPr>
@@ -7319,8 +6887,8 @@
         </p:blipFill>
         <p:spPr>
           <a:xfrm>
-            <a:off x="1044611" y="4345595"/>
-            <a:ext cx="233355" cy="233355"/>
+            <a:off x="1005840" y="3493008"/>
+            <a:ext cx="201168" cy="201168"/>
           </a:xfrm>
           <a:prstGeom prst="rect">
             <a:avLst/>
@@ -7329,14 +6897,14 @@
       </p:pic>
       <p:sp>
         <p:nvSpPr>
-          <p:cNvPr id="17" name="Text 12"/>
-          <p:cNvSpPr/>
-          <p:nvPr/>
-        </p:nvSpPr>
-        <p:spPr>
-          <a:xfrm>
-            <a:off x="1691640" y="4087368"/>
-            <a:ext cx="3017520" cy="731520"/>
+          <p:cNvPr id="11" name="Text 6"/>
+          <p:cNvSpPr/>
+          <p:nvPr/>
+        </p:nvSpPr>
+        <p:spPr>
+          <a:xfrm>
+            <a:off x="1353312" y="3474720"/>
+            <a:ext cx="4434840" cy="457200"/>
           </a:xfrm>
           <a:prstGeom prst="rect">
             <a:avLst/>
@@ -7352,7 +6920,7 @@
               <a:buNone/>
             </a:pPr>
             <a:r>
-              <a:rPr lang="en-US" sz="1400" b="1" dirty="0">
+              <a:rPr lang="en-US" sz="1300" dirty="0">
                 <a:solidFill>
                   <a:srgbClr val="0F1729"/>
                 </a:solidFill>
@@ -7360,96 +6928,15 @@
                 <a:ea typeface="Calibri" pitchFamily="34" charset="-122"/>
                 <a:cs typeface="Calibri" pitchFamily="34" charset="-120"/>
               </a:rPr>
-              <a:t>Fannie Mae reference base</a:t>
-            </a:r>
-            <a:endParaRPr lang="en-US" sz="1400" dirty="0"/>
-          </a:p>
-        </p:txBody>
-      </p:sp>
-      <p:sp>
-        <p:nvSpPr>
-          <p:cNvPr id="18" name="Text 13"/>
-          <p:cNvSpPr/>
-          <p:nvPr/>
-        </p:nvSpPr>
-        <p:spPr>
-          <a:xfrm>
-            <a:off x="4846320" y="4087368"/>
-            <a:ext cx="6400800" cy="731520"/>
-          </a:xfrm>
-          <a:prstGeom prst="rect">
-            <a:avLst/>
-          </a:prstGeom>
-          <a:noFill/>
-          <a:ln/>
-        </p:spPr>
-        <p:txBody>
-          <a:bodyPr wrap="square" lIns="0" tIns="0" rIns="0" bIns="0" rtlCol="0" anchor="ctr"/>
-          <a:lstStyle/>
-          <a:p>
-            <a:pPr indent="0" marL="0">
-              <a:buNone/>
-            </a:pPr>
-            <a:r>
-              <a:rPr lang="en-US" sz="1200" dirty="0">
-                <a:solidFill>
-                  <a:srgbClr val="5B6472"/>
-                </a:solidFill>
-                <a:latin typeface="Calibri" pitchFamily="34" charset="0"/>
-                <a:ea typeface="Calibri" pitchFamily="34" charset="-122"/>
-                <a:cs typeface="Calibri" pitchFamily="34" charset="-120"/>
-              </a:rPr>
-              <a:t>MISMO 3.4 / ULDD Phase 5, UCD, Special Feature Codes and edit codes are grounded in the official spec set — terminology is verified, never invented.</a:t>
-            </a:r>
-            <a:endParaRPr lang="en-US" sz="1200" dirty="0"/>
-          </a:p>
-        </p:txBody>
-      </p:sp>
-      <p:sp>
-        <p:nvSpPr>
-          <p:cNvPr id="19" name="Shape 14"/>
-          <p:cNvSpPr/>
-          <p:nvPr/>
-        </p:nvSpPr>
-        <p:spPr>
-          <a:xfrm>
-            <a:off x="640080" y="5074920"/>
-            <a:ext cx="10911535" cy="960120"/>
-          </a:xfrm>
-          <a:prstGeom prst="roundRect">
-            <a:avLst>
-              <a:gd name="adj" fmla="val 9524"/>
-            </a:avLst>
-          </a:prstGeom>
-          <a:solidFill>
-            <a:srgbClr val="F1F5F9"/>
-          </a:solidFill>
-          <a:ln/>
-        </p:spPr>
-      </p:sp>
-      <p:sp>
-        <p:nvSpPr>
-          <p:cNvPr id="20" name="Shape 15"/>
-          <p:cNvSpPr/>
-          <p:nvPr/>
-        </p:nvSpPr>
-        <p:spPr>
-          <a:xfrm>
-            <a:off x="896112" y="5294376"/>
-            <a:ext cx="530352" cy="530352"/>
-          </a:xfrm>
-          <a:prstGeom prst="ellipse">
-            <a:avLst/>
-          </a:prstGeom>
-          <a:solidFill>
-            <a:srgbClr val="1C3A8F"/>
-          </a:solidFill>
-          <a:ln/>
-        </p:spPr>
+              <a:t>MISMO 3.4 / ULDD-valid export</a:t>
+            </a:r>
+            <a:endParaRPr lang="en-US" sz="1300" dirty="0"/>
+          </a:p>
+        </p:txBody>
       </p:sp>
       <p:pic>
         <p:nvPicPr>
-          <p:cNvPr id="21" name="Image 3" descr="preencoded.png">    </p:cNvPr>
+          <p:cNvPr id="12" name="Image 3" descr="preencoded.png">    </p:cNvPr>
           <p:cNvPicPr>
             <a:picLocks noChangeAspect="1"/>
           </p:cNvPicPr>
@@ -7463,6 +6950,1729 @@
         </p:blipFill>
         <p:spPr>
           <a:xfrm>
+            <a:off x="1005840" y="4041648"/>
+            <a:ext cx="201168" cy="201168"/>
+          </a:xfrm>
+          <a:prstGeom prst="rect">
+            <a:avLst/>
+          </a:prstGeom>
+        </p:spPr>
+      </p:pic>
+      <p:sp>
+        <p:nvSpPr>
+          <p:cNvPr id="13" name="Text 7"/>
+          <p:cNvSpPr/>
+          <p:nvPr/>
+        </p:nvSpPr>
+        <p:spPr>
+          <a:xfrm>
+            <a:off x="1353312" y="4023360"/>
+            <a:ext cx="4434840" cy="457200"/>
+          </a:xfrm>
+          <a:prstGeom prst="rect">
+            <a:avLst/>
+          </a:prstGeom>
+          <a:noFill/>
+          <a:ln/>
+        </p:spPr>
+        <p:txBody>
+          <a:bodyPr wrap="square" lIns="0" tIns="0" rIns="0" bIns="0" rtlCol="0" anchor="ctr"/>
+          <a:lstStyle/>
+          <a:p>
+            <a:pPr indent="0" marL="0">
+              <a:buNone/>
+            </a:pPr>
+            <a:r>
+              <a:rPr lang="en-US" sz="1300" dirty="0">
+                <a:solidFill>
+                  <a:srgbClr val="0F1729"/>
+                </a:solidFill>
+                <a:latin typeface="Calibri" pitchFamily="34" charset="0"/>
+                <a:ea typeface="Calibri" pitchFamily="34" charset="-122"/>
+                <a:cs typeface="Calibri" pitchFamily="34" charset="-120"/>
+              </a:rPr>
+              <a:t>Deterministic underwriting + dual-AUS legs</a:t>
+            </a:r>
+            <a:endParaRPr lang="en-US" sz="1300" dirty="0"/>
+          </a:p>
+        </p:txBody>
+      </p:sp>
+      <p:pic>
+        <p:nvPicPr>
+          <p:cNvPr id="14" name="Image 4" descr="preencoded.png">    </p:cNvPr>
+          <p:cNvPicPr>
+            <a:picLocks noChangeAspect="1"/>
+          </p:cNvPicPr>
+          <p:nvPr/>
+        </p:nvPicPr>
+        <p:blipFill>
+          <a:blip r:embed="rId5"/>
+          <a:stretch>
+            <a:fillRect/>
+          </a:stretch>
+        </p:blipFill>
+        <p:spPr>
+          <a:xfrm>
+            <a:off x="1005840" y="4590288"/>
+            <a:ext cx="201168" cy="201168"/>
+          </a:xfrm>
+          <a:prstGeom prst="rect">
+            <a:avLst/>
+          </a:prstGeom>
+        </p:spPr>
+      </p:pic>
+      <p:sp>
+        <p:nvSpPr>
+          <p:cNvPr id="15" name="Text 8"/>
+          <p:cNvSpPr/>
+          <p:nvPr/>
+        </p:nvSpPr>
+        <p:spPr>
+          <a:xfrm>
+            <a:off x="1353312" y="4572000"/>
+            <a:ext cx="4434840" cy="457200"/>
+          </a:xfrm>
+          <a:prstGeom prst="rect">
+            <a:avLst/>
+          </a:prstGeom>
+          <a:noFill/>
+          <a:ln/>
+        </p:spPr>
+        <p:txBody>
+          <a:bodyPr wrap="square" lIns="0" tIns="0" rIns="0" bIns="0" rtlCol="0" anchor="ctr"/>
+          <a:lstStyle/>
+          <a:p>
+            <a:pPr indent="0" marL="0">
+              <a:buNone/>
+            </a:pPr>
+            <a:r>
+              <a:rPr lang="en-US" sz="1300" dirty="0">
+                <a:solidFill>
+                  <a:srgbClr val="0F1729"/>
+                </a:solidFill>
+                <a:latin typeface="Calibri" pitchFamily="34" charset="0"/>
+                <a:ea typeface="Calibri" pitchFamily="34" charset="-122"/>
+                <a:cs typeface="Calibri" pitchFamily="34" charset="-120"/>
+              </a:rPr>
+              <a:t>Compliance engines (QM, SFC, edit mirror)</a:t>
+            </a:r>
+            <a:endParaRPr lang="en-US" sz="1300" dirty="0"/>
+          </a:p>
+        </p:txBody>
+      </p:sp>
+      <p:pic>
+        <p:nvPicPr>
+          <p:cNvPr id="16" name="Image 5" descr="preencoded.png">    </p:cNvPr>
+          <p:cNvPicPr>
+            <a:picLocks noChangeAspect="1"/>
+          </p:cNvPicPr>
+          <p:nvPr/>
+        </p:nvPicPr>
+        <p:blipFill>
+          <a:blip r:embed="rId6"/>
+          <a:stretch>
+            <a:fillRect/>
+          </a:stretch>
+        </p:blipFill>
+        <p:spPr>
+          <a:xfrm>
+            <a:off x="1005840" y="5138928"/>
+            <a:ext cx="201168" cy="201168"/>
+          </a:xfrm>
+          <a:prstGeom prst="rect">
+            <a:avLst/>
+          </a:prstGeom>
+        </p:spPr>
+      </p:pic>
+      <p:sp>
+        <p:nvSpPr>
+          <p:cNvPr id="17" name="Text 9"/>
+          <p:cNvSpPr/>
+          <p:nvPr/>
+        </p:nvSpPr>
+        <p:spPr>
+          <a:xfrm>
+            <a:off x="1353312" y="5120640"/>
+            <a:ext cx="4434840" cy="457200"/>
+          </a:xfrm>
+          <a:prstGeom prst="rect">
+            <a:avLst/>
+          </a:prstGeom>
+          <a:noFill/>
+          <a:ln/>
+        </p:spPr>
+        <p:txBody>
+          <a:bodyPr wrap="square" lIns="0" tIns="0" rIns="0" bIns="0" rtlCol="0" anchor="ctr"/>
+          <a:lstStyle/>
+          <a:p>
+            <a:pPr indent="0" marL="0">
+              <a:buNone/>
+            </a:pPr>
+            <a:r>
+              <a:rPr lang="en-US" sz="1300" dirty="0">
+                <a:solidFill>
+                  <a:srgbClr val="0F1729"/>
+                </a:solidFill>
+                <a:latin typeface="Calibri" pitchFamily="34" charset="0"/>
+                <a:ea typeface="Calibri" pitchFamily="34" charset="-122"/>
+                <a:cs typeface="Calibri" pitchFamily="34" charset="-120"/>
+              </a:rPr>
+              <a:t>Every vendor call runs behind a production adapter</a:t>
+            </a:r>
+            <a:endParaRPr lang="en-US" sz="1300" dirty="0"/>
+          </a:p>
+        </p:txBody>
+      </p:sp>
+      <p:sp>
+        <p:nvSpPr>
+          <p:cNvPr id="18" name="Shape 10"/>
+          <p:cNvSpPr/>
+          <p:nvPr/>
+        </p:nvSpPr>
+        <p:spPr>
+          <a:xfrm>
+            <a:off x="6355080" y="1783080"/>
+            <a:ext cx="5166360" cy="3977640"/>
+          </a:xfrm>
+          <a:prstGeom prst="roundRect">
+            <a:avLst>
+              <a:gd name="adj" fmla="val 2759"/>
+            </a:avLst>
+          </a:prstGeom>
+          <a:solidFill>
+            <a:srgbClr val="EEF2FB"/>
+          </a:solidFill>
+          <a:ln/>
+          <a:effectLst>
+            <a:outerShdw sx="100000" sy="100000" kx="0" ky="0" algn="bl" rotWithShape="0" blurRad="88900" dist="38100" dir="5400000">
+              <a:srgbClr val="9AA6B8">
+                <a:alpha val="28000"/>
+              </a:srgbClr>
+            </a:outerShdw>
+          </a:effectLst>
+        </p:spPr>
+      </p:sp>
+      <p:sp>
+        <p:nvSpPr>
+          <p:cNvPr id="19" name="Shape 11"/>
+          <p:cNvSpPr/>
+          <p:nvPr/>
+        </p:nvSpPr>
+        <p:spPr>
+          <a:xfrm>
+            <a:off x="6675120" y="2103120"/>
+            <a:ext cx="548640" cy="548640"/>
+          </a:xfrm>
+          <a:prstGeom prst="ellipse">
+            <a:avLst/>
+          </a:prstGeom>
+          <a:solidFill>
+            <a:srgbClr val="1C3A8F"/>
+          </a:solidFill>
+          <a:ln/>
+        </p:spPr>
+      </p:sp>
+      <p:pic>
+        <p:nvPicPr>
+          <p:cNvPr id="20" name="Image 6" descr="preencoded.png">    </p:cNvPr>
+          <p:cNvPicPr>
+            <a:picLocks noChangeAspect="1"/>
+          </p:cNvPicPr>
+          <p:nvPr/>
+        </p:nvPicPr>
+        <p:blipFill>
+          <a:blip r:embed="rId7"/>
+          <a:stretch>
+            <a:fillRect/>
+          </a:stretch>
+        </p:blipFill>
+        <p:spPr>
+          <a:xfrm>
+            <a:off x="6828739" y="2256739"/>
+            <a:ext cx="241402" cy="241402"/>
+          </a:xfrm>
+          <a:prstGeom prst="rect">
+            <a:avLst/>
+          </a:prstGeom>
+        </p:spPr>
+      </p:pic>
+      <p:sp>
+        <p:nvSpPr>
+          <p:cNvPr id="21" name="Text 12"/>
+          <p:cNvSpPr/>
+          <p:nvPr/>
+        </p:nvSpPr>
+        <p:spPr>
+          <a:xfrm>
+            <a:off x="7360920" y="2103120"/>
+            <a:ext cx="4023360" cy="548640"/>
+          </a:xfrm>
+          <a:prstGeom prst="rect">
+            <a:avLst/>
+          </a:prstGeom>
+          <a:noFill/>
+          <a:ln/>
+        </p:spPr>
+        <p:txBody>
+          <a:bodyPr wrap="square" lIns="0" tIns="0" rIns="0" bIns="0" rtlCol="0" anchor="ctr"/>
+          <a:lstStyle/>
+          <a:p>
+            <a:pPr indent="0" marL="0">
+              <a:buNone/>
+            </a:pPr>
+            <a:r>
+              <a:rPr lang="en-US" sz="1700" b="1" dirty="0">
+                <a:solidFill>
+                  <a:srgbClr val="0F1729"/>
+                </a:solidFill>
+                <a:latin typeface="Calibri" pitchFamily="34" charset="0"/>
+                <a:ea typeface="Calibri" pitchFamily="34" charset="-122"/>
+                <a:cs typeface="Calibri" pitchFamily="34" charset="-120"/>
+              </a:rPr>
+              <a:t>What makes it live</a:t>
+            </a:r>
+            <a:endParaRPr lang="en-US" sz="1700" dirty="0"/>
+          </a:p>
+        </p:txBody>
+      </p:sp>
+      <p:pic>
+        <p:nvPicPr>
+          <p:cNvPr id="22" name="Image 7" descr="preencoded.png">    </p:cNvPr>
+          <p:cNvPicPr>
+            <a:picLocks noChangeAspect="1"/>
+          </p:cNvPicPr>
+          <p:nvPr/>
+        </p:nvPicPr>
+        <p:blipFill>
+          <a:blip r:embed="rId8"/>
+          <a:stretch>
+            <a:fillRect/>
+          </a:stretch>
+        </p:blipFill>
+        <p:spPr>
+          <a:xfrm>
+            <a:off x="6720840" y="2944368"/>
+            <a:ext cx="201168" cy="201168"/>
+          </a:xfrm>
+          <a:prstGeom prst="rect">
+            <a:avLst/>
+          </a:prstGeom>
+        </p:spPr>
+      </p:pic>
+      <p:sp>
+        <p:nvSpPr>
+          <p:cNvPr id="23" name="Text 13"/>
+          <p:cNvSpPr/>
+          <p:nvPr/>
+        </p:nvSpPr>
+        <p:spPr>
+          <a:xfrm>
+            <a:off x="7068312" y="2926080"/>
+            <a:ext cx="4297680" cy="457200"/>
+          </a:xfrm>
+          <a:prstGeom prst="rect">
+            <a:avLst/>
+          </a:prstGeom>
+          <a:noFill/>
+          <a:ln/>
+        </p:spPr>
+        <p:txBody>
+          <a:bodyPr wrap="square" lIns="0" tIns="0" rIns="0" bIns="0" rtlCol="0" anchor="ctr"/>
+          <a:lstStyle/>
+          <a:p>
+            <a:pPr indent="0" marL="0">
+              <a:buNone/>
+            </a:pPr>
+            <a:r>
+              <a:rPr lang="en-US" sz="1300" dirty="0">
+                <a:solidFill>
+                  <a:srgbClr val="0F1729"/>
+                </a:solidFill>
+                <a:latin typeface="Calibri" pitchFamily="34" charset="0"/>
+                <a:ea typeface="Calibri" pitchFamily="34" charset="-122"/>
+                <a:cs typeface="Calibri" pitchFamily="34" charset="-120"/>
+              </a:rPr>
+              <a:t>NMLS licensing — in progress (the long-lead item)</a:t>
+            </a:r>
+            <a:endParaRPr lang="en-US" sz="1300" dirty="0"/>
+          </a:p>
+        </p:txBody>
+      </p:sp>
+      <p:pic>
+        <p:nvPicPr>
+          <p:cNvPr id="24" name="Image 8" descr="preencoded.png">    </p:cNvPr>
+          <p:cNvPicPr>
+            <a:picLocks noChangeAspect="1"/>
+          </p:cNvPicPr>
+          <p:nvPr/>
+        </p:nvPicPr>
+        <p:blipFill>
+          <a:blip r:embed="rId9"/>
+          <a:stretch>
+            <a:fillRect/>
+          </a:stretch>
+        </p:blipFill>
+        <p:spPr>
+          <a:xfrm>
+            <a:off x="6720840" y="3511296"/>
+            <a:ext cx="201168" cy="201168"/>
+          </a:xfrm>
+          <a:prstGeom prst="rect">
+            <a:avLst/>
+          </a:prstGeom>
+        </p:spPr>
+      </p:pic>
+      <p:sp>
+        <p:nvSpPr>
+          <p:cNvPr id="25" name="Text 14"/>
+          <p:cNvSpPr/>
+          <p:nvPr/>
+        </p:nvSpPr>
+        <p:spPr>
+          <a:xfrm>
+            <a:off x="7068312" y="3493008"/>
+            <a:ext cx="4297680" cy="457200"/>
+          </a:xfrm>
+          <a:prstGeom prst="rect">
+            <a:avLst/>
+          </a:prstGeom>
+          <a:noFill/>
+          <a:ln/>
+        </p:spPr>
+        <p:txBody>
+          <a:bodyPr wrap="square" lIns="0" tIns="0" rIns="0" bIns="0" rtlCol="0" anchor="ctr"/>
+          <a:lstStyle/>
+          <a:p>
+            <a:pPr indent="0" marL="0">
+              <a:buNone/>
+            </a:pPr>
+            <a:r>
+              <a:rPr lang="en-US" sz="1300" dirty="0">
+                <a:solidFill>
+                  <a:srgbClr val="0F1729"/>
+                </a:solidFill>
+                <a:latin typeface="Calibri" pitchFamily="34" charset="0"/>
+                <a:ea typeface="Calibri" pitchFamily="34" charset="-122"/>
+                <a:cs typeface="Calibri" pitchFamily="34" charset="-120"/>
+              </a:rPr>
+              <a:t>A signed broker agreement with your channel</a:t>
+            </a:r>
+            <a:endParaRPr lang="en-US" sz="1300" dirty="0"/>
+          </a:p>
+        </p:txBody>
+      </p:sp>
+      <p:pic>
+        <p:nvPicPr>
+          <p:cNvPr id="26" name="Image 9" descr="preencoded.png">    </p:cNvPr>
+          <p:cNvPicPr>
+            <a:picLocks noChangeAspect="1"/>
+          </p:cNvPicPr>
+          <p:nvPr/>
+        </p:nvPicPr>
+        <p:blipFill>
+          <a:blip r:embed="rId10"/>
+          <a:stretch>
+            <a:fillRect/>
+          </a:stretch>
+        </p:blipFill>
+        <p:spPr>
+          <a:xfrm>
+            <a:off x="6720840" y="4078224"/>
+            <a:ext cx="201168" cy="201168"/>
+          </a:xfrm>
+          <a:prstGeom prst="rect">
+            <a:avLst/>
+          </a:prstGeom>
+        </p:spPr>
+      </p:pic>
+      <p:sp>
+        <p:nvSpPr>
+          <p:cNvPr id="27" name="Text 15"/>
+          <p:cNvSpPr/>
+          <p:nvPr/>
+        </p:nvSpPr>
+        <p:spPr>
+          <a:xfrm>
+            <a:off x="7068312" y="4059936"/>
+            <a:ext cx="4297680" cy="457200"/>
+          </a:xfrm>
+          <a:prstGeom prst="rect">
+            <a:avLst/>
+          </a:prstGeom>
+          <a:noFill/>
+          <a:ln/>
+        </p:spPr>
+        <p:txBody>
+          <a:bodyPr wrap="square" lIns="0" tIns="0" rIns="0" bIns="0" rtlCol="0" anchor="ctr"/>
+          <a:lstStyle/>
+          <a:p>
+            <a:pPr indent="0" marL="0">
+              <a:buNone/>
+            </a:pPr>
+            <a:r>
+              <a:rPr lang="en-US" sz="1300" dirty="0">
+                <a:solidFill>
+                  <a:srgbClr val="0F1729"/>
+                </a:solidFill>
+                <a:latin typeface="Calibri" pitchFamily="34" charset="0"/>
+                <a:ea typeface="Calibri" pitchFamily="34" charset="-122"/>
+                <a:cs typeface="Calibri" pitchFamily="34" charset="-120"/>
+              </a:rPr>
+              <a:t>One adapter swap per vendor (credit, DU/LPA, AVM)</a:t>
+            </a:r>
+            <a:endParaRPr lang="en-US" sz="1300" dirty="0"/>
+          </a:p>
+        </p:txBody>
+      </p:sp>
+      <p:pic>
+        <p:nvPicPr>
+          <p:cNvPr id="28" name="Image 10" descr="preencoded.png">    </p:cNvPr>
+          <p:cNvPicPr>
+            <a:picLocks noChangeAspect="1"/>
+          </p:cNvPicPr>
+          <p:nvPr/>
+        </p:nvPicPr>
+        <p:blipFill>
+          <a:blip r:embed="rId11"/>
+          <a:stretch>
+            <a:fillRect/>
+          </a:stretch>
+        </p:blipFill>
+        <p:spPr>
+          <a:xfrm>
+            <a:off x="6720840" y="4645152"/>
+            <a:ext cx="201168" cy="201168"/>
+          </a:xfrm>
+          <a:prstGeom prst="rect">
+            <a:avLst/>
+          </a:prstGeom>
+        </p:spPr>
+      </p:pic>
+      <p:sp>
+        <p:nvSpPr>
+          <p:cNvPr id="29" name="Text 16"/>
+          <p:cNvSpPr/>
+          <p:nvPr/>
+        </p:nvSpPr>
+        <p:spPr>
+          <a:xfrm>
+            <a:off x="7068312" y="4626864"/>
+            <a:ext cx="4297680" cy="457200"/>
+          </a:xfrm>
+          <a:prstGeom prst="rect">
+            <a:avLst/>
+          </a:prstGeom>
+          <a:noFill/>
+          <a:ln/>
+        </p:spPr>
+        <p:txBody>
+          <a:bodyPr wrap="square" lIns="0" tIns="0" rIns="0" bIns="0" rtlCol="0" anchor="ctr"/>
+          <a:lstStyle/>
+          <a:p>
+            <a:pPr indent="0" marL="0">
+              <a:buNone/>
+            </a:pPr>
+            <a:r>
+              <a:rPr lang="en-US" sz="1300" dirty="0">
+                <a:solidFill>
+                  <a:srgbClr val="0F1729"/>
+                </a:solidFill>
+                <a:latin typeface="Calibri" pitchFamily="34" charset="0"/>
+                <a:ea typeface="Calibri" pitchFamily="34" charset="-122"/>
+                <a:cs typeface="Calibri" pitchFamily="34" charset="-120"/>
+              </a:rPr>
+              <a:t>Ops keys (email, storage) — a day of setup</a:t>
+            </a:r>
+            <a:endParaRPr lang="en-US" sz="1300" dirty="0"/>
+          </a:p>
+        </p:txBody>
+      </p:sp>
+      <p:sp>
+        <p:nvSpPr>
+          <p:cNvPr id="30" name="Text 17"/>
+          <p:cNvSpPr/>
+          <p:nvPr/>
+        </p:nvSpPr>
+        <p:spPr>
+          <a:xfrm>
+            <a:off x="6675120" y="5257800"/>
+            <a:ext cx="4526280" cy="457200"/>
+          </a:xfrm>
+          <a:prstGeom prst="rect">
+            <a:avLst/>
+          </a:prstGeom>
+          <a:noFill/>
+          <a:ln/>
+        </p:spPr>
+        <p:txBody>
+          <a:bodyPr wrap="square" lIns="0" tIns="0" rIns="0" bIns="0" rtlCol="0" anchor="ctr"/>
+          <a:lstStyle/>
+          <a:p>
+            <a:pPr indent="0" marL="0">
+              <a:buNone/>
+            </a:pPr>
+            <a:r>
+              <a:rPr lang="en-US" sz="1200" i="1" dirty="0">
+                <a:solidFill>
+                  <a:srgbClr val="1C3A8F"/>
+                </a:solidFill>
+                <a:latin typeface="Calibri" pitchFamily="34" charset="0"/>
+                <a:ea typeface="Calibri" pitchFamily="34" charset="-122"/>
+                <a:cs typeface="Calibri" pitchFamily="34" charset="-120"/>
+              </a:rPr>
+              <a:t>Every integration seam is already in place — going live is configuration, not a rebuild.</a:t>
+            </a:r>
+            <a:endParaRPr lang="en-US" sz="1200" dirty="0"/>
+          </a:p>
+        </p:txBody>
+      </p:sp>
+      <p:sp>
+        <p:nvSpPr>
+          <p:cNvPr id="31" name="Text 18"/>
+          <p:cNvSpPr/>
+          <p:nvPr/>
+        </p:nvSpPr>
+        <p:spPr>
+          <a:xfrm>
+            <a:off x="640080" y="6473952"/>
+            <a:ext cx="9144000" cy="274320"/>
+          </a:xfrm>
+          <a:prstGeom prst="rect">
+            <a:avLst/>
+          </a:prstGeom>
+          <a:noFill/>
+          <a:ln/>
+        </p:spPr>
+        <p:txBody>
+          <a:bodyPr wrap="square" lIns="0" tIns="0" rIns="0" bIns="0" rtlCol="0" anchor="ctr"/>
+          <a:lstStyle/>
+          <a:p>
+            <a:pPr algn="l" indent="0" marL="0">
+              <a:buNone/>
+            </a:pPr>
+            <a:r>
+              <a:rPr lang="en-US" sz="900" b="1" dirty="0">
+                <a:solidFill>
+                  <a:srgbClr val="1C3A8F"/>
+                </a:solidFill>
+                <a:latin typeface="Calibri" pitchFamily="34" charset="0"/>
+                <a:ea typeface="Calibri" pitchFamily="34" charset="-122"/>
+                <a:cs typeface="Calibri" pitchFamily="34" charset="-120"/>
+              </a:rPr>
+              <a:t>Homiquity Mortgage Corp.</a:t>
+            </a:r>
+            <a:pPr algn="l" indent="0" marL="0">
+              <a:buNone/>
+            </a:pPr>
+            <a:r>
+              <a:rPr lang="en-US" sz="900" dirty="0">
+                <a:solidFill>
+                  <a:srgbClr val="5B6472"/>
+                </a:solidFill>
+                <a:latin typeface="Calibri" pitchFamily="34" charset="0"/>
+                <a:ea typeface="Calibri" pitchFamily="34" charset="-122"/>
+                <a:cs typeface="Calibri" pitchFamily="34" charset="-120"/>
+              </a:rPr>
+              <a:t>   ·   Confidential — for prospective wholesale-lender partners</a:t>
+            </a:r>
+            <a:endParaRPr lang="en-US" sz="900" dirty="0"/>
+          </a:p>
+        </p:txBody>
+      </p:sp>
+      <p:sp>
+        <p:nvSpPr>
+          <p:cNvPr id="32" name="Text 19"/>
+          <p:cNvSpPr/>
+          <p:nvPr/>
+        </p:nvSpPr>
+        <p:spPr>
+          <a:xfrm>
+            <a:off x="11185855" y="6473952"/>
+            <a:ext cx="365760" cy="274320"/>
+          </a:xfrm>
+          <a:prstGeom prst="rect">
+            <a:avLst/>
+          </a:prstGeom>
+          <a:noFill/>
+          <a:ln/>
+        </p:spPr>
+        <p:txBody>
+          <a:bodyPr wrap="square" lIns="0" tIns="0" rIns="0" bIns="0" rtlCol="0" anchor="ctr"/>
+          <a:lstStyle/>
+          <a:p>
+            <a:pPr algn="r" indent="0" marL="0">
+              <a:buNone/>
+            </a:pPr>
+            <a:r>
+              <a:rPr lang="en-US" sz="900" dirty="0">
+                <a:solidFill>
+                  <a:srgbClr val="5B6472"/>
+                </a:solidFill>
+                <a:latin typeface="Calibri" pitchFamily="34" charset="0"/>
+                <a:ea typeface="Calibri" pitchFamily="34" charset="-122"/>
+                <a:cs typeface="Calibri" pitchFamily="34" charset="-120"/>
+              </a:rPr>
+              <a:t>15</a:t>
+            </a:r>
+            <a:endParaRPr lang="en-US" sz="900" dirty="0"/>
+          </a:p>
+        </p:txBody>
+      </p:sp>
+    </p:spTree>
+  </p:cSld>
+  <p:clrMapOvr>
+    <a:masterClrMapping/>
+  </p:clrMapOvr>
+</p:sld>
+</file>
+
+<file path=ppt/slides/slide16.xml><?xml version="1.0" encoding="utf-8"?>
+<p:sld xmlns:a="http://schemas.openxmlformats.org/drawingml/2006/main" xmlns:r="http://schemas.openxmlformats.org/officeDocument/2006/relationships" xmlns:p="http://schemas.openxmlformats.org/presentationml/2006/main">
+  <p:cSld name="Slide 16">
+    <p:bg>
+      <p:bgPr>
+        <a:solidFill>
+          <a:srgbClr val="142A66"/>
+        </a:solidFill>
+      </p:bgPr>
+    </p:bg>
+    <p:spTree>
+      <p:nvGrpSpPr>
+        <p:cNvPr id="1" name=""/>
+        <p:cNvGrpSpPr/>
+        <p:nvPr/>
+      </p:nvGrpSpPr>
+      <p:grpSpPr>
+        <a:xfrm>
+          <a:off x="0" y="0"/>
+          <a:ext cx="0" cy="0"/>
+          <a:chOff x="0" y="0"/>
+          <a:chExt cx="0" cy="0"/>
+        </a:xfrm>
+      </p:grpSpPr>
+      <p:sp>
+        <p:nvSpPr>
+          <p:cNvPr id="2" name="Shape 0"/>
+          <p:cNvSpPr/>
+          <p:nvPr/>
+        </p:nvSpPr>
+        <p:spPr>
+          <a:xfrm>
+            <a:off x="-1371600" y="4206240"/>
+            <a:ext cx="4023360" cy="4023360"/>
+          </a:xfrm>
+          <a:prstGeom prst="ellipse">
+            <a:avLst/>
+          </a:prstGeom>
+          <a:solidFill>
+            <a:srgbClr val="1C3A8F">
+              <a:alpha val="65000"/>
+            </a:srgbClr>
+          </a:solidFill>
+          <a:ln/>
+        </p:spPr>
+      </p:sp>
+      <p:sp>
+        <p:nvSpPr>
+          <p:cNvPr id="3" name="Shape 1"/>
+          <p:cNvSpPr/>
+          <p:nvPr/>
+        </p:nvSpPr>
+        <p:spPr>
+          <a:xfrm>
+            <a:off x="10424160" y="-1188720"/>
+            <a:ext cx="3108960" cy="3108960"/>
+          </a:xfrm>
+          <a:prstGeom prst="ellipse">
+            <a:avLst/>
+          </a:prstGeom>
+          <a:solidFill>
+            <a:srgbClr val="10B981">
+              <a:alpha val="40000"/>
+            </a:srgbClr>
+          </a:solidFill>
+          <a:ln/>
+        </p:spPr>
+      </p:sp>
+      <p:sp>
+        <p:nvSpPr>
+          <p:cNvPr id="4" name="Text 2"/>
+          <p:cNvSpPr/>
+          <p:nvPr/>
+        </p:nvSpPr>
+        <p:spPr>
+          <a:xfrm>
+            <a:off x="640080" y="1234440"/>
+            <a:ext cx="7315200" cy="320040"/>
+          </a:xfrm>
+          <a:prstGeom prst="rect">
+            <a:avLst/>
+          </a:prstGeom>
+          <a:noFill/>
+          <a:ln/>
+        </p:spPr>
+        <p:txBody>
+          <a:bodyPr wrap="square" lIns="0" tIns="0" rIns="0" bIns="0" rtlCol="0" anchor="ctr"/>
+          <a:lstStyle/>
+          <a:p>
+            <a:pPr indent="0" marL="0">
+              <a:buNone/>
+            </a:pPr>
+            <a:r>
+              <a:rPr lang="en-US" sz="1300" b="1" spc="300" kern="0" dirty="0">
+                <a:solidFill>
+                  <a:srgbClr val="10B981"/>
+                </a:solidFill>
+                <a:latin typeface="Calibri" pitchFamily="34" charset="0"/>
+                <a:ea typeface="Calibri" pitchFamily="34" charset="-122"/>
+                <a:cs typeface="Calibri" pitchFamily="34" charset="-120"/>
+              </a:rPr>
+              <a:t>THE ASK</a:t>
+            </a:r>
+            <a:endParaRPr lang="en-US" sz="1300" dirty="0"/>
+          </a:p>
+        </p:txBody>
+      </p:sp>
+      <p:sp>
+        <p:nvSpPr>
+          <p:cNvPr id="5" name="Text 3"/>
+          <p:cNvSpPr/>
+          <p:nvPr/>
+        </p:nvSpPr>
+        <p:spPr>
+          <a:xfrm>
+            <a:off x="640080" y="1645920"/>
+            <a:ext cx="10058400" cy="1645920"/>
+          </a:xfrm>
+          <a:prstGeom prst="rect">
+            <a:avLst/>
+          </a:prstGeom>
+          <a:noFill/>
+          <a:ln/>
+        </p:spPr>
+        <p:txBody>
+          <a:bodyPr wrap="square" lIns="0" tIns="0" rIns="0" bIns="0" rtlCol="0" anchor="ctr"/>
+          <a:lstStyle/>
+          <a:p>
+            <a:pPr indent="0" marL="0">
+              <a:lnSpc>
+                <a:spcPct val="100000"/>
+              </a:lnSpc>
+              <a:buNone/>
+            </a:pPr>
+            <a:r>
+              <a:rPr lang="en-US" sz="4000" b="1" dirty="0">
+                <a:solidFill>
+                  <a:srgbClr val="FFFFFF"/>
+                </a:solidFill>
+                <a:latin typeface="Cambria" pitchFamily="34" charset="0"/>
+                <a:ea typeface="Cambria" pitchFamily="34" charset="-122"/>
+                <a:cs typeface="Cambria" pitchFamily="34" charset="-120"/>
+              </a:rPr>
+              <a:t>Credential us on your</a:t>
+            </a:r>
+            <a:endParaRPr lang="en-US" sz="4000" dirty="0"/>
+          </a:p>
+          <a:p>
+            <a:pPr indent="0" marL="0">
+              <a:lnSpc>
+                <a:spcPct val="100000"/>
+              </a:lnSpc>
+              <a:buNone/>
+            </a:pPr>
+            <a:r>
+              <a:rPr lang="en-US" sz="4000" b="1" dirty="0">
+                <a:solidFill>
+                  <a:srgbClr val="FFFFFF"/>
+                </a:solidFill>
+                <a:latin typeface="Cambria" pitchFamily="34" charset="0"/>
+                <a:ea typeface="Cambria" pitchFamily="34" charset="-122"/>
+                <a:cs typeface="Cambria" pitchFamily="34" charset="-120"/>
+              </a:rPr>
+              <a:t>TPO channel.</a:t>
+            </a:r>
+            <a:endParaRPr lang="en-US" sz="4000" dirty="0"/>
+          </a:p>
+        </p:txBody>
+      </p:sp>
+      <p:sp>
+        <p:nvSpPr>
+          <p:cNvPr id="6" name="Text 4"/>
+          <p:cNvSpPr/>
+          <p:nvPr/>
+        </p:nvSpPr>
+        <p:spPr>
+          <a:xfrm>
+            <a:off x="640080" y="3429000"/>
+            <a:ext cx="9601200" cy="1005840"/>
+          </a:xfrm>
+          <a:prstGeom prst="rect">
+            <a:avLst/>
+          </a:prstGeom>
+          <a:noFill/>
+          <a:ln/>
+        </p:spPr>
+        <p:txBody>
+          <a:bodyPr wrap="square" lIns="0" tIns="0" rIns="0" bIns="0" rtlCol="0" anchor="ctr"/>
+          <a:lstStyle/>
+          <a:p>
+            <a:pPr indent="0" marL="0">
+              <a:lnSpc>
+                <a:spcPct val="110000"/>
+              </a:lnSpc>
+              <a:buNone/>
+            </a:pPr>
+            <a:r>
+              <a:rPr lang="en-US" sz="1700" dirty="0">
+                <a:solidFill>
+                  <a:srgbClr val="D5DEF5"/>
+                </a:solidFill>
+                <a:latin typeface="Calibri" pitchFamily="34" charset="0"/>
+                <a:ea typeface="Calibri" pitchFamily="34" charset="-122"/>
+                <a:cs typeface="Calibri" pitchFamily="34" charset="-120"/>
+              </a:rPr>
+              <a:t>The platform is built and validated. We're completing licensing now. Let's set up a live pilot the day it clears — and prove first-pass, standards-valid delivery on real files.</a:t>
+            </a:r>
+            <a:endParaRPr lang="en-US" sz="1700" dirty="0"/>
+          </a:p>
+        </p:txBody>
+      </p:sp>
+      <p:sp>
+        <p:nvSpPr>
+          <p:cNvPr id="7" name="Shape 5"/>
+          <p:cNvSpPr/>
+          <p:nvPr/>
+        </p:nvSpPr>
+        <p:spPr>
+          <a:xfrm>
+            <a:off x="640080" y="4709160"/>
+            <a:ext cx="7680960" cy="1371600"/>
+          </a:xfrm>
+          <a:prstGeom prst="roundRect">
+            <a:avLst>
+              <a:gd name="adj" fmla="val 8000"/>
+            </a:avLst>
+          </a:prstGeom>
+          <a:solidFill>
+            <a:srgbClr val="FFFFFF"/>
+          </a:solidFill>
+          <a:ln/>
+        </p:spPr>
+      </p:sp>
+      <p:sp>
+        <p:nvSpPr>
+          <p:cNvPr id="8" name="Text 6"/>
+          <p:cNvSpPr/>
+          <p:nvPr/>
+        </p:nvSpPr>
+        <p:spPr>
+          <a:xfrm>
+            <a:off x="960120" y="4892040"/>
+            <a:ext cx="7132320" cy="1005840"/>
+          </a:xfrm>
+          <a:prstGeom prst="rect">
+            <a:avLst/>
+          </a:prstGeom>
+          <a:noFill/>
+          <a:ln/>
+        </p:spPr>
+        <p:txBody>
+          <a:bodyPr wrap="square" lIns="0" tIns="0" rIns="0" bIns="0" rtlCol="0" anchor="ctr"/>
+          <a:lstStyle/>
+          <a:p>
+            <a:pPr indent="0" marL="0">
+              <a:buNone/>
+            </a:pPr>
+            <a:r>
+              <a:rPr lang="en-US" sz="1600" b="1" dirty="0">
+                <a:solidFill>
+                  <a:srgbClr val="0F1729"/>
+                </a:solidFill>
+                <a:latin typeface="Calibri" pitchFamily="34" charset="0"/>
+                <a:ea typeface="Calibri" pitchFamily="34" charset="-122"/>
+                <a:cs typeface="Calibri" pitchFamily="34" charset="-120"/>
+              </a:rPr>
+              <a:t>Homiquity Mortgage Corporation</a:t>
+            </a:r>
+            <a:endParaRPr lang="en-US" sz="1600" dirty="0"/>
+          </a:p>
+          <a:p>
+            <a:pPr indent="0" marL="0">
+              <a:buNone/>
+            </a:pPr>
+            <a:r>
+              <a:rPr lang="en-US" sz="1300" dirty="0">
+                <a:solidFill>
+                  <a:srgbClr val="5B6472"/>
+                </a:solidFill>
+                <a:latin typeface="Calibri" pitchFamily="34" charset="0"/>
+                <a:ea typeface="Calibri" pitchFamily="34" charset="-122"/>
+                <a:cs typeface="Calibri" pitchFamily="34" charset="-120"/>
+              </a:rPr>
+              <a:t>[Founder name — TODO]</a:t>
+            </a:r>
+            <a:endParaRPr lang="en-US" sz="1600" dirty="0"/>
+          </a:p>
+          <a:p>
+            <a:pPr indent="0" marL="0">
+              <a:buNone/>
+            </a:pPr>
+            <a:r>
+              <a:rPr lang="en-US" sz="1300" b="1" dirty="0">
+                <a:solidFill>
+                  <a:srgbClr val="1C3A8F"/>
+                </a:solidFill>
+                <a:latin typeface="Calibri" pitchFamily="34" charset="0"/>
+                <a:ea typeface="Calibri" pitchFamily="34" charset="-122"/>
+                <a:cs typeface="Calibri" pitchFamily="34" charset="-120"/>
+              </a:rPr>
+              <a:t>support@homiquity.com  ·  [phone — TODO]  ·  homiquity.com</a:t>
+            </a:r>
+            <a:endParaRPr lang="en-US" sz="1600" dirty="0"/>
+          </a:p>
+        </p:txBody>
+      </p:sp>
+      <p:sp>
+        <p:nvSpPr>
+          <p:cNvPr id="9" name="Text 7"/>
+          <p:cNvSpPr/>
+          <p:nvPr/>
+        </p:nvSpPr>
+        <p:spPr>
+          <a:xfrm>
+            <a:off x="960120" y="6053328"/>
+            <a:ext cx="5486400" cy="274320"/>
+          </a:xfrm>
+          <a:prstGeom prst="rect">
+            <a:avLst/>
+          </a:prstGeom>
+          <a:noFill/>
+          <a:ln/>
+        </p:spPr>
+        <p:txBody>
+          <a:bodyPr wrap="square" lIns="0" tIns="0" rIns="0" bIns="0" rtlCol="0" anchor="ctr"/>
+          <a:lstStyle/>
+          <a:p>
+            <a:pPr indent="0" marL="0">
+              <a:buNone/>
+            </a:pPr>
+            <a:r>
+              <a:rPr lang="en-US" sz="1000" i="1" dirty="0">
+                <a:solidFill>
+                  <a:srgbClr val="5B6472"/>
+                </a:solidFill>
+                <a:latin typeface="Calibri" pitchFamily="34" charset="0"/>
+                <a:ea typeface="Calibri" pitchFamily="34" charset="-122"/>
+                <a:cs typeface="Calibri" pitchFamily="34" charset="-120"/>
+              </a:rPr>
+              <a:t>NMLS # prints here once issued.</a:t>
+            </a:r>
+            <a:endParaRPr lang="en-US" sz="1000" dirty="0"/>
+          </a:p>
+        </p:txBody>
+      </p:sp>
+      <p:pic>
+        <p:nvPicPr>
+          <p:cNvPr id="10" name="Image 0" descr="preencoded.png">    </p:cNvPr>
+          <p:cNvPicPr>
+            <a:picLocks noChangeAspect="1"/>
+          </p:cNvPicPr>
+          <p:nvPr/>
+        </p:nvPicPr>
+        <p:blipFill>
+          <a:blip r:embed="rId1"/>
+          <a:stretch>
+            <a:fillRect/>
+          </a:stretch>
+        </p:blipFill>
+        <p:spPr>
+          <a:xfrm>
+            <a:off x="8229600" y="5029200"/>
+            <a:ext cx="256032" cy="256032"/>
+          </a:xfrm>
+          <a:prstGeom prst="rect">
+            <a:avLst/>
+          </a:prstGeom>
+        </p:spPr>
+      </p:pic>
+      <p:sp>
+        <p:nvSpPr>
+          <p:cNvPr id="11" name="Text 8"/>
+          <p:cNvSpPr/>
+          <p:nvPr/>
+        </p:nvSpPr>
+        <p:spPr>
+          <a:xfrm>
+            <a:off x="8540496" y="5010912"/>
+            <a:ext cx="2011680" cy="292608"/>
+          </a:xfrm>
+          <a:prstGeom prst="rect">
+            <a:avLst/>
+          </a:prstGeom>
+          <a:noFill/>
+          <a:ln/>
+        </p:spPr>
+        <p:txBody>
+          <a:bodyPr wrap="square" lIns="0" tIns="0" rIns="0" bIns="0" rtlCol="0" anchor="ctr"/>
+          <a:lstStyle/>
+          <a:p>
+            <a:pPr indent="0" marL="0">
+              <a:buNone/>
+            </a:pPr>
+            <a:r>
+              <a:rPr lang="en-US" sz="1100" b="1" dirty="0">
+                <a:solidFill>
+                  <a:srgbClr val="FFFFFF"/>
+                </a:solidFill>
+                <a:latin typeface="Calibri" pitchFamily="34" charset="0"/>
+                <a:ea typeface="Calibri" pitchFamily="34" charset="-122"/>
+                <a:cs typeface="Calibri" pitchFamily="34" charset="-120"/>
+              </a:rPr>
+              <a:t>Veteran-founded</a:t>
+            </a:r>
+            <a:endParaRPr lang="en-US" sz="1100" dirty="0"/>
+          </a:p>
+        </p:txBody>
+      </p:sp>
+      <p:sp>
+        <p:nvSpPr>
+          <p:cNvPr id="12" name="Text 9"/>
+          <p:cNvSpPr/>
+          <p:nvPr/>
+        </p:nvSpPr>
+        <p:spPr>
+          <a:xfrm>
+            <a:off x="8229600" y="5577840"/>
+            <a:ext cx="3291840" cy="457200"/>
+          </a:xfrm>
+          <a:prstGeom prst="rect">
+            <a:avLst/>
+          </a:prstGeom>
+          <a:noFill/>
+          <a:ln/>
+        </p:spPr>
+        <p:txBody>
+          <a:bodyPr wrap="square" lIns="0" tIns="0" rIns="0" bIns="0" rtlCol="0" anchor="ctr"/>
+          <a:lstStyle/>
+          <a:p>
+            <a:pPr indent="0" marL="0">
+              <a:buNone/>
+            </a:pPr>
+            <a:r>
+              <a:rPr lang="en-US" sz="1000" dirty="0">
+                <a:solidFill>
+                  <a:srgbClr val="AEBCE0"/>
+                </a:solidFill>
+                <a:latin typeface="Calibri" pitchFamily="34" charset="0"/>
+                <a:ea typeface="Calibri" pitchFamily="34" charset="-122"/>
+                <a:cs typeface="Calibri" pitchFamily="34" charset="-120"/>
+              </a:rPr>
+              <a:t>Confidential — for prospective wholesale-lender partners.</a:t>
+            </a:r>
+            <a:endParaRPr lang="en-US" sz="1000" dirty="0"/>
+          </a:p>
+        </p:txBody>
+      </p:sp>
+    </p:spTree>
+  </p:cSld>
+  <p:clrMapOvr>
+    <a:masterClrMapping/>
+  </p:clrMapOvr>
+</p:sld>
+</file>
+
+<file path=ppt/slides/slide17.xml><?xml version="1.0" encoding="utf-8"?>
+<p:sld xmlns:a="http://schemas.openxmlformats.org/drawingml/2006/main" xmlns:r="http://schemas.openxmlformats.org/officeDocument/2006/relationships" xmlns:p="http://schemas.openxmlformats.org/presentationml/2006/main">
+  <p:cSld name="Slide 17">
+    <p:bg>
+      <p:bgPr>
+        <a:solidFill>
+          <a:srgbClr val="FFFFFF"/>
+        </a:solidFill>
+      </p:bgPr>
+    </p:bg>
+    <p:spTree>
+      <p:nvGrpSpPr>
+        <p:cNvPr id="1" name=""/>
+        <p:cNvGrpSpPr/>
+        <p:nvPr/>
+      </p:nvGrpSpPr>
+      <p:grpSpPr>
+        <a:xfrm>
+          <a:off x="0" y="0"/>
+          <a:ext cx="0" cy="0"/>
+          <a:chOff x="0" y="0"/>
+          <a:chExt cx="0" cy="0"/>
+        </a:xfrm>
+      </p:grpSpPr>
+      <p:sp>
+        <p:nvSpPr>
+          <p:cNvPr id="2" name="Text 0"/>
+          <p:cNvSpPr/>
+          <p:nvPr/>
+        </p:nvSpPr>
+        <p:spPr>
+          <a:xfrm>
+            <a:off x="640080" y="457200"/>
+            <a:ext cx="10911535" cy="274320"/>
+          </a:xfrm>
+          <a:prstGeom prst="rect">
+            <a:avLst/>
+          </a:prstGeom>
+          <a:noFill/>
+          <a:ln/>
+        </p:spPr>
+        <p:txBody>
+          <a:bodyPr wrap="square" lIns="0" tIns="0" rIns="0" bIns="0" rtlCol="0" anchor="ctr"/>
+          <a:lstStyle/>
+          <a:p>
+            <a:pPr indent="0" marL="0">
+              <a:buNone/>
+            </a:pPr>
+            <a:r>
+              <a:rPr lang="en-US" sz="1200" b="1" spc="200" kern="0" dirty="0">
+                <a:solidFill>
+                  <a:srgbClr val="0B7A5E"/>
+                </a:solidFill>
+                <a:latin typeface="Calibri" pitchFamily="34" charset="0"/>
+                <a:ea typeface="Calibri" pitchFamily="34" charset="-122"/>
+                <a:cs typeface="Calibri" pitchFamily="34" charset="-120"/>
+              </a:rPr>
+              <a:t>APPENDIX</a:t>
+            </a:r>
+            <a:endParaRPr lang="en-US" sz="1200" dirty="0"/>
+          </a:p>
+        </p:txBody>
+      </p:sp>
+      <p:sp>
+        <p:nvSpPr>
+          <p:cNvPr id="3" name="Text 1"/>
+          <p:cNvSpPr/>
+          <p:nvPr/>
+        </p:nvSpPr>
+        <p:spPr>
+          <a:xfrm>
+            <a:off x="640080" y="731520"/>
+            <a:ext cx="10911535" cy="685800"/>
+          </a:xfrm>
+          <a:prstGeom prst="rect">
+            <a:avLst/>
+          </a:prstGeom>
+          <a:noFill/>
+          <a:ln/>
+        </p:spPr>
+        <p:txBody>
+          <a:bodyPr wrap="square" lIns="0" tIns="0" rIns="0" bIns="0" rtlCol="0" anchor="ctr"/>
+          <a:lstStyle/>
+          <a:p>
+            <a:pPr indent="0" marL="0">
+              <a:buNone/>
+            </a:pPr>
+            <a:r>
+              <a:rPr lang="en-US" sz="3000" b="1" dirty="0">
+                <a:solidFill>
+                  <a:srgbClr val="0F1729"/>
+                </a:solidFill>
+                <a:latin typeface="Cambria" pitchFamily="34" charset="0"/>
+                <a:ea typeface="Cambria" pitchFamily="34" charset="-122"/>
+                <a:cs typeface="Cambria" pitchFamily="34" charset="-120"/>
+              </a:rPr>
+              <a:t>Under the hood — architecture &amp; compliance base</a:t>
+            </a:r>
+            <a:endParaRPr lang="en-US" sz="3000" dirty="0"/>
+          </a:p>
+        </p:txBody>
+      </p:sp>
+      <p:sp>
+        <p:nvSpPr>
+          <p:cNvPr id="4" name="Shape 2"/>
+          <p:cNvSpPr/>
+          <p:nvPr/>
+        </p:nvSpPr>
+        <p:spPr>
+          <a:xfrm>
+            <a:off x="640080" y="1783080"/>
+            <a:ext cx="10911535" cy="960120"/>
+          </a:xfrm>
+          <a:prstGeom prst="roundRect">
+            <a:avLst>
+              <a:gd name="adj" fmla="val 9524"/>
+            </a:avLst>
+          </a:prstGeom>
+          <a:solidFill>
+            <a:srgbClr val="F1F5F9"/>
+          </a:solidFill>
+          <a:ln/>
+        </p:spPr>
+      </p:sp>
+      <p:sp>
+        <p:nvSpPr>
+          <p:cNvPr id="5" name="Shape 3"/>
+          <p:cNvSpPr/>
+          <p:nvPr/>
+        </p:nvSpPr>
+        <p:spPr>
+          <a:xfrm>
+            <a:off x="896112" y="2002536"/>
+            <a:ext cx="530352" cy="530352"/>
+          </a:xfrm>
+          <a:prstGeom prst="ellipse">
+            <a:avLst/>
+          </a:prstGeom>
+          <a:solidFill>
+            <a:srgbClr val="1C3A8F"/>
+          </a:solidFill>
+          <a:ln/>
+        </p:spPr>
+      </p:sp>
+      <p:pic>
+        <p:nvPicPr>
+          <p:cNvPr id="6" name="Image 0" descr="preencoded.png">    </p:cNvPr>
+          <p:cNvPicPr>
+            <a:picLocks noChangeAspect="1"/>
+          </p:cNvPicPr>
+          <p:nvPr/>
+        </p:nvPicPr>
+        <p:blipFill>
+          <a:blip r:embed="rId1"/>
+          <a:stretch>
+            <a:fillRect/>
+          </a:stretch>
+        </p:blipFill>
+        <p:spPr>
+          <a:xfrm>
+            <a:off x="1044611" y="2151035"/>
+            <a:ext cx="233355" cy="233355"/>
+          </a:xfrm>
+          <a:prstGeom prst="rect">
+            <a:avLst/>
+          </a:prstGeom>
+        </p:spPr>
+      </p:pic>
+      <p:sp>
+        <p:nvSpPr>
+          <p:cNvPr id="7" name="Text 4"/>
+          <p:cNvSpPr/>
+          <p:nvPr/>
+        </p:nvSpPr>
+        <p:spPr>
+          <a:xfrm>
+            <a:off x="1691640" y="1892808"/>
+            <a:ext cx="3017520" cy="731520"/>
+          </a:xfrm>
+          <a:prstGeom prst="rect">
+            <a:avLst/>
+          </a:prstGeom>
+          <a:noFill/>
+          <a:ln/>
+        </p:spPr>
+        <p:txBody>
+          <a:bodyPr wrap="square" lIns="0" tIns="0" rIns="0" bIns="0" rtlCol="0" anchor="ctr"/>
+          <a:lstStyle/>
+          <a:p>
+            <a:pPr indent="0" marL="0">
+              <a:buNone/>
+            </a:pPr>
+            <a:r>
+              <a:rPr lang="en-US" sz="1400" b="1" dirty="0">
+                <a:solidFill>
+                  <a:srgbClr val="0F1729"/>
+                </a:solidFill>
+                <a:latin typeface="Calibri" pitchFamily="34" charset="0"/>
+                <a:ea typeface="Calibri" pitchFamily="34" charset="-122"/>
+                <a:cs typeface="Calibri" pitchFamily="34" charset="-120"/>
+              </a:rPr>
+              <a:t>Adapter architecture</a:t>
+            </a:r>
+            <a:endParaRPr lang="en-US" sz="1400" dirty="0"/>
+          </a:p>
+        </p:txBody>
+      </p:sp>
+      <p:sp>
+        <p:nvSpPr>
+          <p:cNvPr id="8" name="Text 5"/>
+          <p:cNvSpPr/>
+          <p:nvPr/>
+        </p:nvSpPr>
+        <p:spPr>
+          <a:xfrm>
+            <a:off x="4846320" y="1892808"/>
+            <a:ext cx="6400800" cy="731520"/>
+          </a:xfrm>
+          <a:prstGeom prst="rect">
+            <a:avLst/>
+          </a:prstGeom>
+          <a:noFill/>
+          <a:ln/>
+        </p:spPr>
+        <p:txBody>
+          <a:bodyPr wrap="square" lIns="0" tIns="0" rIns="0" bIns="0" rtlCol="0" anchor="ctr"/>
+          <a:lstStyle/>
+          <a:p>
+            <a:pPr indent="0" marL="0">
+              <a:buNone/>
+            </a:pPr>
+            <a:r>
+              <a:rPr lang="en-US" sz="1200" dirty="0">
+                <a:solidFill>
+                  <a:srgbClr val="5B6472"/>
+                </a:solidFill>
+                <a:latin typeface="Calibri" pitchFamily="34" charset="0"/>
+                <a:ea typeface="Calibri" pitchFamily="34" charset="-122"/>
+                <a:cs typeface="Calibri" pitchFamily="34" charset="-120"/>
+              </a:rPr>
+              <a:t>Every external vendor (credit, DU/LPA, AVM, lender submission) sits behind one adapter function — a single, tested seam that flips from simulation to live per contract.</a:t>
+            </a:r>
+            <a:endParaRPr lang="en-US" sz="1200" dirty="0"/>
+          </a:p>
+        </p:txBody>
+      </p:sp>
+      <p:sp>
+        <p:nvSpPr>
+          <p:cNvPr id="9" name="Shape 6"/>
+          <p:cNvSpPr/>
+          <p:nvPr/>
+        </p:nvSpPr>
+        <p:spPr>
+          <a:xfrm>
+            <a:off x="640080" y="2880360"/>
+            <a:ext cx="10911535" cy="960120"/>
+          </a:xfrm>
+          <a:prstGeom prst="roundRect">
+            <a:avLst>
+              <a:gd name="adj" fmla="val 9524"/>
+            </a:avLst>
+          </a:prstGeom>
+          <a:solidFill>
+            <a:srgbClr val="F1F5F9"/>
+          </a:solidFill>
+          <a:ln/>
+        </p:spPr>
+      </p:sp>
+      <p:sp>
+        <p:nvSpPr>
+          <p:cNvPr id="10" name="Shape 7"/>
+          <p:cNvSpPr/>
+          <p:nvPr/>
+        </p:nvSpPr>
+        <p:spPr>
+          <a:xfrm>
+            <a:off x="896112" y="3099816"/>
+            <a:ext cx="530352" cy="530352"/>
+          </a:xfrm>
+          <a:prstGeom prst="ellipse">
+            <a:avLst/>
+          </a:prstGeom>
+          <a:solidFill>
+            <a:srgbClr val="1C3A8F"/>
+          </a:solidFill>
+          <a:ln/>
+        </p:spPr>
+      </p:sp>
+      <p:pic>
+        <p:nvPicPr>
+          <p:cNvPr id="11" name="Image 1" descr="preencoded.png">    </p:cNvPr>
+          <p:cNvPicPr>
+            <a:picLocks noChangeAspect="1"/>
+          </p:cNvPicPr>
+          <p:nvPr/>
+        </p:nvPicPr>
+        <p:blipFill>
+          <a:blip r:embed="rId2"/>
+          <a:stretch>
+            <a:fillRect/>
+          </a:stretch>
+        </p:blipFill>
+        <p:spPr>
+          <a:xfrm>
+            <a:off x="1044611" y="3248315"/>
+            <a:ext cx="233355" cy="233355"/>
+          </a:xfrm>
+          <a:prstGeom prst="rect">
+            <a:avLst/>
+          </a:prstGeom>
+        </p:spPr>
+      </p:pic>
+      <p:sp>
+        <p:nvSpPr>
+          <p:cNvPr id="12" name="Text 8"/>
+          <p:cNvSpPr/>
+          <p:nvPr/>
+        </p:nvSpPr>
+        <p:spPr>
+          <a:xfrm>
+            <a:off x="1691640" y="2990088"/>
+            <a:ext cx="3017520" cy="731520"/>
+          </a:xfrm>
+          <a:prstGeom prst="rect">
+            <a:avLst/>
+          </a:prstGeom>
+          <a:noFill/>
+          <a:ln/>
+        </p:spPr>
+        <p:txBody>
+          <a:bodyPr wrap="square" lIns="0" tIns="0" rIns="0" bIns="0" rtlCol="0" anchor="ctr"/>
+          <a:lstStyle/>
+          <a:p>
+            <a:pPr indent="0" marL="0">
+              <a:buNone/>
+            </a:pPr>
+            <a:r>
+              <a:rPr lang="en-US" sz="1400" b="1" dirty="0">
+                <a:solidFill>
+                  <a:srgbClr val="0F1729"/>
+                </a:solidFill>
+                <a:latin typeface="Calibri" pitchFamily="34" charset="0"/>
+                <a:ea typeface="Calibri" pitchFamily="34" charset="-122"/>
+                <a:cs typeface="Calibri" pitchFamily="34" charset="-120"/>
+              </a:rPr>
+              <a:t>Deterministic core</a:t>
+            </a:r>
+            <a:endParaRPr lang="en-US" sz="1400" dirty="0"/>
+          </a:p>
+        </p:txBody>
+      </p:sp>
+      <p:sp>
+        <p:nvSpPr>
+          <p:cNvPr id="13" name="Text 9"/>
+          <p:cNvSpPr/>
+          <p:nvPr/>
+        </p:nvSpPr>
+        <p:spPr>
+          <a:xfrm>
+            <a:off x="4846320" y="2990088"/>
+            <a:ext cx="6400800" cy="731520"/>
+          </a:xfrm>
+          <a:prstGeom prst="rect">
+            <a:avLst/>
+          </a:prstGeom>
+          <a:noFill/>
+          <a:ln/>
+        </p:spPr>
+        <p:txBody>
+          <a:bodyPr wrap="square" lIns="0" tIns="0" rIns="0" bIns="0" rtlCol="0" anchor="ctr"/>
+          <a:lstStyle/>
+          <a:p>
+            <a:pPr indent="0" marL="0">
+              <a:buNone/>
+            </a:pPr>
+            <a:r>
+              <a:rPr lang="en-US" sz="1200" dirty="0">
+                <a:solidFill>
+                  <a:srgbClr val="5B6472"/>
+                </a:solidFill>
+                <a:latin typeface="Calibri" pitchFamily="34" charset="0"/>
+                <a:ea typeface="Calibri" pitchFamily="34" charset="-122"/>
+                <a:cs typeface="Calibri" pitchFamily="34" charset="-120"/>
+              </a:rPr>
+              <a:t>The underwriting engine is pure and vendor-free: same inputs, same outcome, with typed error classification.</a:t>
+            </a:r>
+            <a:endParaRPr lang="en-US" sz="1200" dirty="0"/>
+          </a:p>
+        </p:txBody>
+      </p:sp>
+      <p:sp>
+        <p:nvSpPr>
+          <p:cNvPr id="14" name="Shape 10"/>
+          <p:cNvSpPr/>
+          <p:nvPr/>
+        </p:nvSpPr>
+        <p:spPr>
+          <a:xfrm>
+            <a:off x="640080" y="3977640"/>
+            <a:ext cx="10911535" cy="960120"/>
+          </a:xfrm>
+          <a:prstGeom prst="roundRect">
+            <a:avLst>
+              <a:gd name="adj" fmla="val 9524"/>
+            </a:avLst>
+          </a:prstGeom>
+          <a:solidFill>
+            <a:srgbClr val="F1F5F9"/>
+          </a:solidFill>
+          <a:ln/>
+        </p:spPr>
+      </p:sp>
+      <p:sp>
+        <p:nvSpPr>
+          <p:cNvPr id="15" name="Shape 11"/>
+          <p:cNvSpPr/>
+          <p:nvPr/>
+        </p:nvSpPr>
+        <p:spPr>
+          <a:xfrm>
+            <a:off x="896112" y="4197096"/>
+            <a:ext cx="530352" cy="530352"/>
+          </a:xfrm>
+          <a:prstGeom prst="ellipse">
+            <a:avLst/>
+          </a:prstGeom>
+          <a:solidFill>
+            <a:srgbClr val="1C3A8F"/>
+          </a:solidFill>
+          <a:ln/>
+        </p:spPr>
+      </p:sp>
+      <p:pic>
+        <p:nvPicPr>
+          <p:cNvPr id="16" name="Image 2" descr="preencoded.png">    </p:cNvPr>
+          <p:cNvPicPr>
+            <a:picLocks noChangeAspect="1"/>
+          </p:cNvPicPr>
+          <p:nvPr/>
+        </p:nvPicPr>
+        <p:blipFill>
+          <a:blip r:embed="rId3"/>
+          <a:stretch>
+            <a:fillRect/>
+          </a:stretch>
+        </p:blipFill>
+        <p:spPr>
+          <a:xfrm>
+            <a:off x="1044611" y="4345595"/>
+            <a:ext cx="233355" cy="233355"/>
+          </a:xfrm>
+          <a:prstGeom prst="rect">
+            <a:avLst/>
+          </a:prstGeom>
+        </p:spPr>
+      </p:pic>
+      <p:sp>
+        <p:nvSpPr>
+          <p:cNvPr id="17" name="Text 12"/>
+          <p:cNvSpPr/>
+          <p:nvPr/>
+        </p:nvSpPr>
+        <p:spPr>
+          <a:xfrm>
+            <a:off x="1691640" y="4087368"/>
+            <a:ext cx="3017520" cy="731520"/>
+          </a:xfrm>
+          <a:prstGeom prst="rect">
+            <a:avLst/>
+          </a:prstGeom>
+          <a:noFill/>
+          <a:ln/>
+        </p:spPr>
+        <p:txBody>
+          <a:bodyPr wrap="square" lIns="0" tIns="0" rIns="0" bIns="0" rtlCol="0" anchor="ctr"/>
+          <a:lstStyle/>
+          <a:p>
+            <a:pPr indent="0" marL="0">
+              <a:buNone/>
+            </a:pPr>
+            <a:r>
+              <a:rPr lang="en-US" sz="1400" b="1" dirty="0">
+                <a:solidFill>
+                  <a:srgbClr val="0F1729"/>
+                </a:solidFill>
+                <a:latin typeface="Calibri" pitchFamily="34" charset="0"/>
+                <a:ea typeface="Calibri" pitchFamily="34" charset="-122"/>
+                <a:cs typeface="Calibri" pitchFamily="34" charset="-120"/>
+              </a:rPr>
+              <a:t>Fannie Mae reference base</a:t>
+            </a:r>
+            <a:endParaRPr lang="en-US" sz="1400" dirty="0"/>
+          </a:p>
+        </p:txBody>
+      </p:sp>
+      <p:sp>
+        <p:nvSpPr>
+          <p:cNvPr id="18" name="Text 13"/>
+          <p:cNvSpPr/>
+          <p:nvPr/>
+        </p:nvSpPr>
+        <p:spPr>
+          <a:xfrm>
+            <a:off x="4846320" y="4087368"/>
+            <a:ext cx="6400800" cy="731520"/>
+          </a:xfrm>
+          <a:prstGeom prst="rect">
+            <a:avLst/>
+          </a:prstGeom>
+          <a:noFill/>
+          <a:ln/>
+        </p:spPr>
+        <p:txBody>
+          <a:bodyPr wrap="square" lIns="0" tIns="0" rIns="0" bIns="0" rtlCol="0" anchor="ctr"/>
+          <a:lstStyle/>
+          <a:p>
+            <a:pPr indent="0" marL="0">
+              <a:buNone/>
+            </a:pPr>
+            <a:r>
+              <a:rPr lang="en-US" sz="1200" dirty="0">
+                <a:solidFill>
+                  <a:srgbClr val="5B6472"/>
+                </a:solidFill>
+                <a:latin typeface="Calibri" pitchFamily="34" charset="0"/>
+                <a:ea typeface="Calibri" pitchFamily="34" charset="-122"/>
+                <a:cs typeface="Calibri" pitchFamily="34" charset="-120"/>
+              </a:rPr>
+              <a:t>MISMO 3.4 / ULDD Phase 5, UCD, Special Feature Codes and edit codes are grounded in the official spec set — terminology is verified, never invented.</a:t>
+            </a:r>
+            <a:endParaRPr lang="en-US" sz="1200" dirty="0"/>
+          </a:p>
+        </p:txBody>
+      </p:sp>
+      <p:sp>
+        <p:nvSpPr>
+          <p:cNvPr id="19" name="Shape 14"/>
+          <p:cNvSpPr/>
+          <p:nvPr/>
+        </p:nvSpPr>
+        <p:spPr>
+          <a:xfrm>
+            <a:off x="640080" y="5074920"/>
+            <a:ext cx="10911535" cy="960120"/>
+          </a:xfrm>
+          <a:prstGeom prst="roundRect">
+            <a:avLst>
+              <a:gd name="adj" fmla="val 9524"/>
+            </a:avLst>
+          </a:prstGeom>
+          <a:solidFill>
+            <a:srgbClr val="F1F5F9"/>
+          </a:solidFill>
+          <a:ln/>
+        </p:spPr>
+      </p:sp>
+      <p:sp>
+        <p:nvSpPr>
+          <p:cNvPr id="20" name="Shape 15"/>
+          <p:cNvSpPr/>
+          <p:nvPr/>
+        </p:nvSpPr>
+        <p:spPr>
+          <a:xfrm>
+            <a:off x="896112" y="5294376"/>
+            <a:ext cx="530352" cy="530352"/>
+          </a:xfrm>
+          <a:prstGeom prst="ellipse">
+            <a:avLst/>
+          </a:prstGeom>
+          <a:solidFill>
+            <a:srgbClr val="1C3A8F"/>
+          </a:solidFill>
+          <a:ln/>
+        </p:spPr>
+      </p:sp>
+      <p:pic>
+        <p:nvPicPr>
+          <p:cNvPr id="21" name="Image 3" descr="preencoded.png">    </p:cNvPr>
+          <p:cNvPicPr>
+            <a:picLocks noChangeAspect="1"/>
+          </p:cNvPicPr>
+          <p:nvPr/>
+        </p:nvPicPr>
+        <p:blipFill>
+          <a:blip r:embed="rId4"/>
+          <a:stretch>
+            <a:fillRect/>
+          </a:stretch>
+        </p:blipFill>
+        <p:spPr>
+          <a:xfrm>
             <a:off x="1044611" y="5442875"/>
             <a:ext cx="233355" cy="233355"/>
           </a:xfrm>
@@ -7635,7 +8845,7 @@
                 <a:ea typeface="Calibri" pitchFamily="34" charset="-122"/>
                 <a:cs typeface="Calibri" pitchFamily="34" charset="-120"/>
               </a:rPr>
-              <a:t>15</a:t>
+              <a:t>17</a:t>
             </a:r>
             <a:endParaRPr lang="en-US" sz="900" dirty="0"/>
           </a:p>

--- a/demo/lender-demo/Homiquity_Lender_Demo.pptx
+++ b/demo/lender-demo/Homiquity_Lender_Demo.pptx
@@ -7909,7 +7909,7 @@
                 <a:ea typeface="Calibri" pitchFamily="34" charset="-122"/>
                 <a:cs typeface="Calibri" pitchFamily="34" charset="-120"/>
               </a:rPr>
-              <a:t>[Founder name — TODO]</a:t>
+              <a:t>Ammre Barakat, Founder</a:t>
             </a:r>
             <a:endParaRPr lang="en-US" sz="1600" dirty="0"/>
           </a:p>
@@ -7926,7 +7926,7 @@
                 <a:ea typeface="Calibri" pitchFamily="34" charset="-122"/>
                 <a:cs typeface="Calibri" pitchFamily="34" charset="-120"/>
               </a:rPr>
-              <a:t>support@homiquity.com  ·  [phone — TODO]  ·  homiquity.com</a:t>
+              <a:t>support@homiquity.com  ·  (224) 400-0531  ·  homiquity.com</a:t>
             </a:r>
             <a:endParaRPr lang="en-US" sz="1600" dirty="0"/>
           </a:p>
